--- a/2026-06-27_Your_Own_AI_Assistant_OpenClaw/2026-06-27_Your_AI_Assistant_OpenClaw.pptx
+++ b/2026-06-27_Your_Own_AI_Assistant_OpenClaw/2026-06-27_Your_AI_Assistant_OpenClaw.pptx
@@ -24,6 +24,8 @@
     <p:sldId id="272" r:id="rId23"/>
     <p:sldId id="273" r:id="rId24"/>
     <p:sldId id="274" r:id="rId25"/>
+    <p:sldId id="275" r:id="rId26"/>
+    <p:sldId id="276" r:id="rId27"/>
   </p:sldIdLst>
   <p:sldSz cx="12188952" cy="6858000" type="screen4x3"/>
   <p:notesSz cx="6858000" cy="9144000"/>
@@ -3471,7 +3473,7 @@
               </a:defRPr>
             </a:pPr>
             <a:r>
-              <a:t>Your API Key Is a Secret 🔑</a:t>
+              <a:t>The Gateway = the Always-On Brain</a:t>
             </a:r>
           </a:p>
         </p:txBody>
@@ -3521,14 +3523,57 @@
       </p:sp>
       <p:sp>
         <p:nvSpPr>
-          <p:cNvPr id="5" name="TextBox 4"/>
+          <p:cNvPr id="5" name="Rounded Rectangle 4"/>
+          <p:cNvSpPr/>
+          <p:nvPr/>
+        </p:nvSpPr>
+        <p:spPr>
+          <a:xfrm>
+            <a:off x="914400" y="2194560"/>
+            <a:ext cx="4297680" cy="1828800"/>
+          </a:xfrm>
+          <a:prstGeom prst="roundRect">
+            <a:avLst/>
+          </a:prstGeom>
+          <a:solidFill>
+            <a:srgbClr val="1E3A5F"/>
+          </a:solidFill>
+          <a:ln>
+            <a:noFill/>
+          </a:ln>
+        </p:spPr>
+        <p:style>
+          <a:lnRef idx="1">
+            <a:schemeClr val="accent1"/>
+          </a:lnRef>
+          <a:fillRef idx="3">
+            <a:schemeClr val="accent1"/>
+          </a:fillRef>
+          <a:effectRef idx="2">
+            <a:schemeClr val="accent1"/>
+          </a:effectRef>
+          <a:fontRef idx="minor">
+            <a:schemeClr val="lt1"/>
+          </a:fontRef>
+        </p:style>
+        <p:txBody>
+          <a:bodyPr rtlCol="0" anchor="ctr"/>
+          <a:lstStyle/>
+          <a:p>
+            <a:pPr algn="ctr"/>
+          </a:p>
+        </p:txBody>
+      </p:sp>
+      <p:sp>
+        <p:nvSpPr>
+          <p:cNvPr id="6" name="TextBox 5"/>
           <p:cNvSpPr txBox="1"/>
           <p:nvPr/>
         </p:nvSpPr>
         <p:spPr>
           <a:xfrm>
-            <a:off x="731520" y="1508760"/>
-            <a:ext cx="10698480" cy="640080"/>
+            <a:off x="1051560" y="2359152"/>
+            <a:ext cx="4023360" cy="1554480"/>
           </a:xfrm>
           <a:prstGeom prst="rect">
             <a:avLst/>
@@ -3542,29 +3587,107 @@
           <a:lstStyle/>
           <a:p>
             <a:pPr algn="ctr">
-              <a:defRPr sz="2400" b="1">
-                <a:solidFill>
-                  <a:srgbClr val="1E3A5F"/>
-                </a:solidFill>
-                <a:latin typeface="Segoe UI"/>
-              </a:defRPr>
-            </a:pPr>
-            <a:r>
-              <a:t>Treat your API key like a password.</a:t>
-            </a:r>
-          </a:p>
-        </p:txBody>
-      </p:sp>
-      <p:sp>
-        <p:nvSpPr>
-          <p:cNvPr id="6" name="Rounded Rectangle 5"/>
+              <a:lnSpc>
+                <a:spcPct val="105000"/>
+              </a:lnSpc>
+              <a:defRPr sz="1500" b="1">
+                <a:solidFill>
+                  <a:srgbClr val="FFFFFF"/>
+                </a:solidFill>
+                <a:latin typeface="Segoe UI"/>
+              </a:defRPr>
+            </a:pPr>
+            <a:r>
+              <a:t>Terminal 1</a:t>
+            </a:r>
+          </a:p>
+          <a:p>
+            <a:pPr algn="ctr">
+              <a:lnSpc>
+                <a:spcPct val="105000"/>
+              </a:lnSpc>
+              <a:defRPr sz="1500" b="1">
+                <a:solidFill>
+                  <a:srgbClr val="FFFFFF"/>
+                </a:solidFill>
+                <a:latin typeface="Segoe UI"/>
+              </a:defRPr>
+            </a:pPr>
+            <a:r>
+              <a:t>openclaw gateway</a:t>
+            </a:r>
+          </a:p>
+          <a:p>
+            <a:pPr algn="ctr">
+              <a:lnSpc>
+                <a:spcPct val="105000"/>
+              </a:lnSpc>
+              <a:defRPr sz="1500" b="1">
+                <a:solidFill>
+                  <a:srgbClr val="FFFFFF"/>
+                </a:solidFill>
+                <a:latin typeface="Segoe UI"/>
+              </a:defRPr>
+            </a:pPr>
+            <a:r>
+              <a:t>(the brain — leave it running)</a:t>
+            </a:r>
+          </a:p>
+        </p:txBody>
+      </p:sp>
+      <p:sp>
+        <p:nvSpPr>
+          <p:cNvPr id="7" name="Right Arrow 6"/>
           <p:cNvSpPr/>
           <p:nvPr/>
         </p:nvSpPr>
         <p:spPr>
           <a:xfrm>
-            <a:off x="731520" y="2377440"/>
-            <a:ext cx="5257800" cy="2743200"/>
+            <a:off x="5577840" y="2788920"/>
+            <a:ext cx="640080" cy="640080"/>
+          </a:xfrm>
+          <a:prstGeom prst="rightArrow">
+            <a:avLst/>
+          </a:prstGeom>
+          <a:solidFill>
+            <a:srgbClr val="FF9933"/>
+          </a:solidFill>
+          <a:ln>
+            <a:noFill/>
+          </a:ln>
+        </p:spPr>
+        <p:style>
+          <a:lnRef idx="1">
+            <a:schemeClr val="accent1"/>
+          </a:lnRef>
+          <a:fillRef idx="3">
+            <a:schemeClr val="accent1"/>
+          </a:fillRef>
+          <a:effectRef idx="2">
+            <a:schemeClr val="accent1"/>
+          </a:effectRef>
+          <a:fontRef idx="minor">
+            <a:schemeClr val="lt1"/>
+          </a:fontRef>
+        </p:style>
+        <p:txBody>
+          <a:bodyPr rtlCol="0" anchor="ctr"/>
+          <a:lstStyle/>
+          <a:p>
+            <a:pPr algn="ctr"/>
+          </a:p>
+        </p:txBody>
+      </p:sp>
+      <p:sp>
+        <p:nvSpPr>
+          <p:cNvPr id="8" name="Rounded Rectangle 7"/>
+          <p:cNvSpPr/>
+          <p:nvPr/>
+        </p:nvSpPr>
+        <p:spPr>
+          <a:xfrm>
+            <a:off x="6949440" y="2194560"/>
+            <a:ext cx="4297680" cy="1828800"/>
           </a:xfrm>
           <a:prstGeom prst="roundRect">
             <a:avLst/>
@@ -3600,14 +3723,14 @@
       </p:sp>
       <p:sp>
         <p:nvSpPr>
-          <p:cNvPr id="7" name="TextBox 6"/>
+          <p:cNvPr id="9" name="TextBox 8"/>
           <p:cNvSpPr txBox="1"/>
           <p:nvPr/>
         </p:nvSpPr>
         <p:spPr>
           <a:xfrm>
-            <a:off x="960120" y="2542032"/>
-            <a:ext cx="4800600" cy="457200"/>
+            <a:off x="7086600" y="2359152"/>
+            <a:ext cx="4023360" cy="1554480"/>
           </a:xfrm>
           <a:prstGeom prst="rect">
             <a:avLst/>
@@ -3620,244 +3743,58 @@
           </a:bodyPr>
           <a:lstStyle/>
           <a:p>
-            <a:pPr algn="l">
-              <a:defRPr sz="1800" b="1">
-                <a:solidFill>
-                  <a:srgbClr val="FFFFFF"/>
-                </a:solidFill>
-                <a:latin typeface="Segoe UI"/>
-              </a:defRPr>
-            </a:pPr>
-            <a:r>
-              <a:t>✓ DO</a:t>
-            </a:r>
-          </a:p>
-        </p:txBody>
-      </p:sp>
-      <p:sp>
-        <p:nvSpPr>
-          <p:cNvPr id="8" name="TextBox 7"/>
-          <p:cNvSpPr txBox="1"/>
-          <p:nvPr/>
-        </p:nvSpPr>
-        <p:spPr>
-          <a:xfrm>
-            <a:off x="960120" y="3090672"/>
-            <a:ext cx="4800600" cy="1874519"/>
-          </a:xfrm>
-          <a:prstGeom prst="rect">
-            <a:avLst/>
-          </a:prstGeom>
-          <a:noFill/>
-        </p:spPr>
-        <p:txBody>
-          <a:bodyPr wrap="square">
-            <a:spAutoFit/>
-          </a:bodyPr>
-          <a:lstStyle/>
-          <a:p>
-            <a:pPr algn="l">
+            <a:pPr algn="ctr">
               <a:lnSpc>
-                <a:spcPct val="110000"/>
+                <a:spcPct val="105000"/>
               </a:lnSpc>
-              <a:defRPr sz="1600" b="0">
-                <a:solidFill>
-                  <a:srgbClr val="FFFFFF"/>
-                </a:solidFill>
-                <a:latin typeface="Segoe UI"/>
-              </a:defRPr>
-            </a:pPr>
-            <a:r>
-              <a:t>• Keep it private</a:t>
-            </a:r>
-          </a:p>
-          <a:p>
-            <a:pPr algn="l">
+              <a:defRPr sz="1500" b="1">
+                <a:solidFill>
+                  <a:srgbClr val="FFFFFF"/>
+                </a:solidFill>
+                <a:latin typeface="Segoe UI"/>
+              </a:defRPr>
+            </a:pPr>
+            <a:r>
+              <a:t>Terminal 2</a:t>
+            </a:r>
+          </a:p>
+          <a:p>
+            <a:pPr algn="ctr">
               <a:lnSpc>
-                <a:spcPct val="110000"/>
+                <a:spcPct val="105000"/>
               </a:lnSpc>
-              <a:defRPr sz="1600" b="0">
-                <a:solidFill>
-                  <a:srgbClr val="FFFFFF"/>
-                </a:solidFill>
-                <a:latin typeface="Segoe UI"/>
-              </a:defRPr>
-            </a:pPr>
-            <a:r>
-              <a:t>• Only use the class key</a:t>
-            </a:r>
-          </a:p>
-          <a:p>
-            <a:pPr algn="l">
+              <a:defRPr sz="1500" b="1">
+                <a:solidFill>
+                  <a:srgbClr val="FFFFFF"/>
+                </a:solidFill>
+                <a:latin typeface="Segoe UI"/>
+              </a:defRPr>
+            </a:pPr>
+            <a:r>
+              <a:t>openclaw chat</a:t>
+            </a:r>
+          </a:p>
+          <a:p>
+            <a:pPr algn="ctr">
               <a:lnSpc>
-                <a:spcPct val="110000"/>
+                <a:spcPct val="105000"/>
               </a:lnSpc>
-              <a:defRPr sz="1600" b="0">
-                <a:solidFill>
-                  <a:srgbClr val="FFFFFF"/>
-                </a:solidFill>
-                <a:latin typeface="Segoe UI"/>
-              </a:defRPr>
-            </a:pPr>
-            <a:r>
-              <a:t>• Ask the teacher if unsure</a:t>
-            </a:r>
-          </a:p>
-        </p:txBody>
-      </p:sp>
-      <p:sp>
-        <p:nvSpPr>
-          <p:cNvPr id="9" name="Rounded Rectangle 8"/>
-          <p:cNvSpPr/>
-          <p:nvPr/>
-        </p:nvSpPr>
-        <p:spPr>
-          <a:xfrm>
-            <a:off x="6172200" y="2377440"/>
-            <a:ext cx="5257800" cy="2743200"/>
-          </a:xfrm>
-          <a:prstGeom prst="roundRect">
-            <a:avLst/>
-          </a:prstGeom>
-          <a:solidFill>
-            <a:srgbClr val="F44336"/>
-          </a:solidFill>
-          <a:ln>
-            <a:noFill/>
-          </a:ln>
-        </p:spPr>
-        <p:style>
-          <a:lnRef idx="1">
-            <a:schemeClr val="accent1"/>
-          </a:lnRef>
-          <a:fillRef idx="3">
-            <a:schemeClr val="accent1"/>
-          </a:fillRef>
-          <a:effectRef idx="2">
-            <a:schemeClr val="accent1"/>
-          </a:effectRef>
-          <a:fontRef idx="minor">
-            <a:schemeClr val="lt1"/>
-          </a:fontRef>
-        </p:style>
-        <p:txBody>
-          <a:bodyPr rtlCol="0" anchor="ctr"/>
-          <a:lstStyle/>
-          <a:p>
-            <a:pPr algn="ctr"/>
-          </a:p>
-        </p:txBody>
-      </p:sp>
-      <p:sp>
-        <p:nvSpPr>
-          <p:cNvPr id="10" name="TextBox 9"/>
-          <p:cNvSpPr txBox="1"/>
-          <p:nvPr/>
-        </p:nvSpPr>
-        <p:spPr>
-          <a:xfrm>
-            <a:off x="6400800" y="2542032"/>
-            <a:ext cx="4800600" cy="457200"/>
-          </a:xfrm>
-          <a:prstGeom prst="rect">
-            <a:avLst/>
-          </a:prstGeom>
-          <a:noFill/>
-        </p:spPr>
-        <p:txBody>
-          <a:bodyPr wrap="square">
-            <a:spAutoFit/>
-          </a:bodyPr>
-          <a:lstStyle/>
-          <a:p>
-            <a:pPr algn="l">
-              <a:defRPr sz="1800" b="1">
-                <a:solidFill>
-                  <a:srgbClr val="FFFFFF"/>
-                </a:solidFill>
-                <a:latin typeface="Segoe UI"/>
-              </a:defRPr>
-            </a:pPr>
-            <a:r>
-              <a:t>✗ DON'T</a:t>
-            </a:r>
-          </a:p>
-        </p:txBody>
-      </p:sp>
-      <p:sp>
-        <p:nvSpPr>
-          <p:cNvPr id="11" name="TextBox 10"/>
-          <p:cNvSpPr txBox="1"/>
-          <p:nvPr/>
-        </p:nvSpPr>
-        <p:spPr>
-          <a:xfrm>
-            <a:off x="6400800" y="3090672"/>
-            <a:ext cx="4800600" cy="1874519"/>
-          </a:xfrm>
-          <a:prstGeom prst="rect">
-            <a:avLst/>
-          </a:prstGeom>
-          <a:noFill/>
-        </p:spPr>
-        <p:txBody>
-          <a:bodyPr wrap="square">
-            <a:spAutoFit/>
-          </a:bodyPr>
-          <a:lstStyle/>
-          <a:p>
-            <a:pPr algn="l">
-              <a:lnSpc>
-                <a:spcPct val="110000"/>
-              </a:lnSpc>
-              <a:defRPr sz="1600" b="0">
-                <a:solidFill>
-                  <a:srgbClr val="FFFFFF"/>
-                </a:solidFill>
-                <a:latin typeface="Segoe UI"/>
-              </a:defRPr>
-            </a:pPr>
-            <a:r>
-              <a:t>• Share or text it to friends</a:t>
-            </a:r>
-          </a:p>
-          <a:p>
-            <a:pPr algn="l">
-              <a:lnSpc>
-                <a:spcPct val="110000"/>
-              </a:lnSpc>
-              <a:defRPr sz="1600" b="0">
-                <a:solidFill>
-                  <a:srgbClr val="FFFFFF"/>
-                </a:solidFill>
-                <a:latin typeface="Segoe UI"/>
-              </a:defRPr>
-            </a:pPr>
-            <a:r>
-              <a:t>• Post it online</a:t>
-            </a:r>
-          </a:p>
-          <a:p>
-            <a:pPr algn="l">
-              <a:lnSpc>
-                <a:spcPct val="110000"/>
-              </a:lnSpc>
-              <a:defRPr sz="1600" b="0">
-                <a:solidFill>
-                  <a:srgbClr val="FFFFFF"/>
-                </a:solidFill>
-                <a:latin typeface="Segoe UI"/>
-              </a:defRPr>
-            </a:pPr>
-            <a:r>
-              <a:t>• Paste it anywhere public</a:t>
-            </a:r>
-          </a:p>
-        </p:txBody>
-      </p:sp>
-      <p:sp>
-        <p:nvSpPr>
-          <p:cNvPr id="12" name="Rounded Rectangle 11"/>
+              <a:defRPr sz="1500" b="1">
+                <a:solidFill>
+                  <a:srgbClr val="FFFFFF"/>
+                </a:solidFill>
+                <a:latin typeface="Segoe UI"/>
+              </a:defRPr>
+            </a:pPr>
+            <a:r>
+              <a:t>(where you talk to it)</a:t>
+            </a:r>
+          </a:p>
+        </p:txBody>
+      </p:sp>
+      <p:sp>
+        <p:nvSpPr>
+          <p:cNvPr id="10" name="Rounded Rectangle 9"/>
           <p:cNvSpPr/>
           <p:nvPr/>
         </p:nvSpPr>
@@ -3906,7 +3843,7 @@
               </a:defRPr>
             </a:pPr>
             <a:r>
-              <a:t>Never share it, post it, or paste it anywhere public.</a:t>
+              <a:t>One window thinks. One window talks. Close them to stop everything.</a:t>
             </a:r>
           </a:p>
         </p:txBody>
@@ -4003,7 +3940,7 @@
               </a:defRPr>
             </a:pPr>
             <a:r>
-              <a:t>Safety: Rules of the Road</a:t>
+              <a:t>OpenRouter: One Key, Many Models</a:t>
             </a:r>
           </a:p>
         </p:txBody>
@@ -4053,56 +3990,20 @@
       </p:sp>
       <p:sp>
         <p:nvSpPr>
-          <p:cNvPr id="5" name="TextBox 4"/>
-          <p:cNvSpPr txBox="1"/>
-          <p:nvPr/>
-        </p:nvSpPr>
-        <p:spPr>
-          <a:xfrm>
-            <a:off x="457200" y="868680"/>
-            <a:ext cx="11274552" cy="365760"/>
-          </a:xfrm>
-          <a:prstGeom prst="rect">
-            <a:avLst/>
-          </a:prstGeom>
-          <a:noFill/>
-        </p:spPr>
-        <p:txBody>
-          <a:bodyPr wrap="square">
-            <a:spAutoFit/>
-          </a:bodyPr>
-          <a:lstStyle/>
-          <a:p>
-            <a:pPr algn="l">
-              <a:defRPr sz="1600" b="0">
-                <a:solidFill>
-                  <a:srgbClr val="ADD8E6"/>
-                </a:solidFill>
-                <a:latin typeface="Segoe UI"/>
-              </a:defRPr>
-            </a:pPr>
-            <a:r>
-              <a:t>OpenClaw is powerful — use it carefully</a:t>
-            </a:r>
-          </a:p>
-        </p:txBody>
-      </p:sp>
-      <p:sp>
-        <p:nvSpPr>
-          <p:cNvPr id="6" name="Rounded Rectangle 5"/>
+          <p:cNvPr id="5" name="Rounded Rectangle 4"/>
           <p:cNvSpPr/>
           <p:nvPr/>
         </p:nvSpPr>
         <p:spPr>
           <a:xfrm>
-            <a:off x="548640" y="1554480"/>
-            <a:ext cx="5349240" cy="3749039"/>
+            <a:off x="548640" y="2286000"/>
+            <a:ext cx="3383280" cy="1645920"/>
           </a:xfrm>
           <a:prstGeom prst="roundRect">
             <a:avLst/>
           </a:prstGeom>
           <a:solidFill>
-            <a:srgbClr val="4CAF50"/>
+            <a:srgbClr val="3467A6"/>
           </a:solidFill>
           <a:ln>
             <a:noFill/>
@@ -4132,14 +4033,14 @@
       </p:sp>
       <p:sp>
         <p:nvSpPr>
-          <p:cNvPr id="7" name="TextBox 6"/>
+          <p:cNvPr id="6" name="TextBox 5"/>
           <p:cNvSpPr txBox="1"/>
           <p:nvPr/>
         </p:nvSpPr>
         <p:spPr>
           <a:xfrm>
-            <a:off x="777240" y="1719072"/>
-            <a:ext cx="4892040" cy="457200"/>
+            <a:off x="685800" y="2450592"/>
+            <a:ext cx="3108960" cy="1371600"/>
           </a:xfrm>
           <a:prstGeom prst="rect">
             <a:avLst/>
@@ -4152,123 +4053,55 @@
           </a:bodyPr>
           <a:lstStyle/>
           <a:p>
-            <a:pPr algn="l">
-              <a:defRPr sz="1800" b="1">
-                <a:solidFill>
-                  <a:srgbClr val="FFFFFF"/>
-                </a:solidFill>
-                <a:latin typeface="Segoe UI"/>
-              </a:defRPr>
-            </a:pPr>
-            <a:r>
-              <a:t>✓ Do</a:t>
-            </a:r>
-          </a:p>
-        </p:txBody>
-      </p:sp>
-      <p:sp>
-        <p:nvSpPr>
-          <p:cNvPr id="8" name="TextBox 7"/>
-          <p:cNvSpPr txBox="1"/>
-          <p:nvPr/>
-        </p:nvSpPr>
-        <p:spPr>
-          <a:xfrm>
-            <a:off x="777240" y="2267712"/>
-            <a:ext cx="4892040" cy="2880359"/>
-          </a:xfrm>
-          <a:prstGeom prst="rect">
-            <a:avLst/>
-          </a:prstGeom>
-          <a:noFill/>
-        </p:spPr>
-        <p:txBody>
-          <a:bodyPr wrap="square">
-            <a:spAutoFit/>
-          </a:bodyPr>
-          <a:lstStyle/>
-          <a:p>
-            <a:pPr algn="l">
+            <a:pPr algn="ctr">
               <a:lnSpc>
-                <a:spcPct val="110000"/>
+                <a:spcPct val="105000"/>
               </a:lnSpc>
-              <a:defRPr sz="1500" b="0">
-                <a:solidFill>
-                  <a:srgbClr val="FFFFFF"/>
-                </a:solidFill>
-                <a:latin typeface="Segoe UI"/>
-              </a:defRPr>
-            </a:pPr>
-            <a:r>
-              <a:t>• Read what it wants before approving</a:t>
-            </a:r>
-          </a:p>
-          <a:p>
-            <a:pPr algn="l">
+              <a:defRPr sz="1500" b="1">
+                <a:solidFill>
+                  <a:srgbClr val="FFFFFF"/>
+                </a:solidFill>
+                <a:latin typeface="Segoe UI"/>
+              </a:defRPr>
+            </a:pPr>
+            <a:r>
+              <a:t>Your OpenClaw</a:t>
+            </a:r>
+          </a:p>
+          <a:p>
+            <a:pPr algn="ctr">
               <a:lnSpc>
-                <a:spcPct val="110000"/>
+                <a:spcPct val="105000"/>
               </a:lnSpc>
-              <a:defRPr sz="1500" b="0">
-                <a:solidFill>
-                  <a:srgbClr val="FFFFFF"/>
-                </a:solidFill>
-                <a:latin typeface="Segoe UI"/>
-              </a:defRPr>
-            </a:pPr>
-            <a:r>
-              <a:t>• Keep it on localhost (your computer)</a:t>
-            </a:r>
-          </a:p>
-          <a:p>
-            <a:pPr algn="l">
-              <a:lnSpc>
-                <a:spcPct val="110000"/>
-              </a:lnSpc>
-              <a:defRPr sz="1500" b="0">
-                <a:solidFill>
-                  <a:srgbClr val="FFFFFF"/>
-                </a:solidFill>
-                <a:latin typeface="Segoe UI"/>
-              </a:defRPr>
-            </a:pPr>
-            <a:r>
-              <a:t>• Work in a fresh folder</a:t>
-            </a:r>
-          </a:p>
-          <a:p>
-            <a:pPr algn="l">
-              <a:lnSpc>
-                <a:spcPct val="110000"/>
-              </a:lnSpc>
-              <a:defRPr sz="1500" b="0">
-                <a:solidFill>
-                  <a:srgbClr val="FFFFFF"/>
-                </a:solidFill>
-                <a:latin typeface="Segoe UI"/>
-              </a:defRPr>
-            </a:pPr>
-            <a:r>
-              <a:t>• Stop the gateway when you're done</a:t>
-            </a:r>
-          </a:p>
-        </p:txBody>
-      </p:sp>
-      <p:sp>
-        <p:nvSpPr>
-          <p:cNvPr id="9" name="Rounded Rectangle 8"/>
+              <a:defRPr sz="1500" b="1">
+                <a:solidFill>
+                  <a:srgbClr val="FFFFFF"/>
+                </a:solidFill>
+                <a:latin typeface="Segoe UI"/>
+              </a:defRPr>
+            </a:pPr>
+            <a:r>
+              <a:t>assistant</a:t>
+            </a:r>
+          </a:p>
+        </p:txBody>
+      </p:sp>
+      <p:sp>
+        <p:nvSpPr>
+          <p:cNvPr id="7" name="Right Arrow 6"/>
           <p:cNvSpPr/>
           <p:nvPr/>
         </p:nvSpPr>
         <p:spPr>
           <a:xfrm>
-            <a:off x="6263640" y="1554480"/>
-            <a:ext cx="5349240" cy="3749039"/>
-          </a:xfrm>
-          <a:prstGeom prst="roundRect">
+            <a:off x="4114800" y="2788920"/>
+            <a:ext cx="640080" cy="640080"/>
+          </a:xfrm>
+          <a:prstGeom prst="rightArrow">
             <a:avLst/>
           </a:prstGeom>
           <a:solidFill>
-            <a:srgbClr val="F44336"/>
+            <a:srgbClr val="FF9933"/>
           </a:solidFill>
           <a:ln>
             <a:noFill/>
@@ -4298,143 +4131,20 @@
       </p:sp>
       <p:sp>
         <p:nvSpPr>
-          <p:cNvPr id="10" name="TextBox 9"/>
-          <p:cNvSpPr txBox="1"/>
-          <p:nvPr/>
-        </p:nvSpPr>
-        <p:spPr>
-          <a:xfrm>
-            <a:off x="6492240" y="1719072"/>
-            <a:ext cx="4892040" cy="457200"/>
-          </a:xfrm>
-          <a:prstGeom prst="rect">
-            <a:avLst/>
-          </a:prstGeom>
-          <a:noFill/>
-        </p:spPr>
-        <p:txBody>
-          <a:bodyPr wrap="square">
-            <a:spAutoFit/>
-          </a:bodyPr>
-          <a:lstStyle/>
-          <a:p>
-            <a:pPr algn="l">
-              <a:defRPr sz="1800" b="1">
-                <a:solidFill>
-                  <a:srgbClr val="FFFFFF"/>
-                </a:solidFill>
-                <a:latin typeface="Segoe UI"/>
-              </a:defRPr>
-            </a:pPr>
-            <a:r>
-              <a:t>✗ Don't</a:t>
-            </a:r>
-          </a:p>
-        </p:txBody>
-      </p:sp>
-      <p:sp>
-        <p:nvSpPr>
-          <p:cNvPr id="11" name="TextBox 10"/>
-          <p:cNvSpPr txBox="1"/>
-          <p:nvPr/>
-        </p:nvSpPr>
-        <p:spPr>
-          <a:xfrm>
-            <a:off x="6492240" y="2267712"/>
-            <a:ext cx="4892040" cy="2880359"/>
-          </a:xfrm>
-          <a:prstGeom prst="rect">
-            <a:avLst/>
-          </a:prstGeom>
-          <a:noFill/>
-        </p:spPr>
-        <p:txBody>
-          <a:bodyPr wrap="square">
-            <a:spAutoFit/>
-          </a:bodyPr>
-          <a:lstStyle/>
-          <a:p>
-            <a:pPr algn="l">
-              <a:lnSpc>
-                <a:spcPct val="110000"/>
-              </a:lnSpc>
-              <a:defRPr sz="1500" b="0">
-                <a:solidFill>
-                  <a:srgbClr val="FFFFFF"/>
-                </a:solidFill>
-                <a:latin typeface="Segoe UI"/>
-              </a:defRPr>
-            </a:pPr>
-            <a:r>
-              <a:t>• Never share your API key</a:t>
-            </a:r>
-          </a:p>
-          <a:p>
-            <a:pPr algn="l">
-              <a:lnSpc>
-                <a:spcPct val="110000"/>
-              </a:lnSpc>
-              <a:defRPr sz="1500" b="0">
-                <a:solidFill>
-                  <a:srgbClr val="FFFFFF"/>
-                </a:solidFill>
-                <a:latin typeface="Segoe UI"/>
-              </a:defRPr>
-            </a:pPr>
-            <a:r>
-              <a:t>• Don't approve commands you don't get</a:t>
-            </a:r>
-          </a:p>
-          <a:p>
-            <a:pPr algn="l">
-              <a:lnSpc>
-                <a:spcPct val="110000"/>
-              </a:lnSpc>
-              <a:defRPr sz="1500" b="0">
-                <a:solidFill>
-                  <a:srgbClr val="FFFFFF"/>
-                </a:solidFill>
-                <a:latin typeface="Segoe UI"/>
-              </a:defRPr>
-            </a:pPr>
-            <a:r>
-              <a:t>• Don't install random skills</a:t>
-            </a:r>
-          </a:p>
-          <a:p>
-            <a:pPr algn="l">
-              <a:lnSpc>
-                <a:spcPct val="110000"/>
-              </a:lnSpc>
-              <a:defRPr sz="1500" b="0">
-                <a:solidFill>
-                  <a:srgbClr val="FFFFFF"/>
-                </a:solidFill>
-                <a:latin typeface="Segoe UI"/>
-              </a:defRPr>
-            </a:pPr>
-            <a:r>
-              <a:t>• Don't let it touch files you care about</a:t>
-            </a:r>
-          </a:p>
-        </p:txBody>
-      </p:sp>
-      <p:sp>
-        <p:nvSpPr>
-          <p:cNvPr id="12" name="Rounded Rectangle 11"/>
+          <p:cNvPr id="8" name="Rounded Rectangle 7"/>
           <p:cNvSpPr/>
           <p:nvPr/>
         </p:nvSpPr>
         <p:spPr>
           <a:xfrm>
-            <a:off x="914400" y="5760720"/>
-            <a:ext cx="10360152" cy="640080"/>
+            <a:off x="4846320" y="2286000"/>
+            <a:ext cx="2468880" cy="1645920"/>
           </a:xfrm>
           <a:prstGeom prst="roundRect">
             <a:avLst/>
           </a:prstGeom>
           <a:solidFill>
-            <a:srgbClr val="1E3A5F"/>
+            <a:srgbClr val="9C27B0"/>
           </a:solidFill>
           <a:ln>
             <a:noFill/>
@@ -4455,6 +4165,281 @@
           </a:fontRef>
         </p:style>
         <p:txBody>
+          <a:bodyPr rtlCol="0" anchor="ctr"/>
+          <a:lstStyle/>
+          <a:p>
+            <a:pPr algn="ctr"/>
+          </a:p>
+        </p:txBody>
+      </p:sp>
+      <p:sp>
+        <p:nvSpPr>
+          <p:cNvPr id="9" name="TextBox 8"/>
+          <p:cNvSpPr txBox="1"/>
+          <p:nvPr/>
+        </p:nvSpPr>
+        <p:spPr>
+          <a:xfrm>
+            <a:off x="4983480" y="2450592"/>
+            <a:ext cx="2194560" cy="1371600"/>
+          </a:xfrm>
+          <a:prstGeom prst="rect">
+            <a:avLst/>
+          </a:prstGeom>
+          <a:noFill/>
+        </p:spPr>
+        <p:txBody>
+          <a:bodyPr wrap="square">
+            <a:spAutoFit/>
+          </a:bodyPr>
+          <a:lstStyle/>
+          <a:p>
+            <a:pPr algn="ctr">
+              <a:lnSpc>
+                <a:spcPct val="105000"/>
+              </a:lnSpc>
+              <a:defRPr sz="1500" b="1">
+                <a:solidFill>
+                  <a:srgbClr val="FFFFFF"/>
+                </a:solidFill>
+                <a:latin typeface="Segoe UI"/>
+              </a:defRPr>
+            </a:pPr>
+            <a:r>
+              <a:t>OpenRouter</a:t>
+            </a:r>
+          </a:p>
+          <a:p>
+            <a:pPr algn="ctr">
+              <a:lnSpc>
+                <a:spcPct val="105000"/>
+              </a:lnSpc>
+              <a:defRPr sz="1500" b="1">
+                <a:solidFill>
+                  <a:srgbClr val="FFFFFF"/>
+                </a:solidFill>
+                <a:latin typeface="Segoe UI"/>
+              </a:defRPr>
+            </a:pPr>
+            <a:r>
+              <a:t>(one API key)</a:t>
+            </a:r>
+          </a:p>
+        </p:txBody>
+      </p:sp>
+      <p:sp>
+        <p:nvSpPr>
+          <p:cNvPr id="10" name="Right Arrow 9"/>
+          <p:cNvSpPr/>
+          <p:nvPr/>
+        </p:nvSpPr>
+        <p:spPr>
+          <a:xfrm>
+            <a:off x="7498079" y="2788920"/>
+            <a:ext cx="640080" cy="640080"/>
+          </a:xfrm>
+          <a:prstGeom prst="rightArrow">
+            <a:avLst/>
+          </a:prstGeom>
+          <a:solidFill>
+            <a:srgbClr val="FF9933"/>
+          </a:solidFill>
+          <a:ln>
+            <a:noFill/>
+          </a:ln>
+        </p:spPr>
+        <p:style>
+          <a:lnRef idx="1">
+            <a:schemeClr val="accent1"/>
+          </a:lnRef>
+          <a:fillRef idx="3">
+            <a:schemeClr val="accent1"/>
+          </a:fillRef>
+          <a:effectRef idx="2">
+            <a:schemeClr val="accent1"/>
+          </a:effectRef>
+          <a:fontRef idx="minor">
+            <a:schemeClr val="lt1"/>
+          </a:fontRef>
+        </p:style>
+        <p:txBody>
+          <a:bodyPr rtlCol="0" anchor="ctr"/>
+          <a:lstStyle/>
+          <a:p>
+            <a:pPr algn="ctr"/>
+          </a:p>
+        </p:txBody>
+      </p:sp>
+      <p:sp>
+        <p:nvSpPr>
+          <p:cNvPr id="11" name="Rounded Rectangle 10"/>
+          <p:cNvSpPr/>
+          <p:nvPr/>
+        </p:nvSpPr>
+        <p:spPr>
+          <a:xfrm>
+            <a:off x="8229600" y="2286000"/>
+            <a:ext cx="3383280" cy="1645920"/>
+          </a:xfrm>
+          <a:prstGeom prst="roundRect">
+            <a:avLst/>
+          </a:prstGeom>
+          <a:solidFill>
+            <a:srgbClr val="009688"/>
+          </a:solidFill>
+          <a:ln>
+            <a:noFill/>
+          </a:ln>
+        </p:spPr>
+        <p:style>
+          <a:lnRef idx="1">
+            <a:schemeClr val="accent1"/>
+          </a:lnRef>
+          <a:fillRef idx="3">
+            <a:schemeClr val="accent1"/>
+          </a:fillRef>
+          <a:effectRef idx="2">
+            <a:schemeClr val="accent1"/>
+          </a:effectRef>
+          <a:fontRef idx="minor">
+            <a:schemeClr val="lt1"/>
+          </a:fontRef>
+        </p:style>
+        <p:txBody>
+          <a:bodyPr rtlCol="0" anchor="ctr"/>
+          <a:lstStyle/>
+          <a:p>
+            <a:pPr algn="ctr"/>
+          </a:p>
+        </p:txBody>
+      </p:sp>
+      <p:sp>
+        <p:nvSpPr>
+          <p:cNvPr id="12" name="TextBox 11"/>
+          <p:cNvSpPr txBox="1"/>
+          <p:nvPr/>
+        </p:nvSpPr>
+        <p:spPr>
+          <a:xfrm>
+            <a:off x="8366760" y="2450592"/>
+            <a:ext cx="3108960" cy="1371600"/>
+          </a:xfrm>
+          <a:prstGeom prst="rect">
+            <a:avLst/>
+          </a:prstGeom>
+          <a:noFill/>
+        </p:spPr>
+        <p:txBody>
+          <a:bodyPr wrap="square">
+            <a:spAutoFit/>
+          </a:bodyPr>
+          <a:lstStyle/>
+          <a:p>
+            <a:pPr algn="ctr">
+              <a:lnSpc>
+                <a:spcPct val="105000"/>
+              </a:lnSpc>
+              <a:defRPr sz="1500" b="1">
+                <a:solidFill>
+                  <a:srgbClr val="FFFFFF"/>
+                </a:solidFill>
+                <a:latin typeface="Segoe UI"/>
+              </a:defRPr>
+            </a:pPr>
+            <a:r>
+              <a:t>Many AI models</a:t>
+            </a:r>
+          </a:p>
+          <a:p>
+            <a:pPr algn="ctr">
+              <a:lnSpc>
+                <a:spcPct val="105000"/>
+              </a:lnSpc>
+              <a:defRPr sz="1500" b="1">
+                <a:solidFill>
+                  <a:srgbClr val="FFFFFF"/>
+                </a:solidFill>
+                <a:latin typeface="Segoe UI"/>
+              </a:defRPr>
+            </a:pPr>
+            <a:r>
+              <a:t>DeepSeek, and more</a:t>
+            </a:r>
+          </a:p>
+        </p:txBody>
+      </p:sp>
+      <p:sp>
+        <p:nvSpPr>
+          <p:cNvPr id="13" name="TextBox 12"/>
+          <p:cNvSpPr txBox="1"/>
+          <p:nvPr/>
+        </p:nvSpPr>
+        <p:spPr>
+          <a:xfrm>
+            <a:off x="548640" y="4297680"/>
+            <a:ext cx="11064240" cy="548640"/>
+          </a:xfrm>
+          <a:prstGeom prst="rect">
+            <a:avLst/>
+          </a:prstGeom>
+          <a:noFill/>
+        </p:spPr>
+        <p:txBody>
+          <a:bodyPr wrap="square">
+            <a:spAutoFit/>
+          </a:bodyPr>
+          <a:lstStyle/>
+          <a:p>
+            <a:pPr algn="ctr">
+              <a:defRPr sz="1800" b="1">
+                <a:solidFill>
+                  <a:srgbClr val="424242"/>
+                </a:solidFill>
+                <a:latin typeface="Segoe UI"/>
+              </a:defRPr>
+            </a:pPr>
+            <a:r>
+              <a:t>Today's model: DeepSeek V4 Flash — fast and low-cost.</a:t>
+            </a:r>
+          </a:p>
+        </p:txBody>
+      </p:sp>
+      <p:sp>
+        <p:nvSpPr>
+          <p:cNvPr id="14" name="Rounded Rectangle 13"/>
+          <p:cNvSpPr/>
+          <p:nvPr/>
+        </p:nvSpPr>
+        <p:spPr>
+          <a:xfrm>
+            <a:off x="914400" y="5760720"/>
+            <a:ext cx="10360152" cy="640080"/>
+          </a:xfrm>
+          <a:prstGeom prst="roundRect">
+            <a:avLst/>
+          </a:prstGeom>
+          <a:solidFill>
+            <a:srgbClr val="FF9933"/>
+          </a:solidFill>
+          <a:ln>
+            <a:noFill/>
+          </a:ln>
+        </p:spPr>
+        <p:style>
+          <a:lnRef idx="1">
+            <a:schemeClr val="accent1"/>
+          </a:lnRef>
+          <a:fillRef idx="3">
+            <a:schemeClr val="accent1"/>
+          </a:fillRef>
+          <a:effectRef idx="2">
+            <a:schemeClr val="accent1"/>
+          </a:effectRef>
+          <a:fontRef idx="minor">
+            <a:schemeClr val="lt1"/>
+          </a:fontRef>
+        </p:style>
+        <p:txBody>
           <a:bodyPr rtlCol="0" anchor="ctr" wrap="square"/>
           <a:lstStyle/>
           <a:p>
@@ -4470,7 +4455,7 @@
               </a:defRPr>
             </a:pPr>
             <a:r>
-              <a:t>Read before you approve — you're always in control.</a:t>
+              <a:t>One API key unlocks lots of different AI models.</a:t>
             </a:r>
           </a:p>
         </p:txBody>
@@ -4567,7 +4552,7 @@
               </a:defRPr>
             </a:pPr>
             <a:r>
-              <a:t>You Approve Every Action</a:t>
+              <a:t>Your API Key Is a Secret 🔑</a:t>
             </a:r>
           </a:p>
         </p:txBody>
@@ -4623,8 +4608,8 @@
         </p:nvSpPr>
         <p:spPr>
           <a:xfrm>
-            <a:off x="731520" y="1417320"/>
-            <a:ext cx="10698480" cy="457200"/>
+            <a:off x="731520" y="1508760"/>
+            <a:ext cx="10698480" cy="640080"/>
           </a:xfrm>
           <a:prstGeom prst="rect">
             <a:avLst/>
@@ -4637,16 +4622,16 @@
           </a:bodyPr>
           <a:lstStyle/>
           <a:p>
-            <a:pPr algn="l">
-              <a:defRPr sz="1700" b="0">
-                <a:solidFill>
-                  <a:srgbClr val="424242"/>
-                </a:solidFill>
-                <a:latin typeface="Segoe UI"/>
-              </a:defRPr>
-            </a:pPr>
-            <a:r>
-              <a:t>When it wants to DO something, it asks first. This is 'ask' mode (the default).</a:t>
+            <a:pPr algn="ctr">
+              <a:defRPr sz="2400" b="1">
+                <a:solidFill>
+                  <a:srgbClr val="1E3A5F"/>
+                </a:solidFill>
+                <a:latin typeface="Segoe UI"/>
+              </a:defRPr>
+            </a:pPr>
+            <a:r>
+              <a:t>Treat your API key like a password.</a:t>
             </a:r>
           </a:p>
         </p:txBody>
@@ -4659,14 +4644,14 @@
         </p:nvSpPr>
         <p:spPr>
           <a:xfrm>
-            <a:off x="731520" y="2011680"/>
-            <a:ext cx="10698480" cy="2468880"/>
+            <a:off x="731520" y="2377440"/>
+            <a:ext cx="5257800" cy="2743200"/>
           </a:xfrm>
           <a:prstGeom prst="roundRect">
             <a:avLst/>
           </a:prstGeom>
           <a:solidFill>
-            <a:srgbClr val="121A24"/>
+            <a:srgbClr val="4CAF50"/>
           </a:solidFill>
           <a:ln>
             <a:noFill/>
@@ -4702,8 +4687,8 @@
         </p:nvSpPr>
         <p:spPr>
           <a:xfrm>
-            <a:off x="960120" y="2176272"/>
-            <a:ext cx="10241280" cy="2194560"/>
+            <a:off x="960120" y="2542032"/>
+            <a:ext cx="4800600" cy="457200"/>
           </a:xfrm>
           <a:prstGeom prst="rect">
             <a:avLst/>
@@ -4717,63 +4702,15 @@
           <a:lstStyle/>
           <a:p>
             <a:pPr algn="l">
-              <a:lnSpc>
-                <a:spcPct val="115000"/>
-              </a:lnSpc>
-              <a:defRPr sz="1600" b="0">
-                <a:solidFill>
-                  <a:srgbClr val="9BE38A"/>
-                </a:solidFill>
-                <a:latin typeface="Consolas"/>
-              </a:defRPr>
-            </a:pPr>
-            <a:r>
-              <a:t>Agent wants to execute:</a:t>
-            </a:r>
-          </a:p>
-          <a:p>
-            <a:pPr algn="l">
-              <a:lnSpc>
-                <a:spcPct val="115000"/>
-              </a:lnSpc>
-              <a:defRPr sz="1600" b="0">
-                <a:solidFill>
-                  <a:srgbClr val="9BE38A"/>
-                </a:solidFill>
-                <a:latin typeface="Consolas"/>
-              </a:defRPr>
-            </a:pPr>
-            <a:r>
-              <a:t>    $ echo "hello" &gt; hello.txt</a:t>
-            </a:r>
-          </a:p>
-          <a:p>
-            <a:pPr algn="l">
-              <a:lnSpc>
-                <a:spcPct val="115000"/>
-              </a:lnSpc>
-              <a:defRPr sz="1600" b="0">
-                <a:solidFill>
-                  <a:srgbClr val="9BE38A"/>
-                </a:solidFill>
-                <a:latin typeface="Consolas"/>
-              </a:defRPr>
-            </a:pPr>
-          </a:p>
-          <a:p>
-            <a:pPr algn="l">
-              <a:lnSpc>
-                <a:spcPct val="115000"/>
-              </a:lnSpc>
-              <a:defRPr sz="1600" b="0">
-                <a:solidFill>
-                  <a:srgbClr val="9BE38A"/>
-                </a:solidFill>
-                <a:latin typeface="Consolas"/>
-              </a:defRPr>
-            </a:pPr>
-            <a:r>
-              <a:t>    [ approve ]     [ deny ]</a:t>
+              <a:defRPr sz="1800" b="1">
+                <a:solidFill>
+                  <a:srgbClr val="FFFFFF"/>
+                </a:solidFill>
+                <a:latin typeface="Segoe UI"/>
+              </a:defRPr>
+            </a:pPr>
+            <a:r>
+              <a:t>✓ DO</a:t>
             </a:r>
           </a:p>
         </p:txBody>
@@ -4786,8 +4723,8 @@
         </p:nvSpPr>
         <p:spPr>
           <a:xfrm>
-            <a:off x="731520" y="4663440"/>
-            <a:ext cx="10698480" cy="548640"/>
+            <a:off x="960120" y="3090672"/>
+            <a:ext cx="4800600" cy="1874519"/>
           </a:xfrm>
           <a:prstGeom prst="rect">
             <a:avLst/>
@@ -4801,15 +4738,50 @@
           <a:lstStyle/>
           <a:p>
             <a:pPr algn="l">
-              <a:defRPr sz="1600" b="1">
-                <a:solidFill>
-                  <a:srgbClr val="424242"/>
-                </a:solidFill>
-                <a:latin typeface="Segoe UI"/>
-              </a:defRPr>
-            </a:pPr>
-            <a:r>
-              <a:t>Read it. If you understand it and it's safe — approve. If not — deny and ask.</a:t>
+              <a:lnSpc>
+                <a:spcPct val="110000"/>
+              </a:lnSpc>
+              <a:defRPr sz="1600" b="0">
+                <a:solidFill>
+                  <a:srgbClr val="FFFFFF"/>
+                </a:solidFill>
+                <a:latin typeface="Segoe UI"/>
+              </a:defRPr>
+            </a:pPr>
+            <a:r>
+              <a:t>• Keep it private</a:t>
+            </a:r>
+          </a:p>
+          <a:p>
+            <a:pPr algn="l">
+              <a:lnSpc>
+                <a:spcPct val="110000"/>
+              </a:lnSpc>
+              <a:defRPr sz="1600" b="0">
+                <a:solidFill>
+                  <a:srgbClr val="FFFFFF"/>
+                </a:solidFill>
+                <a:latin typeface="Segoe UI"/>
+              </a:defRPr>
+            </a:pPr>
+            <a:r>
+              <a:t>• Only use the class key</a:t>
+            </a:r>
+          </a:p>
+          <a:p>
+            <a:pPr algn="l">
+              <a:lnSpc>
+                <a:spcPct val="110000"/>
+              </a:lnSpc>
+              <a:defRPr sz="1600" b="0">
+                <a:solidFill>
+                  <a:srgbClr val="FFFFFF"/>
+                </a:solidFill>
+                <a:latin typeface="Segoe UI"/>
+              </a:defRPr>
+            </a:pPr>
+            <a:r>
+              <a:t>• Ask the teacher if unsure</a:t>
             </a:r>
           </a:p>
         </p:txBody>
@@ -4822,14 +4794,14 @@
         </p:nvSpPr>
         <p:spPr>
           <a:xfrm>
-            <a:off x="914400" y="5760720"/>
-            <a:ext cx="10360152" cy="640080"/>
+            <a:off x="6172200" y="2377440"/>
+            <a:ext cx="5257800" cy="2743200"/>
           </a:xfrm>
           <a:prstGeom prst="roundRect">
             <a:avLst/>
           </a:prstGeom>
           <a:solidFill>
-            <a:srgbClr val="009688"/>
+            <a:srgbClr val="F44336"/>
           </a:solidFill>
           <a:ln>
             <a:noFill/>
@@ -4850,6 +4822,156 @@
           </a:fontRef>
         </p:style>
         <p:txBody>
+          <a:bodyPr rtlCol="0" anchor="ctr"/>
+          <a:lstStyle/>
+          <a:p>
+            <a:pPr algn="ctr"/>
+          </a:p>
+        </p:txBody>
+      </p:sp>
+      <p:sp>
+        <p:nvSpPr>
+          <p:cNvPr id="10" name="TextBox 9"/>
+          <p:cNvSpPr txBox="1"/>
+          <p:nvPr/>
+        </p:nvSpPr>
+        <p:spPr>
+          <a:xfrm>
+            <a:off x="6400800" y="2542032"/>
+            <a:ext cx="4800600" cy="457200"/>
+          </a:xfrm>
+          <a:prstGeom prst="rect">
+            <a:avLst/>
+          </a:prstGeom>
+          <a:noFill/>
+        </p:spPr>
+        <p:txBody>
+          <a:bodyPr wrap="square">
+            <a:spAutoFit/>
+          </a:bodyPr>
+          <a:lstStyle/>
+          <a:p>
+            <a:pPr algn="l">
+              <a:defRPr sz="1800" b="1">
+                <a:solidFill>
+                  <a:srgbClr val="FFFFFF"/>
+                </a:solidFill>
+                <a:latin typeface="Segoe UI"/>
+              </a:defRPr>
+            </a:pPr>
+            <a:r>
+              <a:t>✗ DON'T</a:t>
+            </a:r>
+          </a:p>
+        </p:txBody>
+      </p:sp>
+      <p:sp>
+        <p:nvSpPr>
+          <p:cNvPr id="11" name="TextBox 10"/>
+          <p:cNvSpPr txBox="1"/>
+          <p:nvPr/>
+        </p:nvSpPr>
+        <p:spPr>
+          <a:xfrm>
+            <a:off x="6400800" y="3090672"/>
+            <a:ext cx="4800600" cy="1874519"/>
+          </a:xfrm>
+          <a:prstGeom prst="rect">
+            <a:avLst/>
+          </a:prstGeom>
+          <a:noFill/>
+        </p:spPr>
+        <p:txBody>
+          <a:bodyPr wrap="square">
+            <a:spAutoFit/>
+          </a:bodyPr>
+          <a:lstStyle/>
+          <a:p>
+            <a:pPr algn="l">
+              <a:lnSpc>
+                <a:spcPct val="110000"/>
+              </a:lnSpc>
+              <a:defRPr sz="1600" b="0">
+                <a:solidFill>
+                  <a:srgbClr val="FFFFFF"/>
+                </a:solidFill>
+                <a:latin typeface="Segoe UI"/>
+              </a:defRPr>
+            </a:pPr>
+            <a:r>
+              <a:t>• Share or text it to friends</a:t>
+            </a:r>
+          </a:p>
+          <a:p>
+            <a:pPr algn="l">
+              <a:lnSpc>
+                <a:spcPct val="110000"/>
+              </a:lnSpc>
+              <a:defRPr sz="1600" b="0">
+                <a:solidFill>
+                  <a:srgbClr val="FFFFFF"/>
+                </a:solidFill>
+                <a:latin typeface="Segoe UI"/>
+              </a:defRPr>
+            </a:pPr>
+            <a:r>
+              <a:t>• Post it online</a:t>
+            </a:r>
+          </a:p>
+          <a:p>
+            <a:pPr algn="l">
+              <a:lnSpc>
+                <a:spcPct val="110000"/>
+              </a:lnSpc>
+              <a:defRPr sz="1600" b="0">
+                <a:solidFill>
+                  <a:srgbClr val="FFFFFF"/>
+                </a:solidFill>
+                <a:latin typeface="Segoe UI"/>
+              </a:defRPr>
+            </a:pPr>
+            <a:r>
+              <a:t>• Paste it anywhere public</a:t>
+            </a:r>
+          </a:p>
+        </p:txBody>
+      </p:sp>
+      <p:sp>
+        <p:nvSpPr>
+          <p:cNvPr id="12" name="Rounded Rectangle 11"/>
+          <p:cNvSpPr/>
+          <p:nvPr/>
+        </p:nvSpPr>
+        <p:spPr>
+          <a:xfrm>
+            <a:off x="914400" y="5760720"/>
+            <a:ext cx="10360152" cy="640080"/>
+          </a:xfrm>
+          <a:prstGeom prst="roundRect">
+            <a:avLst/>
+          </a:prstGeom>
+          <a:solidFill>
+            <a:srgbClr val="1E3A5F"/>
+          </a:solidFill>
+          <a:ln>
+            <a:noFill/>
+          </a:ln>
+        </p:spPr>
+        <p:style>
+          <a:lnRef idx="1">
+            <a:schemeClr val="accent1"/>
+          </a:lnRef>
+          <a:fillRef idx="3">
+            <a:schemeClr val="accent1"/>
+          </a:fillRef>
+          <a:effectRef idx="2">
+            <a:schemeClr val="accent1"/>
+          </a:effectRef>
+          <a:fontRef idx="minor">
+            <a:schemeClr val="lt1"/>
+          </a:fontRef>
+        </p:style>
+        <p:txBody>
           <a:bodyPr rtlCol="0" anchor="ctr" wrap="square"/>
           <a:lstStyle/>
           <a:p>
@@ -4865,7 +4987,7 @@
               </a:defRPr>
             </a:pPr>
             <a:r>
-              <a:t>You are always in control of what your assistant does.</a:t>
+              <a:t>Never share it, post it, or paste it anywhere public.</a:t>
             </a:r>
           </a:p>
         </p:txBody>
@@ -4962,7 +5084,7 @@
               </a:defRPr>
             </a:pPr>
             <a:r>
-              <a:t>It Remembers You</a:t>
+              <a:t>Safety: Rules of the Road</a:t>
             </a:r>
           </a:p>
         </p:txBody>
@@ -5012,20 +5134,56 @@
       </p:sp>
       <p:sp>
         <p:nvSpPr>
-          <p:cNvPr id="5" name="Rounded Rectangle 4"/>
+          <p:cNvPr id="5" name="TextBox 4"/>
+          <p:cNvSpPr txBox="1"/>
+          <p:nvPr/>
+        </p:nvSpPr>
+        <p:spPr>
+          <a:xfrm>
+            <a:off x="457200" y="868680"/>
+            <a:ext cx="11274552" cy="365760"/>
+          </a:xfrm>
+          <a:prstGeom prst="rect">
+            <a:avLst/>
+          </a:prstGeom>
+          <a:noFill/>
+        </p:spPr>
+        <p:txBody>
+          <a:bodyPr wrap="square">
+            <a:spAutoFit/>
+          </a:bodyPr>
+          <a:lstStyle/>
+          <a:p>
+            <a:pPr algn="l">
+              <a:defRPr sz="1600" b="0">
+                <a:solidFill>
+                  <a:srgbClr val="ADD8E6"/>
+                </a:solidFill>
+                <a:latin typeface="Segoe UI"/>
+              </a:defRPr>
+            </a:pPr>
+            <a:r>
+              <a:t>OpenClaw is powerful — use it carefully</a:t>
+            </a:r>
+          </a:p>
+        </p:txBody>
+      </p:sp>
+      <p:sp>
+        <p:nvSpPr>
+          <p:cNvPr id="6" name="Rounded Rectangle 5"/>
           <p:cNvSpPr/>
           <p:nvPr/>
         </p:nvSpPr>
         <p:spPr>
           <a:xfrm>
-            <a:off x="548640" y="2286000"/>
-            <a:ext cx="3383280" cy="1645920"/>
+            <a:off x="548640" y="1554480"/>
+            <a:ext cx="5349240" cy="3749039"/>
           </a:xfrm>
           <a:prstGeom prst="roundRect">
             <a:avLst/>
           </a:prstGeom>
           <a:solidFill>
-            <a:srgbClr val="3467A6"/>
+            <a:srgbClr val="4CAF50"/>
           </a:solidFill>
           <a:ln>
             <a:noFill/>
@@ -5055,14 +5213,14 @@
       </p:sp>
       <p:sp>
         <p:nvSpPr>
-          <p:cNvPr id="6" name="TextBox 5"/>
+          <p:cNvPr id="7" name="TextBox 6"/>
           <p:cNvSpPr txBox="1"/>
           <p:nvPr/>
         </p:nvSpPr>
         <p:spPr>
           <a:xfrm>
-            <a:off x="685800" y="2450592"/>
-            <a:ext cx="3108960" cy="1371600"/>
+            <a:off x="777240" y="1719072"/>
+            <a:ext cx="4892040" cy="457200"/>
           </a:xfrm>
           <a:prstGeom prst="rect">
             <a:avLst/>
@@ -5075,55 +5233,123 @@
           </a:bodyPr>
           <a:lstStyle/>
           <a:p>
-            <a:pPr algn="ctr">
+            <a:pPr algn="l">
+              <a:defRPr sz="1800" b="1">
+                <a:solidFill>
+                  <a:srgbClr val="FFFFFF"/>
+                </a:solidFill>
+                <a:latin typeface="Segoe UI"/>
+              </a:defRPr>
+            </a:pPr>
+            <a:r>
+              <a:t>✓ Do</a:t>
+            </a:r>
+          </a:p>
+        </p:txBody>
+      </p:sp>
+      <p:sp>
+        <p:nvSpPr>
+          <p:cNvPr id="8" name="TextBox 7"/>
+          <p:cNvSpPr txBox="1"/>
+          <p:nvPr/>
+        </p:nvSpPr>
+        <p:spPr>
+          <a:xfrm>
+            <a:off x="777240" y="2267712"/>
+            <a:ext cx="4892040" cy="2880359"/>
+          </a:xfrm>
+          <a:prstGeom prst="rect">
+            <a:avLst/>
+          </a:prstGeom>
+          <a:noFill/>
+        </p:spPr>
+        <p:txBody>
+          <a:bodyPr wrap="square">
+            <a:spAutoFit/>
+          </a:bodyPr>
+          <a:lstStyle/>
+          <a:p>
+            <a:pPr algn="l">
               <a:lnSpc>
-                <a:spcPct val="105000"/>
+                <a:spcPct val="110000"/>
               </a:lnSpc>
-              <a:defRPr sz="1500" b="1">
-                <a:solidFill>
-                  <a:srgbClr val="FFFFFF"/>
-                </a:solidFill>
-                <a:latin typeface="Segoe UI"/>
-              </a:defRPr>
-            </a:pPr>
-            <a:r>
-              <a:t>You tell it a fact</a:t>
-            </a:r>
-          </a:p>
-          <a:p>
-            <a:pPr algn="ctr">
+              <a:defRPr sz="1500" b="0">
+                <a:solidFill>
+                  <a:srgbClr val="FFFFFF"/>
+                </a:solidFill>
+                <a:latin typeface="Segoe UI"/>
+              </a:defRPr>
+            </a:pPr>
+            <a:r>
+              <a:t>• Read what it wants before approving</a:t>
+            </a:r>
+          </a:p>
+          <a:p>
+            <a:pPr algn="l">
               <a:lnSpc>
-                <a:spcPct val="105000"/>
+                <a:spcPct val="110000"/>
               </a:lnSpc>
-              <a:defRPr sz="1500" b="1">
-                <a:solidFill>
-                  <a:srgbClr val="FFFFFF"/>
-                </a:solidFill>
-                <a:latin typeface="Segoe UI"/>
-              </a:defRPr>
-            </a:pPr>
-            <a:r>
-              <a:t>"My team is the Sharks"</a:t>
-            </a:r>
-          </a:p>
-        </p:txBody>
-      </p:sp>
-      <p:sp>
-        <p:nvSpPr>
-          <p:cNvPr id="7" name="Right Arrow 6"/>
+              <a:defRPr sz="1500" b="0">
+                <a:solidFill>
+                  <a:srgbClr val="FFFFFF"/>
+                </a:solidFill>
+                <a:latin typeface="Segoe UI"/>
+              </a:defRPr>
+            </a:pPr>
+            <a:r>
+              <a:t>• Keep it on localhost (your computer)</a:t>
+            </a:r>
+          </a:p>
+          <a:p>
+            <a:pPr algn="l">
+              <a:lnSpc>
+                <a:spcPct val="110000"/>
+              </a:lnSpc>
+              <a:defRPr sz="1500" b="0">
+                <a:solidFill>
+                  <a:srgbClr val="FFFFFF"/>
+                </a:solidFill>
+                <a:latin typeface="Segoe UI"/>
+              </a:defRPr>
+            </a:pPr>
+            <a:r>
+              <a:t>• Work in a fresh folder</a:t>
+            </a:r>
+          </a:p>
+          <a:p>
+            <a:pPr algn="l">
+              <a:lnSpc>
+                <a:spcPct val="110000"/>
+              </a:lnSpc>
+              <a:defRPr sz="1500" b="0">
+                <a:solidFill>
+                  <a:srgbClr val="FFFFFF"/>
+                </a:solidFill>
+                <a:latin typeface="Segoe UI"/>
+              </a:defRPr>
+            </a:pPr>
+            <a:r>
+              <a:t>• Stop the gateway when you're done</a:t>
+            </a:r>
+          </a:p>
+        </p:txBody>
+      </p:sp>
+      <p:sp>
+        <p:nvSpPr>
+          <p:cNvPr id="9" name="Rounded Rectangle 8"/>
           <p:cNvSpPr/>
           <p:nvPr/>
         </p:nvSpPr>
         <p:spPr>
           <a:xfrm>
-            <a:off x="4114800" y="2788920"/>
-            <a:ext cx="640080" cy="640080"/>
-          </a:xfrm>
-          <a:prstGeom prst="rightArrow">
+            <a:off x="6263640" y="1554480"/>
+            <a:ext cx="5349240" cy="3749039"/>
+          </a:xfrm>
+          <a:prstGeom prst="roundRect">
             <a:avLst/>
           </a:prstGeom>
           <a:solidFill>
-            <a:srgbClr val="FF9933"/>
+            <a:srgbClr val="F44336"/>
           </a:solidFill>
           <a:ln>
             <a:noFill/>
@@ -5153,57 +5379,14 @@
       </p:sp>
       <p:sp>
         <p:nvSpPr>
-          <p:cNvPr id="8" name="Rounded Rectangle 7"/>
-          <p:cNvSpPr/>
-          <p:nvPr/>
-        </p:nvSpPr>
-        <p:spPr>
-          <a:xfrm>
-            <a:off x="4846320" y="2286000"/>
-            <a:ext cx="2468880" cy="1645920"/>
-          </a:xfrm>
-          <a:prstGeom prst="roundRect">
-            <a:avLst/>
-          </a:prstGeom>
-          <a:solidFill>
-            <a:srgbClr val="9C27B0"/>
-          </a:solidFill>
-          <a:ln>
-            <a:noFill/>
-          </a:ln>
-        </p:spPr>
-        <p:style>
-          <a:lnRef idx="1">
-            <a:schemeClr val="accent1"/>
-          </a:lnRef>
-          <a:fillRef idx="3">
-            <a:schemeClr val="accent1"/>
-          </a:fillRef>
-          <a:effectRef idx="2">
-            <a:schemeClr val="accent1"/>
-          </a:effectRef>
-          <a:fontRef idx="minor">
-            <a:schemeClr val="lt1"/>
-          </a:fontRef>
-        </p:style>
-        <p:txBody>
-          <a:bodyPr rtlCol="0" anchor="ctr"/>
-          <a:lstStyle/>
-          <a:p>
-            <a:pPr algn="ctr"/>
-          </a:p>
-        </p:txBody>
-      </p:sp>
-      <p:sp>
-        <p:nvSpPr>
-          <p:cNvPr id="9" name="TextBox 8"/>
+          <p:cNvPr id="10" name="TextBox 9"/>
           <p:cNvSpPr txBox="1"/>
           <p:nvPr/>
         </p:nvSpPr>
         <p:spPr>
           <a:xfrm>
-            <a:off x="4983480" y="2450592"/>
-            <a:ext cx="2194560" cy="1371600"/>
+            <a:off x="6492240" y="1719072"/>
+            <a:ext cx="4892040" cy="457200"/>
           </a:xfrm>
           <a:prstGeom prst="rect">
             <a:avLst/>
@@ -5216,135 +5399,30 @@
           </a:bodyPr>
           <a:lstStyle/>
           <a:p>
-            <a:pPr algn="ctr">
-              <a:lnSpc>
-                <a:spcPct val="105000"/>
-              </a:lnSpc>
-              <a:defRPr sz="1500" b="1">
-                <a:solidFill>
-                  <a:srgbClr val="FFFFFF"/>
-                </a:solidFill>
-                <a:latin typeface="Segoe UI"/>
-              </a:defRPr>
-            </a:pPr>
-            <a:r>
-              <a:t>It saves it</a:t>
-            </a:r>
-          </a:p>
-          <a:p>
-            <a:pPr algn="ctr">
-              <a:lnSpc>
-                <a:spcPct val="105000"/>
-              </a:lnSpc>
-              <a:defRPr sz="1500" b="1">
-                <a:solidFill>
-                  <a:srgbClr val="FFFFFF"/>
-                </a:solidFill>
-                <a:latin typeface="Segoe UI"/>
-              </a:defRPr>
-            </a:pPr>
-            <a:r>
-              <a:t>to a memory file</a:t>
-            </a:r>
-          </a:p>
-        </p:txBody>
-      </p:sp>
-      <p:sp>
-        <p:nvSpPr>
-          <p:cNvPr id="10" name="Right Arrow 9"/>
-          <p:cNvSpPr/>
-          <p:nvPr/>
-        </p:nvSpPr>
-        <p:spPr>
-          <a:xfrm>
-            <a:off x="7498079" y="2788920"/>
-            <a:ext cx="640080" cy="640080"/>
-          </a:xfrm>
-          <a:prstGeom prst="rightArrow">
-            <a:avLst/>
-          </a:prstGeom>
-          <a:solidFill>
-            <a:srgbClr val="FF9933"/>
-          </a:solidFill>
-          <a:ln>
-            <a:noFill/>
-          </a:ln>
-        </p:spPr>
-        <p:style>
-          <a:lnRef idx="1">
-            <a:schemeClr val="accent1"/>
-          </a:lnRef>
-          <a:fillRef idx="3">
-            <a:schemeClr val="accent1"/>
-          </a:fillRef>
-          <a:effectRef idx="2">
-            <a:schemeClr val="accent1"/>
-          </a:effectRef>
-          <a:fontRef idx="minor">
-            <a:schemeClr val="lt1"/>
-          </a:fontRef>
-        </p:style>
-        <p:txBody>
-          <a:bodyPr rtlCol="0" anchor="ctr"/>
-          <a:lstStyle/>
-          <a:p>
-            <a:pPr algn="ctr"/>
-          </a:p>
-        </p:txBody>
-      </p:sp>
-      <p:sp>
-        <p:nvSpPr>
-          <p:cNvPr id="11" name="Rounded Rectangle 10"/>
-          <p:cNvSpPr/>
-          <p:nvPr/>
-        </p:nvSpPr>
-        <p:spPr>
-          <a:xfrm>
-            <a:off x="8229600" y="2286000"/>
-            <a:ext cx="3383280" cy="1645920"/>
-          </a:xfrm>
-          <a:prstGeom prst="roundRect">
-            <a:avLst/>
-          </a:prstGeom>
-          <a:solidFill>
-            <a:srgbClr val="009688"/>
-          </a:solidFill>
-          <a:ln>
-            <a:noFill/>
-          </a:ln>
-        </p:spPr>
-        <p:style>
-          <a:lnRef idx="1">
-            <a:schemeClr val="accent1"/>
-          </a:lnRef>
-          <a:fillRef idx="3">
-            <a:schemeClr val="accent1"/>
-          </a:fillRef>
-          <a:effectRef idx="2">
-            <a:schemeClr val="accent1"/>
-          </a:effectRef>
-          <a:fontRef idx="minor">
-            <a:schemeClr val="lt1"/>
-          </a:fontRef>
-        </p:style>
-        <p:txBody>
-          <a:bodyPr rtlCol="0" anchor="ctr"/>
-          <a:lstStyle/>
-          <a:p>
-            <a:pPr algn="ctr"/>
-          </a:p>
-        </p:txBody>
-      </p:sp>
-      <p:sp>
-        <p:nvSpPr>
-          <p:cNvPr id="12" name="TextBox 11"/>
+            <a:pPr algn="l">
+              <a:defRPr sz="1800" b="1">
+                <a:solidFill>
+                  <a:srgbClr val="FFFFFF"/>
+                </a:solidFill>
+                <a:latin typeface="Segoe UI"/>
+              </a:defRPr>
+            </a:pPr>
+            <a:r>
+              <a:t>✗ Don't</a:t>
+            </a:r>
+          </a:p>
+        </p:txBody>
+      </p:sp>
+      <p:sp>
+        <p:nvSpPr>
+          <p:cNvPr id="11" name="TextBox 10"/>
           <p:cNvSpPr txBox="1"/>
           <p:nvPr/>
         </p:nvSpPr>
         <p:spPr>
           <a:xfrm>
-            <a:off x="8366760" y="2450592"/>
-            <a:ext cx="3108960" cy="1371600"/>
+            <a:off x="6492240" y="2267712"/>
+            <a:ext cx="4892040" cy="2880359"/>
           </a:xfrm>
           <a:prstGeom prst="rect">
             <a:avLst/>
@@ -5357,42 +5435,74 @@
           </a:bodyPr>
           <a:lstStyle/>
           <a:p>
-            <a:pPr algn="ctr">
+            <a:pPr algn="l">
               <a:lnSpc>
-                <a:spcPct val="105000"/>
+                <a:spcPct val="110000"/>
               </a:lnSpc>
-              <a:defRPr sz="1500" b="1">
-                <a:solidFill>
-                  <a:srgbClr val="FFFFFF"/>
-                </a:solidFill>
-                <a:latin typeface="Segoe UI"/>
-              </a:defRPr>
-            </a:pPr>
-            <a:r>
-              <a:t>Next time</a:t>
-            </a:r>
-          </a:p>
-          <a:p>
-            <a:pPr algn="ctr">
+              <a:defRPr sz="1500" b="0">
+                <a:solidFill>
+                  <a:srgbClr val="FFFFFF"/>
+                </a:solidFill>
+                <a:latin typeface="Segoe UI"/>
+              </a:defRPr>
+            </a:pPr>
+            <a:r>
+              <a:t>• Never share your API key</a:t>
+            </a:r>
+          </a:p>
+          <a:p>
+            <a:pPr algn="l">
               <a:lnSpc>
-                <a:spcPct val="105000"/>
+                <a:spcPct val="110000"/>
               </a:lnSpc>
-              <a:defRPr sz="1500" b="1">
-                <a:solidFill>
-                  <a:srgbClr val="FFFFFF"/>
-                </a:solidFill>
-                <a:latin typeface="Segoe UI"/>
-              </a:defRPr>
-            </a:pPr>
-            <a:r>
-              <a:t>it still knows you</a:t>
-            </a:r>
-          </a:p>
-        </p:txBody>
-      </p:sp>
-      <p:sp>
-        <p:nvSpPr>
-          <p:cNvPr id="13" name="Rounded Rectangle 12"/>
+              <a:defRPr sz="1500" b="0">
+                <a:solidFill>
+                  <a:srgbClr val="FFFFFF"/>
+                </a:solidFill>
+                <a:latin typeface="Segoe UI"/>
+              </a:defRPr>
+            </a:pPr>
+            <a:r>
+              <a:t>• Don't approve commands you don't get</a:t>
+            </a:r>
+          </a:p>
+          <a:p>
+            <a:pPr algn="l">
+              <a:lnSpc>
+                <a:spcPct val="110000"/>
+              </a:lnSpc>
+              <a:defRPr sz="1500" b="0">
+                <a:solidFill>
+                  <a:srgbClr val="FFFFFF"/>
+                </a:solidFill>
+                <a:latin typeface="Segoe UI"/>
+              </a:defRPr>
+            </a:pPr>
+            <a:r>
+              <a:t>• Don't install random skills</a:t>
+            </a:r>
+          </a:p>
+          <a:p>
+            <a:pPr algn="l">
+              <a:lnSpc>
+                <a:spcPct val="110000"/>
+              </a:lnSpc>
+              <a:defRPr sz="1500" b="0">
+                <a:solidFill>
+                  <a:srgbClr val="FFFFFF"/>
+                </a:solidFill>
+                <a:latin typeface="Segoe UI"/>
+              </a:defRPr>
+            </a:pPr>
+            <a:r>
+              <a:t>• Don't let it touch files you care about</a:t>
+            </a:r>
+          </a:p>
+        </p:txBody>
+      </p:sp>
+      <p:sp>
+        <p:nvSpPr>
+          <p:cNvPr id="12" name="Rounded Rectangle 11"/>
           <p:cNvSpPr/>
           <p:nvPr/>
         </p:nvSpPr>
@@ -5441,7 +5551,7 @@
               </a:defRPr>
             </a:pPr>
             <a:r>
-              <a:t>Memory = notes the assistant keeps on your computer.</a:t>
+              <a:t>Read before you approve — you're always in control.</a:t>
             </a:r>
           </a:p>
         </p:txBody>
@@ -5538,7 +5648,7 @@
               </a:defRPr>
             </a:pPr>
             <a:r>
-              <a:t>The Heartbeat: Acting On Its Own</a:t>
+              <a:t>You Approve Every Action</a:t>
             </a:r>
           </a:p>
         </p:txBody>
@@ -5594,8 +5704,8 @@
         </p:nvSpPr>
         <p:spPr>
           <a:xfrm>
-            <a:off x="731520" y="1463040"/>
-            <a:ext cx="10698480" cy="548640"/>
+            <a:off x="731520" y="1417320"/>
+            <a:ext cx="10698480" cy="457200"/>
           </a:xfrm>
           <a:prstGeom prst="rect">
             <a:avLst/>
@@ -5617,7 +5727,7 @@
               </a:defRPr>
             </a:pPr>
             <a:r>
-              <a:t>A real assistant can check things and act on a timer — even without being asked.</a:t>
+              <a:t>When it wants to DO something, it asks first. This is 'ask' mode (the default).</a:t>
             </a:r>
           </a:p>
         </p:txBody>
@@ -5630,14 +5740,14 @@
         </p:nvSpPr>
         <p:spPr>
           <a:xfrm>
-            <a:off x="731520" y="2194560"/>
-            <a:ext cx="5257800" cy="2651760"/>
+            <a:off x="731520" y="2011680"/>
+            <a:ext cx="10698480" cy="2468880"/>
           </a:xfrm>
           <a:prstGeom prst="roundRect">
             <a:avLst/>
           </a:prstGeom>
           <a:solidFill>
-            <a:srgbClr val="3467A6"/>
+            <a:srgbClr val="121A24"/>
           </a:solidFill>
           <a:ln>
             <a:noFill/>
@@ -5673,8 +5783,8 @@
         </p:nvSpPr>
         <p:spPr>
           <a:xfrm>
-            <a:off x="960120" y="2359152"/>
-            <a:ext cx="4800600" cy="457200"/>
+            <a:off x="960120" y="2176272"/>
+            <a:ext cx="10241280" cy="2194560"/>
           </a:xfrm>
           <a:prstGeom prst="rect">
             <a:avLst/>
@@ -5688,15 +5798,63 @@
           <a:lstStyle/>
           <a:p>
             <a:pPr algn="l">
-              <a:defRPr sz="1800" b="1">
-                <a:solidFill>
-                  <a:srgbClr val="FFFFFF"/>
-                </a:solidFill>
-                <a:latin typeface="Segoe UI"/>
-              </a:defRPr>
-            </a:pPr>
-            <a:r>
-              <a:t>Heartbeat ON</a:t>
+              <a:lnSpc>
+                <a:spcPct val="115000"/>
+              </a:lnSpc>
+              <a:defRPr sz="1600" b="0">
+                <a:solidFill>
+                  <a:srgbClr val="9BE38A"/>
+                </a:solidFill>
+                <a:latin typeface="Consolas"/>
+              </a:defRPr>
+            </a:pPr>
+            <a:r>
+              <a:t>Agent wants to execute:</a:t>
+            </a:r>
+          </a:p>
+          <a:p>
+            <a:pPr algn="l">
+              <a:lnSpc>
+                <a:spcPct val="115000"/>
+              </a:lnSpc>
+              <a:defRPr sz="1600" b="0">
+                <a:solidFill>
+                  <a:srgbClr val="9BE38A"/>
+                </a:solidFill>
+                <a:latin typeface="Consolas"/>
+              </a:defRPr>
+            </a:pPr>
+            <a:r>
+              <a:t>    $ echo "hello" &gt; hello.txt</a:t>
+            </a:r>
+          </a:p>
+          <a:p>
+            <a:pPr algn="l">
+              <a:lnSpc>
+                <a:spcPct val="115000"/>
+              </a:lnSpc>
+              <a:defRPr sz="1600" b="0">
+                <a:solidFill>
+                  <a:srgbClr val="9BE38A"/>
+                </a:solidFill>
+                <a:latin typeface="Consolas"/>
+              </a:defRPr>
+            </a:pPr>
+          </a:p>
+          <a:p>
+            <a:pPr algn="l">
+              <a:lnSpc>
+                <a:spcPct val="115000"/>
+              </a:lnSpc>
+              <a:defRPr sz="1600" b="0">
+                <a:solidFill>
+                  <a:srgbClr val="9BE38A"/>
+                </a:solidFill>
+                <a:latin typeface="Consolas"/>
+              </a:defRPr>
+            </a:pPr>
+            <a:r>
+              <a:t>    [ approve ]     [ deny ]</a:t>
             </a:r>
           </a:p>
         </p:txBody>
@@ -5709,8 +5867,8 @@
         </p:nvSpPr>
         <p:spPr>
           <a:xfrm>
-            <a:off x="960120" y="2907791"/>
-            <a:ext cx="4800600" cy="1783080"/>
+            <a:off x="731520" y="4663440"/>
+            <a:ext cx="10698480" cy="548640"/>
           </a:xfrm>
           <a:prstGeom prst="rect">
             <a:avLst/>
@@ -5724,50 +5882,15 @@
           <a:lstStyle/>
           <a:p>
             <a:pPr algn="l">
-              <a:lnSpc>
-                <a:spcPct val="110000"/>
-              </a:lnSpc>
-              <a:defRPr sz="1500" b="0">
-                <a:solidFill>
-                  <a:srgbClr val="FFFFFF"/>
-                </a:solidFill>
-                <a:latin typeface="Segoe UI"/>
-              </a:defRPr>
-            </a:pPr>
-            <a:r>
-              <a:t>Proactive 24/7.</a:t>
-            </a:r>
-          </a:p>
-          <a:p>
-            <a:pPr algn="l">
-              <a:lnSpc>
-                <a:spcPct val="110000"/>
-              </a:lnSpc>
-              <a:defRPr sz="1500" b="0">
-                <a:solidFill>
-                  <a:srgbClr val="FFFFFF"/>
-                </a:solidFill>
-                <a:latin typeface="Segoe UI"/>
-              </a:defRPr>
-            </a:pPr>
-            <a:r>
-              <a:t>Checks tasks every 30 min</a:t>
-            </a:r>
-          </a:p>
-          <a:p>
-            <a:pPr algn="l">
-              <a:lnSpc>
-                <a:spcPct val="110000"/>
-              </a:lnSpc>
-              <a:defRPr sz="1500" b="0">
-                <a:solidFill>
-                  <a:srgbClr val="FFFFFF"/>
-                </a:solidFill>
-                <a:latin typeface="Segoe UI"/>
-              </a:defRPr>
-            </a:pPr>
-            <a:r>
-              <a:t>and acts on its own.</a:t>
+              <a:defRPr sz="1600" b="1">
+                <a:solidFill>
+                  <a:srgbClr val="424242"/>
+                </a:solidFill>
+                <a:latin typeface="Segoe UI"/>
+              </a:defRPr>
+            </a:pPr>
+            <a:r>
+              <a:t>Read it. If you understand it and it's safe — approve. If not — deny and ask.</a:t>
             </a:r>
           </a:p>
         </p:txBody>
@@ -5780,14 +5903,14 @@
         </p:nvSpPr>
         <p:spPr>
           <a:xfrm>
-            <a:off x="6172200" y="2194560"/>
-            <a:ext cx="5257800" cy="2651760"/>
+            <a:off x="914400" y="5760720"/>
+            <a:ext cx="10360152" cy="640080"/>
           </a:xfrm>
           <a:prstGeom prst="roundRect">
             <a:avLst/>
           </a:prstGeom>
           <a:solidFill>
-            <a:srgbClr val="FF9933"/>
+            <a:srgbClr val="009688"/>
           </a:solidFill>
           <a:ln>
             <a:noFill/>
@@ -5808,156 +5931,6 @@
           </a:fontRef>
         </p:style>
         <p:txBody>
-          <a:bodyPr rtlCol="0" anchor="ctr"/>
-          <a:lstStyle/>
-          <a:p>
-            <a:pPr algn="ctr"/>
-          </a:p>
-        </p:txBody>
-      </p:sp>
-      <p:sp>
-        <p:nvSpPr>
-          <p:cNvPr id="10" name="TextBox 9"/>
-          <p:cNvSpPr txBox="1"/>
-          <p:nvPr/>
-        </p:nvSpPr>
-        <p:spPr>
-          <a:xfrm>
-            <a:off x="6400800" y="2359152"/>
-            <a:ext cx="4800600" cy="457200"/>
-          </a:xfrm>
-          <a:prstGeom prst="rect">
-            <a:avLst/>
-          </a:prstGeom>
-          <a:noFill/>
-        </p:spPr>
-        <p:txBody>
-          <a:bodyPr wrap="square">
-            <a:spAutoFit/>
-          </a:bodyPr>
-          <a:lstStyle/>
-          <a:p>
-            <a:pPr algn="l">
-              <a:defRPr sz="1800" b="1">
-                <a:solidFill>
-                  <a:srgbClr val="FFFFFF"/>
-                </a:solidFill>
-                <a:latin typeface="Segoe UI"/>
-              </a:defRPr>
-            </a:pPr>
-            <a:r>
-              <a:t>Heartbeat OFF (class)</a:t>
-            </a:r>
-          </a:p>
-        </p:txBody>
-      </p:sp>
-      <p:sp>
-        <p:nvSpPr>
-          <p:cNvPr id="11" name="TextBox 10"/>
-          <p:cNvSpPr txBox="1"/>
-          <p:nvPr/>
-        </p:nvSpPr>
-        <p:spPr>
-          <a:xfrm>
-            <a:off x="6400800" y="2907791"/>
-            <a:ext cx="4800600" cy="1783080"/>
-          </a:xfrm>
-          <a:prstGeom prst="rect">
-            <a:avLst/>
-          </a:prstGeom>
-          <a:noFill/>
-        </p:spPr>
-        <p:txBody>
-          <a:bodyPr wrap="square">
-            <a:spAutoFit/>
-          </a:bodyPr>
-          <a:lstStyle/>
-          <a:p>
-            <a:pPr algn="l">
-              <a:lnSpc>
-                <a:spcPct val="110000"/>
-              </a:lnSpc>
-              <a:defRPr sz="1500" b="0">
-                <a:solidFill>
-                  <a:srgbClr val="FFFFFF"/>
-                </a:solidFill>
-                <a:latin typeface="Segoe UI"/>
-              </a:defRPr>
-            </a:pPr>
-            <a:r>
-              <a:t>Acts only when you ask.</a:t>
-            </a:r>
-          </a:p>
-          <a:p>
-            <a:pPr algn="l">
-              <a:lnSpc>
-                <a:spcPct val="110000"/>
-              </a:lnSpc>
-              <a:defRPr sz="1500" b="0">
-                <a:solidFill>
-                  <a:srgbClr val="FFFFFF"/>
-                </a:solidFill>
-                <a:latin typeface="Segoe UI"/>
-              </a:defRPr>
-            </a:pPr>
-            <a:r>
-              <a:t>Keeps things safe and</a:t>
-            </a:r>
-          </a:p>
-          <a:p>
-            <a:pPr algn="l">
-              <a:lnSpc>
-                <a:spcPct val="110000"/>
-              </a:lnSpc>
-              <a:defRPr sz="1500" b="0">
-                <a:solidFill>
-                  <a:srgbClr val="FFFFFF"/>
-                </a:solidFill>
-                <a:latin typeface="Segoe UI"/>
-              </a:defRPr>
-            </a:pPr>
-            <a:r>
-              <a:t>saves our credits.</a:t>
-            </a:r>
-          </a:p>
-        </p:txBody>
-      </p:sp>
-      <p:sp>
-        <p:nvSpPr>
-          <p:cNvPr id="12" name="Rounded Rectangle 11"/>
-          <p:cNvSpPr/>
-          <p:nvPr/>
-        </p:nvSpPr>
-        <p:spPr>
-          <a:xfrm>
-            <a:off x="914400" y="5760720"/>
-            <a:ext cx="10360152" cy="640080"/>
-          </a:xfrm>
-          <a:prstGeom prst="roundRect">
-            <a:avLst/>
-          </a:prstGeom>
-          <a:solidFill>
-            <a:srgbClr val="1E3A5F"/>
-          </a:solidFill>
-          <a:ln>
-            <a:noFill/>
-          </a:ln>
-        </p:spPr>
-        <p:style>
-          <a:lnRef idx="1">
-            <a:schemeClr val="accent1"/>
-          </a:lnRef>
-          <a:fillRef idx="3">
-            <a:schemeClr val="accent1"/>
-          </a:fillRef>
-          <a:effectRef idx="2">
-            <a:schemeClr val="accent1"/>
-          </a:effectRef>
-          <a:fontRef idx="minor">
-            <a:schemeClr val="lt1"/>
-          </a:fontRef>
-        </p:style>
-        <p:txBody>
           <a:bodyPr rtlCol="0" anchor="ctr" wrap="square"/>
           <a:lstStyle/>
           <a:p>
@@ -5973,7 +5946,7 @@
               </a:defRPr>
             </a:pPr>
             <a:r>
-              <a:t>In class we keep the heartbeat OFF — it acts only when you chat.</a:t>
+              <a:t>You are always in control of what your assistant does.</a:t>
             </a:r>
           </a:p>
         </p:txBody>
@@ -6070,7 +6043,7 @@
               </a:defRPr>
             </a:pPr>
             <a:r>
-              <a:t>Your Turn — Today's Missions</a:t>
+              <a:t>It Remembers You</a:t>
             </a:r>
           </a:p>
         </p:txBody>
@@ -6120,141 +6093,16 @@
       </p:sp>
       <p:sp>
         <p:nvSpPr>
-          <p:cNvPr id="5" name="TextBox 4"/>
-          <p:cNvSpPr txBox="1"/>
-          <p:nvPr/>
-        </p:nvSpPr>
-        <p:spPr>
-          <a:xfrm>
-            <a:off x="457200" y="868680"/>
-            <a:ext cx="11274552" cy="365760"/>
-          </a:xfrm>
-          <a:prstGeom prst="rect">
-            <a:avLst/>
-          </a:prstGeom>
-          <a:noFill/>
-        </p:spPr>
-        <p:txBody>
-          <a:bodyPr wrap="square">
-            <a:spAutoFit/>
-          </a:bodyPr>
-          <a:lstStyle/>
-          <a:p>
-            <a:pPr algn="l">
-              <a:defRPr sz="1600" b="0">
-                <a:solidFill>
-                  <a:srgbClr val="ADD8E6"/>
-                </a:solidFill>
-                <a:latin typeface="Segoe UI"/>
-              </a:defRPr>
-            </a:pPr>
-            <a:r>
-              <a:t>Work in groups — rotate the Driver!</a:t>
-            </a:r>
-          </a:p>
-        </p:txBody>
-      </p:sp>
-      <p:sp>
-        <p:nvSpPr>
-          <p:cNvPr id="6" name="Oval 5"/>
+          <p:cNvPr id="5" name="Rounded Rectangle 4"/>
           <p:cNvSpPr/>
           <p:nvPr/>
         </p:nvSpPr>
         <p:spPr>
           <a:xfrm>
-            <a:off x="914400" y="1554480"/>
-            <a:ext cx="457200" cy="457200"/>
-          </a:xfrm>
-          <a:prstGeom prst="ellipse">
-            <a:avLst/>
-          </a:prstGeom>
-          <a:solidFill>
-            <a:srgbClr val="6495ED"/>
-          </a:solidFill>
-          <a:ln>
-            <a:noFill/>
-          </a:ln>
-        </p:spPr>
-        <p:style>
-          <a:lnRef idx="1">
-            <a:schemeClr val="accent1"/>
-          </a:lnRef>
-          <a:fillRef idx="3">
-            <a:schemeClr val="accent1"/>
-          </a:fillRef>
-          <a:effectRef idx="2">
-            <a:schemeClr val="accent1"/>
-          </a:effectRef>
-          <a:fontRef idx="minor">
-            <a:schemeClr val="lt1"/>
-          </a:fontRef>
-        </p:style>
-        <p:txBody>
-          <a:bodyPr rtlCol="0" anchor="ctr" wrap="square"/>
-          <a:lstStyle/>
-          <a:p>
-            <a:pPr algn="ctr">
-              <a:defRPr sz="2000" b="1">
-                <a:solidFill>
-                  <a:srgbClr val="FFFFFF"/>
-                </a:solidFill>
-                <a:latin typeface="Segoe UI"/>
-              </a:defRPr>
-            </a:pPr>
-            <a:r>
-              <a:t>A</a:t>
-            </a:r>
-          </a:p>
-        </p:txBody>
-      </p:sp>
-      <p:sp>
-        <p:nvSpPr>
-          <p:cNvPr id="7" name="TextBox 6"/>
-          <p:cNvSpPr txBox="1"/>
-          <p:nvPr/>
-        </p:nvSpPr>
-        <p:spPr>
-          <a:xfrm>
-            <a:off x="1737360" y="1600200"/>
-            <a:ext cx="9692640" cy="457200"/>
-          </a:xfrm>
-          <a:prstGeom prst="rect">
-            <a:avLst/>
-          </a:prstGeom>
-          <a:noFill/>
-        </p:spPr>
-        <p:txBody>
-          <a:bodyPr wrap="square">
-            <a:spAutoFit/>
-          </a:bodyPr>
-          <a:lstStyle/>
-          <a:p>
-            <a:pPr algn="l">
-              <a:defRPr sz="1900" b="0">
-                <a:solidFill>
-                  <a:srgbClr val="424242"/>
-                </a:solidFill>
-                <a:latin typeface="Segoe UI"/>
-              </a:defRPr>
-            </a:pPr>
-            <a:r>
-              <a:t>First Contact — meet your assistant</a:t>
-            </a:r>
-          </a:p>
-        </p:txBody>
-      </p:sp>
-      <p:sp>
-        <p:nvSpPr>
-          <p:cNvPr id="8" name="Oval 7"/>
-          <p:cNvSpPr/>
-          <p:nvPr/>
-        </p:nvSpPr>
-        <p:spPr>
-          <a:xfrm>
-            <a:off x="914400" y="2212848"/>
-            <a:ext cx="457200" cy="457200"/>
-          </a:xfrm>
-          <a:prstGeom prst="ellipse">
+            <a:off x="548640" y="2286000"/>
+            <a:ext cx="3383280" cy="1645920"/>
+          </a:xfrm>
+          <a:prstGeom prst="roundRect">
             <a:avLst/>
           </a:prstGeom>
           <a:solidFill>
@@ -6279,33 +6127,23 @@
           </a:fontRef>
         </p:style>
         <p:txBody>
-          <a:bodyPr rtlCol="0" anchor="ctr" wrap="square"/>
-          <a:lstStyle/>
-          <a:p>
-            <a:pPr algn="ctr">
-              <a:defRPr sz="2000" b="1">
-                <a:solidFill>
-                  <a:srgbClr val="FFFFFF"/>
-                </a:solidFill>
-                <a:latin typeface="Segoe UI"/>
-              </a:defRPr>
-            </a:pPr>
-            <a:r>
-              <a:t>B</a:t>
-            </a:r>
-          </a:p>
-        </p:txBody>
-      </p:sp>
-      <p:sp>
-        <p:nvSpPr>
-          <p:cNvPr id="9" name="TextBox 8"/>
+          <a:bodyPr rtlCol="0" anchor="ctr"/>
+          <a:lstStyle/>
+          <a:p>
+            <a:pPr algn="ctr"/>
+          </a:p>
+        </p:txBody>
+      </p:sp>
+      <p:sp>
+        <p:nvSpPr>
+          <p:cNvPr id="6" name="TextBox 5"/>
           <p:cNvSpPr txBox="1"/>
           <p:nvPr/>
         </p:nvSpPr>
         <p:spPr>
           <a:xfrm>
-            <a:off x="1737360" y="2258568"/>
-            <a:ext cx="9692640" cy="457200"/>
+            <a:off x="685800" y="2450592"/>
+            <a:ext cx="3108960" cy="1371600"/>
           </a:xfrm>
           <a:prstGeom prst="rect">
             <a:avLst/>
@@ -6318,32 +6156,94 @@
           </a:bodyPr>
           <a:lstStyle/>
           <a:p>
-            <a:pPr algn="l">
-              <a:defRPr sz="1900" b="0">
-                <a:solidFill>
-                  <a:srgbClr val="424242"/>
-                </a:solidFill>
-                <a:latin typeface="Segoe UI"/>
-              </a:defRPr>
-            </a:pPr>
-            <a:r>
-              <a:t>Watch It Act — approve a real task</a:t>
-            </a:r>
-          </a:p>
-        </p:txBody>
-      </p:sp>
-      <p:sp>
-        <p:nvSpPr>
-          <p:cNvPr id="10" name="Oval 9"/>
+            <a:pPr algn="ctr">
+              <a:lnSpc>
+                <a:spcPct val="105000"/>
+              </a:lnSpc>
+              <a:defRPr sz="1500" b="1">
+                <a:solidFill>
+                  <a:srgbClr val="FFFFFF"/>
+                </a:solidFill>
+                <a:latin typeface="Segoe UI"/>
+              </a:defRPr>
+            </a:pPr>
+            <a:r>
+              <a:t>You tell it a fact</a:t>
+            </a:r>
+          </a:p>
+          <a:p>
+            <a:pPr algn="ctr">
+              <a:lnSpc>
+                <a:spcPct val="105000"/>
+              </a:lnSpc>
+              <a:defRPr sz="1500" b="1">
+                <a:solidFill>
+                  <a:srgbClr val="FFFFFF"/>
+                </a:solidFill>
+                <a:latin typeface="Segoe UI"/>
+              </a:defRPr>
+            </a:pPr>
+            <a:r>
+              <a:t>"My team is the Sharks"</a:t>
+            </a:r>
+          </a:p>
+        </p:txBody>
+      </p:sp>
+      <p:sp>
+        <p:nvSpPr>
+          <p:cNvPr id="7" name="Right Arrow 6"/>
           <p:cNvSpPr/>
           <p:nvPr/>
         </p:nvSpPr>
         <p:spPr>
           <a:xfrm>
-            <a:off x="914400" y="2871215"/>
-            <a:ext cx="457200" cy="457200"/>
-          </a:xfrm>
-          <a:prstGeom prst="ellipse">
+            <a:off x="4114800" y="2788920"/>
+            <a:ext cx="640080" cy="640080"/>
+          </a:xfrm>
+          <a:prstGeom prst="rightArrow">
+            <a:avLst/>
+          </a:prstGeom>
+          <a:solidFill>
+            <a:srgbClr val="FF9933"/>
+          </a:solidFill>
+          <a:ln>
+            <a:noFill/>
+          </a:ln>
+        </p:spPr>
+        <p:style>
+          <a:lnRef idx="1">
+            <a:schemeClr val="accent1"/>
+          </a:lnRef>
+          <a:fillRef idx="3">
+            <a:schemeClr val="accent1"/>
+          </a:fillRef>
+          <a:effectRef idx="2">
+            <a:schemeClr val="accent1"/>
+          </a:effectRef>
+          <a:fontRef idx="minor">
+            <a:schemeClr val="lt1"/>
+          </a:fontRef>
+        </p:style>
+        <p:txBody>
+          <a:bodyPr rtlCol="0" anchor="ctr"/>
+          <a:lstStyle/>
+          <a:p>
+            <a:pPr algn="ctr"/>
+          </a:p>
+        </p:txBody>
+      </p:sp>
+      <p:sp>
+        <p:nvSpPr>
+          <p:cNvPr id="8" name="Rounded Rectangle 7"/>
+          <p:cNvSpPr/>
+          <p:nvPr/>
+        </p:nvSpPr>
+        <p:spPr>
+          <a:xfrm>
+            <a:off x="4846320" y="2286000"/>
+            <a:ext cx="2468880" cy="1645920"/>
+          </a:xfrm>
+          <a:prstGeom prst="roundRect">
             <a:avLst/>
           </a:prstGeom>
           <a:solidFill>
@@ -6368,33 +6268,23 @@
           </a:fontRef>
         </p:style>
         <p:txBody>
-          <a:bodyPr rtlCol="0" anchor="ctr" wrap="square"/>
-          <a:lstStyle/>
-          <a:p>
-            <a:pPr algn="ctr">
-              <a:defRPr sz="2000" b="1">
-                <a:solidFill>
-                  <a:srgbClr val="FFFFFF"/>
-                </a:solidFill>
-                <a:latin typeface="Segoe UI"/>
-              </a:defRPr>
-            </a:pPr>
-            <a:r>
-              <a:t>C</a:t>
-            </a:r>
-          </a:p>
-        </p:txBody>
-      </p:sp>
-      <p:sp>
-        <p:nvSpPr>
-          <p:cNvPr id="11" name="TextBox 10"/>
+          <a:bodyPr rtlCol="0" anchor="ctr"/>
+          <a:lstStyle/>
+          <a:p>
+            <a:pPr algn="ctr"/>
+          </a:p>
+        </p:txBody>
+      </p:sp>
+      <p:sp>
+        <p:nvSpPr>
+          <p:cNvPr id="9" name="TextBox 8"/>
           <p:cNvSpPr txBox="1"/>
           <p:nvPr/>
         </p:nvSpPr>
         <p:spPr>
           <a:xfrm>
-            <a:off x="1737360" y="2916935"/>
-            <a:ext cx="9692640" cy="457200"/>
+            <a:off x="4983480" y="2450592"/>
+            <a:ext cx="2194560" cy="1371600"/>
           </a:xfrm>
           <a:prstGeom prst="rect">
             <a:avLst/>
@@ -6407,32 +6297,94 @@
           </a:bodyPr>
           <a:lstStyle/>
           <a:p>
-            <a:pPr algn="l">
-              <a:defRPr sz="1900" b="0">
-                <a:solidFill>
-                  <a:srgbClr val="424242"/>
-                </a:solidFill>
-                <a:latin typeface="Segoe UI"/>
-              </a:defRPr>
-            </a:pPr>
-            <a:r>
-              <a:t>Give It a Personality — name it</a:t>
-            </a:r>
-          </a:p>
-        </p:txBody>
-      </p:sp>
-      <p:sp>
-        <p:nvSpPr>
-          <p:cNvPr id="12" name="Oval 11"/>
+            <a:pPr algn="ctr">
+              <a:lnSpc>
+                <a:spcPct val="105000"/>
+              </a:lnSpc>
+              <a:defRPr sz="1500" b="1">
+                <a:solidFill>
+                  <a:srgbClr val="FFFFFF"/>
+                </a:solidFill>
+                <a:latin typeface="Segoe UI"/>
+              </a:defRPr>
+            </a:pPr>
+            <a:r>
+              <a:t>It saves it</a:t>
+            </a:r>
+          </a:p>
+          <a:p>
+            <a:pPr algn="ctr">
+              <a:lnSpc>
+                <a:spcPct val="105000"/>
+              </a:lnSpc>
+              <a:defRPr sz="1500" b="1">
+                <a:solidFill>
+                  <a:srgbClr val="FFFFFF"/>
+                </a:solidFill>
+                <a:latin typeface="Segoe UI"/>
+              </a:defRPr>
+            </a:pPr>
+            <a:r>
+              <a:t>to a memory file</a:t>
+            </a:r>
+          </a:p>
+        </p:txBody>
+      </p:sp>
+      <p:sp>
+        <p:nvSpPr>
+          <p:cNvPr id="10" name="Right Arrow 9"/>
           <p:cNvSpPr/>
           <p:nvPr/>
         </p:nvSpPr>
         <p:spPr>
           <a:xfrm>
-            <a:off x="914400" y="3529584"/>
-            <a:ext cx="457200" cy="457200"/>
-          </a:xfrm>
-          <a:prstGeom prst="ellipse">
+            <a:off x="7498079" y="2788920"/>
+            <a:ext cx="640080" cy="640080"/>
+          </a:xfrm>
+          <a:prstGeom prst="rightArrow">
+            <a:avLst/>
+          </a:prstGeom>
+          <a:solidFill>
+            <a:srgbClr val="FF9933"/>
+          </a:solidFill>
+          <a:ln>
+            <a:noFill/>
+          </a:ln>
+        </p:spPr>
+        <p:style>
+          <a:lnRef idx="1">
+            <a:schemeClr val="accent1"/>
+          </a:lnRef>
+          <a:fillRef idx="3">
+            <a:schemeClr val="accent1"/>
+          </a:fillRef>
+          <a:effectRef idx="2">
+            <a:schemeClr val="accent1"/>
+          </a:effectRef>
+          <a:fontRef idx="minor">
+            <a:schemeClr val="lt1"/>
+          </a:fontRef>
+        </p:style>
+        <p:txBody>
+          <a:bodyPr rtlCol="0" anchor="ctr"/>
+          <a:lstStyle/>
+          <a:p>
+            <a:pPr algn="ctr"/>
+          </a:p>
+        </p:txBody>
+      </p:sp>
+      <p:sp>
+        <p:nvSpPr>
+          <p:cNvPr id="11" name="Rounded Rectangle 10"/>
+          <p:cNvSpPr/>
+          <p:nvPr/>
+        </p:nvSpPr>
+        <p:spPr>
+          <a:xfrm>
+            <a:off x="8229600" y="2286000"/>
+            <a:ext cx="3383280" cy="1645920"/>
+          </a:xfrm>
+          <a:prstGeom prst="roundRect">
             <a:avLst/>
           </a:prstGeom>
           <a:solidFill>
@@ -6457,33 +6409,23 @@
           </a:fontRef>
         </p:style>
         <p:txBody>
-          <a:bodyPr rtlCol="0" anchor="ctr" wrap="square"/>
-          <a:lstStyle/>
-          <a:p>
-            <a:pPr algn="ctr">
-              <a:defRPr sz="2000" b="1">
-                <a:solidFill>
-                  <a:srgbClr val="FFFFFF"/>
-                </a:solidFill>
-                <a:latin typeface="Segoe UI"/>
-              </a:defRPr>
-            </a:pPr>
-            <a:r>
-              <a:t>D</a:t>
-            </a:r>
-          </a:p>
-        </p:txBody>
-      </p:sp>
-      <p:sp>
-        <p:nvSpPr>
-          <p:cNvPr id="13" name="TextBox 12"/>
+          <a:bodyPr rtlCol="0" anchor="ctr"/>
+          <a:lstStyle/>
+          <a:p>
+            <a:pPr algn="ctr"/>
+          </a:p>
+        </p:txBody>
+      </p:sp>
+      <p:sp>
+        <p:nvSpPr>
+          <p:cNvPr id="12" name="TextBox 11"/>
           <p:cNvSpPr txBox="1"/>
           <p:nvPr/>
         </p:nvSpPr>
         <p:spPr>
           <a:xfrm>
-            <a:off x="1737360" y="3575304"/>
-            <a:ext cx="9692640" cy="457200"/>
+            <a:off x="8366760" y="2450592"/>
+            <a:ext cx="3108960" cy="1371600"/>
           </a:xfrm>
           <a:prstGeom prst="rect">
             <a:avLst/>
@@ -6496,36 +6438,55 @@
           </a:bodyPr>
           <a:lstStyle/>
           <a:p>
-            <a:pPr algn="l">
-              <a:defRPr sz="1900" b="0">
-                <a:solidFill>
-                  <a:srgbClr val="424242"/>
-                </a:solidFill>
-                <a:latin typeface="Segoe UI"/>
-              </a:defRPr>
-            </a:pPr>
-            <a:r>
-              <a:t>Make It Remember — save a fact</a:t>
-            </a:r>
-          </a:p>
-        </p:txBody>
-      </p:sp>
-      <p:sp>
-        <p:nvSpPr>
-          <p:cNvPr id="14" name="Oval 13"/>
+            <a:pPr algn="ctr">
+              <a:lnSpc>
+                <a:spcPct val="105000"/>
+              </a:lnSpc>
+              <a:defRPr sz="1500" b="1">
+                <a:solidFill>
+                  <a:srgbClr val="FFFFFF"/>
+                </a:solidFill>
+                <a:latin typeface="Segoe UI"/>
+              </a:defRPr>
+            </a:pPr>
+            <a:r>
+              <a:t>Next time</a:t>
+            </a:r>
+          </a:p>
+          <a:p>
+            <a:pPr algn="ctr">
+              <a:lnSpc>
+                <a:spcPct val="105000"/>
+              </a:lnSpc>
+              <a:defRPr sz="1500" b="1">
+                <a:solidFill>
+                  <a:srgbClr val="FFFFFF"/>
+                </a:solidFill>
+                <a:latin typeface="Segoe UI"/>
+              </a:defRPr>
+            </a:pPr>
+            <a:r>
+              <a:t>it still knows you</a:t>
+            </a:r>
+          </a:p>
+        </p:txBody>
+      </p:sp>
+      <p:sp>
+        <p:nvSpPr>
+          <p:cNvPr id="13" name="Rounded Rectangle 12"/>
           <p:cNvSpPr/>
           <p:nvPr/>
         </p:nvSpPr>
         <p:spPr>
           <a:xfrm>
-            <a:off x="914400" y="4187952"/>
-            <a:ext cx="457200" cy="457200"/>
-          </a:xfrm>
-          <a:prstGeom prst="ellipse">
+            <a:off x="914400" y="5760720"/>
+            <a:ext cx="10360152" cy="640080"/>
+          </a:xfrm>
+          <a:prstGeom prst="roundRect">
             <a:avLst/>
           </a:prstGeom>
           <a:solidFill>
-            <a:srgbClr val="4CAF50"/>
+            <a:srgbClr val="1E3A5F"/>
           </a:solidFill>
           <a:ln>
             <a:noFill/>
@@ -6550,140 +6511,18 @@
           <a:lstStyle/>
           <a:p>
             <a:pPr algn="ctr">
-              <a:defRPr sz="2000" b="1">
-                <a:solidFill>
-                  <a:srgbClr val="FFFFFF"/>
-                </a:solidFill>
-                <a:latin typeface="Segoe UI"/>
-              </a:defRPr>
-            </a:pPr>
-            <a:r>
-              <a:t>E</a:t>
-            </a:r>
-          </a:p>
-        </p:txBody>
-      </p:sp>
-      <p:sp>
-        <p:nvSpPr>
-          <p:cNvPr id="15" name="TextBox 14"/>
-          <p:cNvSpPr txBox="1"/>
-          <p:nvPr/>
-        </p:nvSpPr>
-        <p:spPr>
-          <a:xfrm>
-            <a:off x="1737360" y="4233672"/>
-            <a:ext cx="9692640" cy="457200"/>
-          </a:xfrm>
-          <a:prstGeom prst="rect">
-            <a:avLst/>
-          </a:prstGeom>
-          <a:noFill/>
-        </p:spPr>
-        <p:txBody>
-          <a:bodyPr wrap="square">
-            <a:spAutoFit/>
-          </a:bodyPr>
-          <a:lstStyle/>
-          <a:p>
-            <a:pPr algn="l">
-              <a:defRPr sz="1900" b="0">
-                <a:solidFill>
-                  <a:srgbClr val="424242"/>
-                </a:solidFill>
-                <a:latin typeface="Segoe UI"/>
-              </a:defRPr>
-            </a:pPr>
-            <a:r>
-              <a:t>Interview It — ask how it works</a:t>
-            </a:r>
-          </a:p>
-        </p:txBody>
-      </p:sp>
-      <p:sp>
-        <p:nvSpPr>
-          <p:cNvPr id="16" name="Oval 15"/>
-          <p:cNvSpPr/>
-          <p:nvPr/>
-        </p:nvSpPr>
-        <p:spPr>
-          <a:xfrm>
-            <a:off x="914400" y="4846320"/>
-            <a:ext cx="457200" cy="457200"/>
-          </a:xfrm>
-          <a:prstGeom prst="ellipse">
-            <a:avLst/>
-          </a:prstGeom>
-          <a:solidFill>
-            <a:srgbClr val="FF9933"/>
-          </a:solidFill>
-          <a:ln>
-            <a:noFill/>
-          </a:ln>
-        </p:spPr>
-        <p:style>
-          <a:lnRef idx="1">
-            <a:schemeClr val="accent1"/>
-          </a:lnRef>
-          <a:fillRef idx="3">
-            <a:schemeClr val="accent1"/>
-          </a:fillRef>
-          <a:effectRef idx="2">
-            <a:schemeClr val="accent1"/>
-          </a:effectRef>
-          <a:fontRef idx="minor">
-            <a:schemeClr val="lt1"/>
-          </a:fontRef>
-        </p:style>
-        <p:txBody>
-          <a:bodyPr rtlCol="0" anchor="ctr" wrap="square"/>
-          <a:lstStyle/>
-          <a:p>
-            <a:pPr algn="ctr">
-              <a:defRPr sz="2000" b="1">
-                <a:solidFill>
-                  <a:srgbClr val="FFFFFF"/>
-                </a:solidFill>
-                <a:latin typeface="Segoe UI"/>
-              </a:defRPr>
-            </a:pPr>
-            <a:r>
-              <a:t>F</a:t>
-            </a:r>
-          </a:p>
-        </p:txBody>
-      </p:sp>
-      <p:sp>
-        <p:nvSpPr>
-          <p:cNvPr id="17" name="TextBox 16"/>
-          <p:cNvSpPr txBox="1"/>
-          <p:nvPr/>
-        </p:nvSpPr>
-        <p:spPr>
-          <a:xfrm>
-            <a:off x="1737360" y="4892040"/>
-            <a:ext cx="9692640" cy="457200"/>
-          </a:xfrm>
-          <a:prstGeom prst="rect">
-            <a:avLst/>
-          </a:prstGeom>
-          <a:noFill/>
-        </p:spPr>
-        <p:txBody>
-          <a:bodyPr wrap="square">
-            <a:spAutoFit/>
-          </a:bodyPr>
-          <a:lstStyle/>
-          <a:p>
-            <a:pPr algn="l">
-              <a:defRPr sz="1900" b="0">
-                <a:solidFill>
-                  <a:srgbClr val="424242"/>
-                </a:solidFill>
-                <a:latin typeface="Segoe UI"/>
-              </a:defRPr>
-            </a:pPr>
-            <a:r>
-              <a:t>Quick Quests — build &amp; create</a:t>
+              <a:spcBef>
+                <a:spcPts val="800"/>
+              </a:spcBef>
+              <a:defRPr sz="1800" b="1">
+                <a:solidFill>
+                  <a:srgbClr val="FFFFFF"/>
+                </a:solidFill>
+                <a:latin typeface="Segoe UI"/>
+              </a:defRPr>
+            </a:pPr>
+            <a:r>
+              <a:t>Memory = notes the assistant keeps on your computer.</a:t>
             </a:r>
           </a:p>
         </p:txBody>
@@ -6780,7 +6619,7 @@
               </a:defRPr>
             </a:pPr>
             <a:r>
-              <a:t>A New Way to Use Computers</a:t>
+              <a:t>The Heartbeat: Acting On Its Own</a:t>
             </a:r>
           </a:p>
         </p:txBody>
@@ -6836,8 +6675,8 @@
         </p:nvSpPr>
         <p:spPr>
           <a:xfrm>
-            <a:off x="457200" y="868680"/>
-            <a:ext cx="11274552" cy="365760"/>
+            <a:off x="731520" y="1463040"/>
+            <a:ext cx="10698480" cy="548640"/>
           </a:xfrm>
           <a:prstGeom prst="rect">
             <a:avLst/>
@@ -6851,46 +6690,7 @@
           <a:lstStyle/>
           <a:p>
             <a:pPr algn="l">
-              <a:defRPr sz="1600" b="0">
-                <a:solidFill>
-                  <a:srgbClr val="ADD8E6"/>
-                </a:solidFill>
-                <a:latin typeface="Segoe UI"/>
-              </a:defRPr>
-            </a:pPr>
-            <a:r>
-              <a:t>Where AI is going</a:t>
-            </a:r>
-          </a:p>
-        </p:txBody>
-      </p:sp>
-      <p:sp>
-        <p:nvSpPr>
-          <p:cNvPr id="6" name="TextBox 5"/>
-          <p:cNvSpPr txBox="1"/>
-          <p:nvPr/>
-        </p:nvSpPr>
-        <p:spPr>
-          <a:xfrm>
-            <a:off x="731520" y="1554480"/>
-            <a:ext cx="10698480" cy="2194560"/>
-          </a:xfrm>
-          <a:prstGeom prst="rect">
-            <a:avLst/>
-          </a:prstGeom>
-          <a:noFill/>
-        </p:spPr>
-        <p:txBody>
-          <a:bodyPr wrap="square">
-            <a:spAutoFit/>
-          </a:bodyPr>
-          <a:lstStyle/>
-          <a:p>
-            <a:pPr algn="l">
-              <a:lnSpc>
-                <a:spcPct val="120000"/>
-              </a:lnSpc>
-              <a:defRPr sz="1900" b="0">
+              <a:defRPr sz="1700" b="0">
                 <a:solidFill>
                   <a:srgbClr val="424242"/>
                 </a:solidFill>
@@ -6898,88 +6698,27 @@
               </a:defRPr>
             </a:pPr>
             <a:r>
-              <a:t>Instead of clicking through menus, people are starting to just</a:t>
-            </a:r>
-          </a:p>
-          <a:p>
-            <a:pPr algn="l">
-              <a:lnSpc>
-                <a:spcPct val="120000"/>
-              </a:lnSpc>
-              <a:defRPr sz="1900" b="0">
-                <a:solidFill>
-                  <a:srgbClr val="424242"/>
-                </a:solidFill>
-                <a:latin typeface="Segoe UI"/>
-              </a:defRPr>
-            </a:pPr>
-            <a:r>
-              <a:t>ASK their computer to do things — and an assistant does them.</a:t>
-            </a:r>
-          </a:p>
-          <a:p>
-            <a:pPr algn="l">
-              <a:lnSpc>
-                <a:spcPct val="120000"/>
-              </a:lnSpc>
-              <a:defRPr sz="1900" b="0">
-                <a:solidFill>
-                  <a:srgbClr val="424242"/>
-                </a:solidFill>
-                <a:latin typeface="Segoe UI"/>
-              </a:defRPr>
-            </a:pPr>
-          </a:p>
-          <a:p>
-            <a:pPr algn="l">
-              <a:lnSpc>
-                <a:spcPct val="120000"/>
-              </a:lnSpc>
-              <a:defRPr sz="1900" b="0">
-                <a:solidFill>
-                  <a:srgbClr val="424242"/>
-                </a:solidFill>
-                <a:latin typeface="Segoe UI"/>
-              </a:defRPr>
-            </a:pPr>
-            <a:r>
-              <a:t>These assistants are built from the same ideas you learned:</a:t>
-            </a:r>
-          </a:p>
-          <a:p>
-            <a:pPr algn="l">
-              <a:lnSpc>
-                <a:spcPct val="120000"/>
-              </a:lnSpc>
-              <a:defRPr sz="1900" b="0">
-                <a:solidFill>
-                  <a:srgbClr val="424242"/>
-                </a:solidFill>
-                <a:latin typeface="Segoe UI"/>
-              </a:defRPr>
-            </a:pPr>
-            <a:r>
-              <a:t>LLMs, tools, memory, and loops.</a:t>
-            </a:r>
-          </a:p>
-        </p:txBody>
-      </p:sp>
-      <p:sp>
-        <p:nvSpPr>
-          <p:cNvPr id="7" name="Rounded Rectangle 6"/>
+              <a:t>A real assistant can check things and act on a timer — even without being asked.</a:t>
+            </a:r>
+          </a:p>
+        </p:txBody>
+      </p:sp>
+      <p:sp>
+        <p:nvSpPr>
+          <p:cNvPr id="6" name="Rounded Rectangle 5"/>
           <p:cNvSpPr/>
           <p:nvPr/>
         </p:nvSpPr>
         <p:spPr>
           <a:xfrm>
-            <a:off x="914400" y="5760720"/>
-            <a:ext cx="10360152" cy="640080"/>
+            <a:off x="731520" y="2194560"/>
+            <a:ext cx="5257800" cy="2651760"/>
           </a:xfrm>
           <a:prstGeom prst="roundRect">
             <a:avLst/>
           </a:prstGeom>
           <a:solidFill>
-            <a:srgbClr val="009688"/>
+            <a:srgbClr val="3467A6"/>
           </a:solidFill>
           <a:ln>
             <a:noFill/>
@@ -7000,6 +6739,306 @@
           </a:fontRef>
         </p:style>
         <p:txBody>
+          <a:bodyPr rtlCol="0" anchor="ctr"/>
+          <a:lstStyle/>
+          <a:p>
+            <a:pPr algn="ctr"/>
+          </a:p>
+        </p:txBody>
+      </p:sp>
+      <p:sp>
+        <p:nvSpPr>
+          <p:cNvPr id="7" name="TextBox 6"/>
+          <p:cNvSpPr txBox="1"/>
+          <p:nvPr/>
+        </p:nvSpPr>
+        <p:spPr>
+          <a:xfrm>
+            <a:off x="960120" y="2359152"/>
+            <a:ext cx="4800600" cy="457200"/>
+          </a:xfrm>
+          <a:prstGeom prst="rect">
+            <a:avLst/>
+          </a:prstGeom>
+          <a:noFill/>
+        </p:spPr>
+        <p:txBody>
+          <a:bodyPr wrap="square">
+            <a:spAutoFit/>
+          </a:bodyPr>
+          <a:lstStyle/>
+          <a:p>
+            <a:pPr algn="l">
+              <a:defRPr sz="1800" b="1">
+                <a:solidFill>
+                  <a:srgbClr val="FFFFFF"/>
+                </a:solidFill>
+                <a:latin typeface="Segoe UI"/>
+              </a:defRPr>
+            </a:pPr>
+            <a:r>
+              <a:t>Heartbeat ON</a:t>
+            </a:r>
+          </a:p>
+        </p:txBody>
+      </p:sp>
+      <p:sp>
+        <p:nvSpPr>
+          <p:cNvPr id="8" name="TextBox 7"/>
+          <p:cNvSpPr txBox="1"/>
+          <p:nvPr/>
+        </p:nvSpPr>
+        <p:spPr>
+          <a:xfrm>
+            <a:off x="960120" y="2907791"/>
+            <a:ext cx="4800600" cy="1783080"/>
+          </a:xfrm>
+          <a:prstGeom prst="rect">
+            <a:avLst/>
+          </a:prstGeom>
+          <a:noFill/>
+        </p:spPr>
+        <p:txBody>
+          <a:bodyPr wrap="square">
+            <a:spAutoFit/>
+          </a:bodyPr>
+          <a:lstStyle/>
+          <a:p>
+            <a:pPr algn="l">
+              <a:lnSpc>
+                <a:spcPct val="110000"/>
+              </a:lnSpc>
+              <a:defRPr sz="1500" b="0">
+                <a:solidFill>
+                  <a:srgbClr val="FFFFFF"/>
+                </a:solidFill>
+                <a:latin typeface="Segoe UI"/>
+              </a:defRPr>
+            </a:pPr>
+            <a:r>
+              <a:t>Proactive 24/7.</a:t>
+            </a:r>
+          </a:p>
+          <a:p>
+            <a:pPr algn="l">
+              <a:lnSpc>
+                <a:spcPct val="110000"/>
+              </a:lnSpc>
+              <a:defRPr sz="1500" b="0">
+                <a:solidFill>
+                  <a:srgbClr val="FFFFFF"/>
+                </a:solidFill>
+                <a:latin typeface="Segoe UI"/>
+              </a:defRPr>
+            </a:pPr>
+            <a:r>
+              <a:t>Checks tasks every 30 min</a:t>
+            </a:r>
+          </a:p>
+          <a:p>
+            <a:pPr algn="l">
+              <a:lnSpc>
+                <a:spcPct val="110000"/>
+              </a:lnSpc>
+              <a:defRPr sz="1500" b="0">
+                <a:solidFill>
+                  <a:srgbClr val="FFFFFF"/>
+                </a:solidFill>
+                <a:latin typeface="Segoe UI"/>
+              </a:defRPr>
+            </a:pPr>
+            <a:r>
+              <a:t>and acts on its own.</a:t>
+            </a:r>
+          </a:p>
+        </p:txBody>
+      </p:sp>
+      <p:sp>
+        <p:nvSpPr>
+          <p:cNvPr id="9" name="Rounded Rectangle 8"/>
+          <p:cNvSpPr/>
+          <p:nvPr/>
+        </p:nvSpPr>
+        <p:spPr>
+          <a:xfrm>
+            <a:off x="6172200" y="2194560"/>
+            <a:ext cx="5257800" cy="2651760"/>
+          </a:xfrm>
+          <a:prstGeom prst="roundRect">
+            <a:avLst/>
+          </a:prstGeom>
+          <a:solidFill>
+            <a:srgbClr val="FF9933"/>
+          </a:solidFill>
+          <a:ln>
+            <a:noFill/>
+          </a:ln>
+        </p:spPr>
+        <p:style>
+          <a:lnRef idx="1">
+            <a:schemeClr val="accent1"/>
+          </a:lnRef>
+          <a:fillRef idx="3">
+            <a:schemeClr val="accent1"/>
+          </a:fillRef>
+          <a:effectRef idx="2">
+            <a:schemeClr val="accent1"/>
+          </a:effectRef>
+          <a:fontRef idx="minor">
+            <a:schemeClr val="lt1"/>
+          </a:fontRef>
+        </p:style>
+        <p:txBody>
+          <a:bodyPr rtlCol="0" anchor="ctr"/>
+          <a:lstStyle/>
+          <a:p>
+            <a:pPr algn="ctr"/>
+          </a:p>
+        </p:txBody>
+      </p:sp>
+      <p:sp>
+        <p:nvSpPr>
+          <p:cNvPr id="10" name="TextBox 9"/>
+          <p:cNvSpPr txBox="1"/>
+          <p:nvPr/>
+        </p:nvSpPr>
+        <p:spPr>
+          <a:xfrm>
+            <a:off x="6400800" y="2359152"/>
+            <a:ext cx="4800600" cy="457200"/>
+          </a:xfrm>
+          <a:prstGeom prst="rect">
+            <a:avLst/>
+          </a:prstGeom>
+          <a:noFill/>
+        </p:spPr>
+        <p:txBody>
+          <a:bodyPr wrap="square">
+            <a:spAutoFit/>
+          </a:bodyPr>
+          <a:lstStyle/>
+          <a:p>
+            <a:pPr algn="l">
+              <a:defRPr sz="1800" b="1">
+                <a:solidFill>
+                  <a:srgbClr val="FFFFFF"/>
+                </a:solidFill>
+                <a:latin typeface="Segoe UI"/>
+              </a:defRPr>
+            </a:pPr>
+            <a:r>
+              <a:t>Heartbeat OFF (class)</a:t>
+            </a:r>
+          </a:p>
+        </p:txBody>
+      </p:sp>
+      <p:sp>
+        <p:nvSpPr>
+          <p:cNvPr id="11" name="TextBox 10"/>
+          <p:cNvSpPr txBox="1"/>
+          <p:nvPr/>
+        </p:nvSpPr>
+        <p:spPr>
+          <a:xfrm>
+            <a:off x="6400800" y="2907791"/>
+            <a:ext cx="4800600" cy="1783080"/>
+          </a:xfrm>
+          <a:prstGeom prst="rect">
+            <a:avLst/>
+          </a:prstGeom>
+          <a:noFill/>
+        </p:spPr>
+        <p:txBody>
+          <a:bodyPr wrap="square">
+            <a:spAutoFit/>
+          </a:bodyPr>
+          <a:lstStyle/>
+          <a:p>
+            <a:pPr algn="l">
+              <a:lnSpc>
+                <a:spcPct val="110000"/>
+              </a:lnSpc>
+              <a:defRPr sz="1500" b="0">
+                <a:solidFill>
+                  <a:srgbClr val="FFFFFF"/>
+                </a:solidFill>
+                <a:latin typeface="Segoe UI"/>
+              </a:defRPr>
+            </a:pPr>
+            <a:r>
+              <a:t>Acts only when you ask.</a:t>
+            </a:r>
+          </a:p>
+          <a:p>
+            <a:pPr algn="l">
+              <a:lnSpc>
+                <a:spcPct val="110000"/>
+              </a:lnSpc>
+              <a:defRPr sz="1500" b="0">
+                <a:solidFill>
+                  <a:srgbClr val="FFFFFF"/>
+                </a:solidFill>
+                <a:latin typeface="Segoe UI"/>
+              </a:defRPr>
+            </a:pPr>
+            <a:r>
+              <a:t>Keeps things safe and</a:t>
+            </a:r>
+          </a:p>
+          <a:p>
+            <a:pPr algn="l">
+              <a:lnSpc>
+                <a:spcPct val="110000"/>
+              </a:lnSpc>
+              <a:defRPr sz="1500" b="0">
+                <a:solidFill>
+                  <a:srgbClr val="FFFFFF"/>
+                </a:solidFill>
+                <a:latin typeface="Segoe UI"/>
+              </a:defRPr>
+            </a:pPr>
+            <a:r>
+              <a:t>saves our credits.</a:t>
+            </a:r>
+          </a:p>
+        </p:txBody>
+      </p:sp>
+      <p:sp>
+        <p:nvSpPr>
+          <p:cNvPr id="12" name="Rounded Rectangle 11"/>
+          <p:cNvSpPr/>
+          <p:nvPr/>
+        </p:nvSpPr>
+        <p:spPr>
+          <a:xfrm>
+            <a:off x="914400" y="5760720"/>
+            <a:ext cx="10360152" cy="640080"/>
+          </a:xfrm>
+          <a:prstGeom prst="roundRect">
+            <a:avLst/>
+          </a:prstGeom>
+          <a:solidFill>
+            <a:srgbClr val="1E3A5F"/>
+          </a:solidFill>
+          <a:ln>
+            <a:noFill/>
+          </a:ln>
+        </p:spPr>
+        <p:style>
+          <a:lnRef idx="1">
+            <a:schemeClr val="accent1"/>
+          </a:lnRef>
+          <a:fillRef idx="3">
+            <a:schemeClr val="accent1"/>
+          </a:fillRef>
+          <a:effectRef idx="2">
+            <a:schemeClr val="accent1"/>
+          </a:effectRef>
+          <a:fontRef idx="minor">
+            <a:schemeClr val="lt1"/>
+          </a:fontRef>
+        </p:style>
+        <p:txBody>
           <a:bodyPr rtlCol="0" anchor="ctr" wrap="square"/>
           <a:lstStyle/>
           <a:p>
@@ -7015,7 +7054,7 @@
               </a:defRPr>
             </a:pPr>
             <a:r>
-              <a:t>They're written in languages like Python — which we start in July!</a:t>
+              <a:t>In class we keep the heartbeat OFF — it acts only when you chat.</a:t>
             </a:r>
           </a:p>
         </p:txBody>
@@ -7047,7 +7086,7 @@
         <p:spPr>
           <a:xfrm>
             <a:off x="0" y="0"/>
-            <a:ext cx="12188952" cy="6858000"/>
+            <a:ext cx="12188952" cy="1188720"/>
           </a:xfrm>
           <a:prstGeom prst="rect">
             <a:avLst/>
@@ -7089,8 +7128,8 @@
         </p:nvSpPr>
         <p:spPr>
           <a:xfrm>
-            <a:off x="731520" y="1371600"/>
-            <a:ext cx="10698480" cy="914400"/>
+            <a:off x="457200" y="320040"/>
+            <a:ext cx="11274552" cy="640080"/>
           </a:xfrm>
           <a:prstGeom prst="rect">
             <a:avLst/>
@@ -7103,30 +7142,73 @@
           </a:bodyPr>
           <a:lstStyle/>
           <a:p>
-            <a:pPr algn="ctr">
-              <a:defRPr sz="4400" b="1">
-                <a:solidFill>
-                  <a:srgbClr val="FFFFFF"/>
-                </a:solidFill>
-                <a:latin typeface="Segoe UI"/>
-              </a:defRPr>
-            </a:pPr>
-            <a:r>
-              <a:t>How Far You've Come 🎉</a:t>
-            </a:r>
-          </a:p>
-        </p:txBody>
-      </p:sp>
-      <p:sp>
-        <p:nvSpPr>
-          <p:cNvPr id="4" name="TextBox 3"/>
+            <a:pPr algn="l">
+              <a:defRPr sz="3600" b="1">
+                <a:solidFill>
+                  <a:srgbClr val="FFFFFF"/>
+                </a:solidFill>
+                <a:latin typeface="Segoe UI Semibold"/>
+              </a:defRPr>
+            </a:pPr>
+            <a:r>
+              <a:t>Your Turn — Today's Missions</a:t>
+            </a:r>
+          </a:p>
+        </p:txBody>
+      </p:sp>
+      <p:sp>
+        <p:nvSpPr>
+          <p:cNvPr id="4" name="Rectangle 3"/>
+          <p:cNvSpPr/>
+          <p:nvPr/>
+        </p:nvSpPr>
+        <p:spPr>
+          <a:xfrm>
+            <a:off x="0" y="1188720"/>
+            <a:ext cx="12188952" cy="73152"/>
+          </a:xfrm>
+          <a:prstGeom prst="rect">
+            <a:avLst/>
+          </a:prstGeom>
+          <a:solidFill>
+            <a:srgbClr val="FF9933"/>
+          </a:solidFill>
+          <a:ln>
+            <a:noFill/>
+          </a:ln>
+        </p:spPr>
+        <p:style>
+          <a:lnRef idx="1">
+            <a:schemeClr val="accent1"/>
+          </a:lnRef>
+          <a:fillRef idx="3">
+            <a:schemeClr val="accent1"/>
+          </a:fillRef>
+          <a:effectRef idx="2">
+            <a:schemeClr val="accent1"/>
+          </a:effectRef>
+          <a:fontRef idx="minor">
+            <a:schemeClr val="lt1"/>
+          </a:fontRef>
+        </p:style>
+        <p:txBody>
+          <a:bodyPr rtlCol="0" anchor="ctr"/>
+          <a:lstStyle/>
+          <a:p>
+            <a:pPr algn="ctr"/>
+          </a:p>
+        </p:txBody>
+      </p:sp>
+      <p:sp>
+        <p:nvSpPr>
+          <p:cNvPr id="5" name="TextBox 4"/>
           <p:cNvSpPr txBox="1"/>
           <p:nvPr/>
         </p:nvSpPr>
         <p:spPr>
           <a:xfrm>
-            <a:off x="1097280" y="2743200"/>
-            <a:ext cx="9966960" cy="2377440"/>
+            <a:off x="457200" y="868680"/>
+            <a:ext cx="11274552" cy="365760"/>
           </a:xfrm>
           <a:prstGeom prst="rect">
             <a:avLst/>
@@ -7139,64 +7221,550 @@
           </a:bodyPr>
           <a:lstStyle/>
           <a:p>
+            <a:pPr algn="l">
+              <a:defRPr sz="1600" b="0">
+                <a:solidFill>
+                  <a:srgbClr val="ADD8E6"/>
+                </a:solidFill>
+                <a:latin typeface="Segoe UI"/>
+              </a:defRPr>
+            </a:pPr>
+            <a:r>
+              <a:t>Work in groups — rotate the Driver!</a:t>
+            </a:r>
+          </a:p>
+        </p:txBody>
+      </p:sp>
+      <p:sp>
+        <p:nvSpPr>
+          <p:cNvPr id="6" name="Oval 5"/>
+          <p:cNvSpPr/>
+          <p:nvPr/>
+        </p:nvSpPr>
+        <p:spPr>
+          <a:xfrm>
+            <a:off x="914400" y="1554480"/>
+            <a:ext cx="457200" cy="457200"/>
+          </a:xfrm>
+          <a:prstGeom prst="ellipse">
+            <a:avLst/>
+          </a:prstGeom>
+          <a:solidFill>
+            <a:srgbClr val="6495ED"/>
+          </a:solidFill>
+          <a:ln>
+            <a:noFill/>
+          </a:ln>
+        </p:spPr>
+        <p:style>
+          <a:lnRef idx="1">
+            <a:schemeClr val="accent1"/>
+          </a:lnRef>
+          <a:fillRef idx="3">
+            <a:schemeClr val="accent1"/>
+          </a:fillRef>
+          <a:effectRef idx="2">
+            <a:schemeClr val="accent1"/>
+          </a:effectRef>
+          <a:fontRef idx="minor">
+            <a:schemeClr val="lt1"/>
+          </a:fontRef>
+        </p:style>
+        <p:txBody>
+          <a:bodyPr rtlCol="0" anchor="ctr" wrap="square"/>
+          <a:lstStyle/>
+          <a:p>
             <a:pPr algn="ctr">
-              <a:lnSpc>
-                <a:spcPct val="120000"/>
-              </a:lnSpc>
-              <a:defRPr sz="2200" b="0">
-                <a:solidFill>
-                  <a:srgbClr val="ADD8E6"/>
-                </a:solidFill>
-                <a:latin typeface="Segoe UI"/>
-              </a:defRPr>
-            </a:pPr>
-            <a:r>
-              <a:t>From "what is an AI agent?"</a:t>
-            </a:r>
-          </a:p>
+              <a:defRPr sz="2000" b="1">
+                <a:solidFill>
+                  <a:srgbClr val="FFFFFF"/>
+                </a:solidFill>
+                <a:latin typeface="Segoe UI"/>
+              </a:defRPr>
+            </a:pPr>
+            <a:r>
+              <a:t>A</a:t>
+            </a:r>
+          </a:p>
+        </p:txBody>
+      </p:sp>
+      <p:sp>
+        <p:nvSpPr>
+          <p:cNvPr id="7" name="TextBox 6"/>
+          <p:cNvSpPr txBox="1"/>
+          <p:nvPr/>
+        </p:nvSpPr>
+        <p:spPr>
+          <a:xfrm>
+            <a:off x="1737360" y="1600200"/>
+            <a:ext cx="9692640" cy="457200"/>
+          </a:xfrm>
+          <a:prstGeom prst="rect">
+            <a:avLst/>
+          </a:prstGeom>
+          <a:noFill/>
+        </p:spPr>
+        <p:txBody>
+          <a:bodyPr wrap="square">
+            <a:spAutoFit/>
+          </a:bodyPr>
+          <a:lstStyle/>
+          <a:p>
+            <a:pPr algn="l">
+              <a:defRPr sz="1900" b="0">
+                <a:solidFill>
+                  <a:srgbClr val="424242"/>
+                </a:solidFill>
+                <a:latin typeface="Segoe UI"/>
+              </a:defRPr>
+            </a:pPr>
+            <a:r>
+              <a:t>First Contact — meet your assistant</a:t>
+            </a:r>
+          </a:p>
+        </p:txBody>
+      </p:sp>
+      <p:sp>
+        <p:nvSpPr>
+          <p:cNvPr id="8" name="Oval 7"/>
+          <p:cNvSpPr/>
+          <p:nvPr/>
+        </p:nvSpPr>
+        <p:spPr>
+          <a:xfrm>
+            <a:off x="914400" y="2212848"/>
+            <a:ext cx="457200" cy="457200"/>
+          </a:xfrm>
+          <a:prstGeom prst="ellipse">
+            <a:avLst/>
+          </a:prstGeom>
+          <a:solidFill>
+            <a:srgbClr val="3467A6"/>
+          </a:solidFill>
+          <a:ln>
+            <a:noFill/>
+          </a:ln>
+        </p:spPr>
+        <p:style>
+          <a:lnRef idx="1">
+            <a:schemeClr val="accent1"/>
+          </a:lnRef>
+          <a:fillRef idx="3">
+            <a:schemeClr val="accent1"/>
+          </a:fillRef>
+          <a:effectRef idx="2">
+            <a:schemeClr val="accent1"/>
+          </a:effectRef>
+          <a:fontRef idx="minor">
+            <a:schemeClr val="lt1"/>
+          </a:fontRef>
+        </p:style>
+        <p:txBody>
+          <a:bodyPr rtlCol="0" anchor="ctr" wrap="square"/>
+          <a:lstStyle/>
           <a:p>
             <a:pPr algn="ctr">
-              <a:lnSpc>
-                <a:spcPct val="120000"/>
-              </a:lnSpc>
-              <a:defRPr sz="2200" b="0">
-                <a:solidFill>
-                  <a:srgbClr val="ADD8E6"/>
-                </a:solidFill>
-                <a:latin typeface="Segoe UI"/>
-              </a:defRPr>
-            </a:pPr>
-            <a:r>
-              <a:t>to running your very own assistant on your computer.</a:t>
-            </a:r>
-          </a:p>
+              <a:defRPr sz="2000" b="1">
+                <a:solidFill>
+                  <a:srgbClr val="FFFFFF"/>
+                </a:solidFill>
+                <a:latin typeface="Segoe UI"/>
+              </a:defRPr>
+            </a:pPr>
+            <a:r>
+              <a:t>B</a:t>
+            </a:r>
+          </a:p>
+        </p:txBody>
+      </p:sp>
+      <p:sp>
+        <p:nvSpPr>
+          <p:cNvPr id="9" name="TextBox 8"/>
+          <p:cNvSpPr txBox="1"/>
+          <p:nvPr/>
+        </p:nvSpPr>
+        <p:spPr>
+          <a:xfrm>
+            <a:off x="1737360" y="2258568"/>
+            <a:ext cx="9692640" cy="457200"/>
+          </a:xfrm>
+          <a:prstGeom prst="rect">
+            <a:avLst/>
+          </a:prstGeom>
+          <a:noFill/>
+        </p:spPr>
+        <p:txBody>
+          <a:bodyPr wrap="square">
+            <a:spAutoFit/>
+          </a:bodyPr>
+          <a:lstStyle/>
+          <a:p>
+            <a:pPr algn="l">
+              <a:defRPr sz="1900" b="0">
+                <a:solidFill>
+                  <a:srgbClr val="424242"/>
+                </a:solidFill>
+                <a:latin typeface="Segoe UI"/>
+              </a:defRPr>
+            </a:pPr>
+            <a:r>
+              <a:t>Watch It Act — approve a real task</a:t>
+            </a:r>
+          </a:p>
+        </p:txBody>
+      </p:sp>
+      <p:sp>
+        <p:nvSpPr>
+          <p:cNvPr id="10" name="Oval 9"/>
+          <p:cNvSpPr/>
+          <p:nvPr/>
+        </p:nvSpPr>
+        <p:spPr>
+          <a:xfrm>
+            <a:off x="914400" y="2871215"/>
+            <a:ext cx="457200" cy="457200"/>
+          </a:xfrm>
+          <a:prstGeom prst="ellipse">
+            <a:avLst/>
+          </a:prstGeom>
+          <a:solidFill>
+            <a:srgbClr val="9C27B0"/>
+          </a:solidFill>
+          <a:ln>
+            <a:noFill/>
+          </a:ln>
+        </p:spPr>
+        <p:style>
+          <a:lnRef idx="1">
+            <a:schemeClr val="accent1"/>
+          </a:lnRef>
+          <a:fillRef idx="3">
+            <a:schemeClr val="accent1"/>
+          </a:fillRef>
+          <a:effectRef idx="2">
+            <a:schemeClr val="accent1"/>
+          </a:effectRef>
+          <a:fontRef idx="minor">
+            <a:schemeClr val="lt1"/>
+          </a:fontRef>
+        </p:style>
+        <p:txBody>
+          <a:bodyPr rtlCol="0" anchor="ctr" wrap="square"/>
+          <a:lstStyle/>
           <a:p>
             <a:pPr algn="ctr">
-              <a:lnSpc>
-                <a:spcPct val="120000"/>
-              </a:lnSpc>
-              <a:defRPr sz="2200" b="0">
-                <a:solidFill>
-                  <a:srgbClr val="ADD8E6"/>
-                </a:solidFill>
-                <a:latin typeface="Segoe UI"/>
-              </a:defRPr>
-            </a:pPr>
-          </a:p>
+              <a:defRPr sz="2000" b="1">
+                <a:solidFill>
+                  <a:srgbClr val="FFFFFF"/>
+                </a:solidFill>
+                <a:latin typeface="Segoe UI"/>
+              </a:defRPr>
+            </a:pPr>
+            <a:r>
+              <a:t>C</a:t>
+            </a:r>
+          </a:p>
+        </p:txBody>
+      </p:sp>
+      <p:sp>
+        <p:nvSpPr>
+          <p:cNvPr id="11" name="TextBox 10"/>
+          <p:cNvSpPr txBox="1"/>
+          <p:nvPr/>
+        </p:nvSpPr>
+        <p:spPr>
+          <a:xfrm>
+            <a:off x="1737360" y="2916935"/>
+            <a:ext cx="9692640" cy="457200"/>
+          </a:xfrm>
+          <a:prstGeom prst="rect">
+            <a:avLst/>
+          </a:prstGeom>
+          <a:noFill/>
+        </p:spPr>
+        <p:txBody>
+          <a:bodyPr wrap="square">
+            <a:spAutoFit/>
+          </a:bodyPr>
+          <a:lstStyle/>
+          <a:p>
+            <a:pPr algn="l">
+              <a:defRPr sz="1900" b="0">
+                <a:solidFill>
+                  <a:srgbClr val="424242"/>
+                </a:solidFill>
+                <a:latin typeface="Segoe UI"/>
+              </a:defRPr>
+            </a:pPr>
+            <a:r>
+              <a:t>Give It a Personality — name it</a:t>
+            </a:r>
+          </a:p>
+        </p:txBody>
+      </p:sp>
+      <p:sp>
+        <p:nvSpPr>
+          <p:cNvPr id="12" name="Oval 11"/>
+          <p:cNvSpPr/>
+          <p:nvPr/>
+        </p:nvSpPr>
+        <p:spPr>
+          <a:xfrm>
+            <a:off x="914400" y="3529584"/>
+            <a:ext cx="457200" cy="457200"/>
+          </a:xfrm>
+          <a:prstGeom prst="ellipse">
+            <a:avLst/>
+          </a:prstGeom>
+          <a:solidFill>
+            <a:srgbClr val="009688"/>
+          </a:solidFill>
+          <a:ln>
+            <a:noFill/>
+          </a:ln>
+        </p:spPr>
+        <p:style>
+          <a:lnRef idx="1">
+            <a:schemeClr val="accent1"/>
+          </a:lnRef>
+          <a:fillRef idx="3">
+            <a:schemeClr val="accent1"/>
+          </a:fillRef>
+          <a:effectRef idx="2">
+            <a:schemeClr val="accent1"/>
+          </a:effectRef>
+          <a:fontRef idx="minor">
+            <a:schemeClr val="lt1"/>
+          </a:fontRef>
+        </p:style>
+        <p:txBody>
+          <a:bodyPr rtlCol="0" anchor="ctr" wrap="square"/>
+          <a:lstStyle/>
           <a:p>
             <a:pPr algn="ctr">
-              <a:lnSpc>
-                <a:spcPct val="120000"/>
-              </a:lnSpc>
-              <a:defRPr sz="2200" b="0">
-                <a:solidFill>
-                  <a:srgbClr val="ADD8E6"/>
-                </a:solidFill>
-                <a:latin typeface="Segoe UI"/>
-              </a:defRPr>
-            </a:pPr>
-            <a:r>
-              <a:t>You used it, you understood it, and you stayed safe doing it.</a:t>
+              <a:defRPr sz="2000" b="1">
+                <a:solidFill>
+                  <a:srgbClr val="FFFFFF"/>
+                </a:solidFill>
+                <a:latin typeface="Segoe UI"/>
+              </a:defRPr>
+            </a:pPr>
+            <a:r>
+              <a:t>D</a:t>
+            </a:r>
+          </a:p>
+        </p:txBody>
+      </p:sp>
+      <p:sp>
+        <p:nvSpPr>
+          <p:cNvPr id="13" name="TextBox 12"/>
+          <p:cNvSpPr txBox="1"/>
+          <p:nvPr/>
+        </p:nvSpPr>
+        <p:spPr>
+          <a:xfrm>
+            <a:off x="1737360" y="3575304"/>
+            <a:ext cx="9692640" cy="457200"/>
+          </a:xfrm>
+          <a:prstGeom prst="rect">
+            <a:avLst/>
+          </a:prstGeom>
+          <a:noFill/>
+        </p:spPr>
+        <p:txBody>
+          <a:bodyPr wrap="square">
+            <a:spAutoFit/>
+          </a:bodyPr>
+          <a:lstStyle/>
+          <a:p>
+            <a:pPr algn="l">
+              <a:defRPr sz="1900" b="0">
+                <a:solidFill>
+                  <a:srgbClr val="424242"/>
+                </a:solidFill>
+                <a:latin typeface="Segoe UI"/>
+              </a:defRPr>
+            </a:pPr>
+            <a:r>
+              <a:t>Make It Remember — save a fact</a:t>
+            </a:r>
+          </a:p>
+        </p:txBody>
+      </p:sp>
+      <p:sp>
+        <p:nvSpPr>
+          <p:cNvPr id="14" name="Oval 13"/>
+          <p:cNvSpPr/>
+          <p:nvPr/>
+        </p:nvSpPr>
+        <p:spPr>
+          <a:xfrm>
+            <a:off x="914400" y="4187952"/>
+            <a:ext cx="457200" cy="457200"/>
+          </a:xfrm>
+          <a:prstGeom prst="ellipse">
+            <a:avLst/>
+          </a:prstGeom>
+          <a:solidFill>
+            <a:srgbClr val="4CAF50"/>
+          </a:solidFill>
+          <a:ln>
+            <a:noFill/>
+          </a:ln>
+        </p:spPr>
+        <p:style>
+          <a:lnRef idx="1">
+            <a:schemeClr val="accent1"/>
+          </a:lnRef>
+          <a:fillRef idx="3">
+            <a:schemeClr val="accent1"/>
+          </a:fillRef>
+          <a:effectRef idx="2">
+            <a:schemeClr val="accent1"/>
+          </a:effectRef>
+          <a:fontRef idx="minor">
+            <a:schemeClr val="lt1"/>
+          </a:fontRef>
+        </p:style>
+        <p:txBody>
+          <a:bodyPr rtlCol="0" anchor="ctr" wrap="square"/>
+          <a:lstStyle/>
+          <a:p>
+            <a:pPr algn="ctr">
+              <a:defRPr sz="2000" b="1">
+                <a:solidFill>
+                  <a:srgbClr val="FFFFFF"/>
+                </a:solidFill>
+                <a:latin typeface="Segoe UI"/>
+              </a:defRPr>
+            </a:pPr>
+            <a:r>
+              <a:t>E</a:t>
+            </a:r>
+          </a:p>
+        </p:txBody>
+      </p:sp>
+      <p:sp>
+        <p:nvSpPr>
+          <p:cNvPr id="15" name="TextBox 14"/>
+          <p:cNvSpPr txBox="1"/>
+          <p:nvPr/>
+        </p:nvSpPr>
+        <p:spPr>
+          <a:xfrm>
+            <a:off x="1737360" y="4233672"/>
+            <a:ext cx="9692640" cy="457200"/>
+          </a:xfrm>
+          <a:prstGeom prst="rect">
+            <a:avLst/>
+          </a:prstGeom>
+          <a:noFill/>
+        </p:spPr>
+        <p:txBody>
+          <a:bodyPr wrap="square">
+            <a:spAutoFit/>
+          </a:bodyPr>
+          <a:lstStyle/>
+          <a:p>
+            <a:pPr algn="l">
+              <a:defRPr sz="1900" b="0">
+                <a:solidFill>
+                  <a:srgbClr val="424242"/>
+                </a:solidFill>
+                <a:latin typeface="Segoe UI"/>
+              </a:defRPr>
+            </a:pPr>
+            <a:r>
+              <a:t>Interview It — ask how it works</a:t>
+            </a:r>
+          </a:p>
+        </p:txBody>
+      </p:sp>
+      <p:sp>
+        <p:nvSpPr>
+          <p:cNvPr id="16" name="Oval 15"/>
+          <p:cNvSpPr/>
+          <p:nvPr/>
+        </p:nvSpPr>
+        <p:spPr>
+          <a:xfrm>
+            <a:off x="914400" y="4846320"/>
+            <a:ext cx="457200" cy="457200"/>
+          </a:xfrm>
+          <a:prstGeom prst="ellipse">
+            <a:avLst/>
+          </a:prstGeom>
+          <a:solidFill>
+            <a:srgbClr val="FF9933"/>
+          </a:solidFill>
+          <a:ln>
+            <a:noFill/>
+          </a:ln>
+        </p:spPr>
+        <p:style>
+          <a:lnRef idx="1">
+            <a:schemeClr val="accent1"/>
+          </a:lnRef>
+          <a:fillRef idx="3">
+            <a:schemeClr val="accent1"/>
+          </a:fillRef>
+          <a:effectRef idx="2">
+            <a:schemeClr val="accent1"/>
+          </a:effectRef>
+          <a:fontRef idx="minor">
+            <a:schemeClr val="lt1"/>
+          </a:fontRef>
+        </p:style>
+        <p:txBody>
+          <a:bodyPr rtlCol="0" anchor="ctr" wrap="square"/>
+          <a:lstStyle/>
+          <a:p>
+            <a:pPr algn="ctr">
+              <a:defRPr sz="2000" b="1">
+                <a:solidFill>
+                  <a:srgbClr val="FFFFFF"/>
+                </a:solidFill>
+                <a:latin typeface="Segoe UI"/>
+              </a:defRPr>
+            </a:pPr>
+            <a:r>
+              <a:t>F</a:t>
+            </a:r>
+          </a:p>
+        </p:txBody>
+      </p:sp>
+      <p:sp>
+        <p:nvSpPr>
+          <p:cNvPr id="17" name="TextBox 16"/>
+          <p:cNvSpPr txBox="1"/>
+          <p:nvPr/>
+        </p:nvSpPr>
+        <p:spPr>
+          <a:xfrm>
+            <a:off x="1737360" y="4892040"/>
+            <a:ext cx="9692640" cy="457200"/>
+          </a:xfrm>
+          <a:prstGeom prst="rect">
+            <a:avLst/>
+          </a:prstGeom>
+          <a:noFill/>
+        </p:spPr>
+        <p:txBody>
+          <a:bodyPr wrap="square">
+            <a:spAutoFit/>
+          </a:bodyPr>
+          <a:lstStyle/>
+          <a:p>
+            <a:pPr algn="l">
+              <a:defRPr sz="1900" b="0">
+                <a:solidFill>
+                  <a:srgbClr val="424242"/>
+                </a:solidFill>
+                <a:latin typeface="Segoe UI"/>
+              </a:defRPr>
+            </a:pPr>
+            <a:r>
+              <a:t>Quick Quests — build &amp; create</a:t>
             </a:r>
           </a:p>
         </p:txBody>
@@ -7293,7 +7861,7 @@
               </a:defRPr>
             </a:pPr>
             <a:r>
-              <a:t>Congratulations! 🎉</a:t>
+              <a:t>A New Way to Use Computers</a:t>
             </a:r>
           </a:p>
         </p:txBody>
@@ -7372,27 +7940,127 @@
               </a:defRPr>
             </a:pPr>
             <a:r>
-              <a:t>You finished the AI unit</a:t>
-            </a:r>
-          </a:p>
-        </p:txBody>
-      </p:sp>
-      <p:sp>
-        <p:nvSpPr>
-          <p:cNvPr id="6" name="Rounded Rectangle 5"/>
+              <a:t>Where AI is going</a:t>
+            </a:r>
+          </a:p>
+        </p:txBody>
+      </p:sp>
+      <p:sp>
+        <p:nvSpPr>
+          <p:cNvPr id="6" name="TextBox 5"/>
+          <p:cNvSpPr txBox="1"/>
+          <p:nvPr/>
+        </p:nvSpPr>
+        <p:spPr>
+          <a:xfrm>
+            <a:off x="731520" y="1554480"/>
+            <a:ext cx="10698480" cy="2194560"/>
+          </a:xfrm>
+          <a:prstGeom prst="rect">
+            <a:avLst/>
+          </a:prstGeom>
+          <a:noFill/>
+        </p:spPr>
+        <p:txBody>
+          <a:bodyPr wrap="square">
+            <a:spAutoFit/>
+          </a:bodyPr>
+          <a:lstStyle/>
+          <a:p>
+            <a:pPr algn="l">
+              <a:lnSpc>
+                <a:spcPct val="120000"/>
+              </a:lnSpc>
+              <a:defRPr sz="1900" b="0">
+                <a:solidFill>
+                  <a:srgbClr val="424242"/>
+                </a:solidFill>
+                <a:latin typeface="Segoe UI"/>
+              </a:defRPr>
+            </a:pPr>
+            <a:r>
+              <a:t>Instead of clicking through menus, people are starting to just</a:t>
+            </a:r>
+          </a:p>
+          <a:p>
+            <a:pPr algn="l">
+              <a:lnSpc>
+                <a:spcPct val="120000"/>
+              </a:lnSpc>
+              <a:defRPr sz="1900" b="0">
+                <a:solidFill>
+                  <a:srgbClr val="424242"/>
+                </a:solidFill>
+                <a:latin typeface="Segoe UI"/>
+              </a:defRPr>
+            </a:pPr>
+            <a:r>
+              <a:t>ASK their computer to do things — and an assistant does them.</a:t>
+            </a:r>
+          </a:p>
+          <a:p>
+            <a:pPr algn="l">
+              <a:lnSpc>
+                <a:spcPct val="120000"/>
+              </a:lnSpc>
+              <a:defRPr sz="1900" b="0">
+                <a:solidFill>
+                  <a:srgbClr val="424242"/>
+                </a:solidFill>
+                <a:latin typeface="Segoe UI"/>
+              </a:defRPr>
+            </a:pPr>
+          </a:p>
+          <a:p>
+            <a:pPr algn="l">
+              <a:lnSpc>
+                <a:spcPct val="120000"/>
+              </a:lnSpc>
+              <a:defRPr sz="1900" b="0">
+                <a:solidFill>
+                  <a:srgbClr val="424242"/>
+                </a:solidFill>
+                <a:latin typeface="Segoe UI"/>
+              </a:defRPr>
+            </a:pPr>
+            <a:r>
+              <a:t>These assistants are built from the same ideas you learned:</a:t>
+            </a:r>
+          </a:p>
+          <a:p>
+            <a:pPr algn="l">
+              <a:lnSpc>
+                <a:spcPct val="120000"/>
+              </a:lnSpc>
+              <a:defRPr sz="1900" b="0">
+                <a:solidFill>
+                  <a:srgbClr val="424242"/>
+                </a:solidFill>
+                <a:latin typeface="Segoe UI"/>
+              </a:defRPr>
+            </a:pPr>
+            <a:r>
+              <a:t>LLMs, tools, memory, and loops.</a:t>
+            </a:r>
+          </a:p>
+        </p:txBody>
+      </p:sp>
+      <p:sp>
+        <p:nvSpPr>
+          <p:cNvPr id="7" name="Rounded Rectangle 6"/>
           <p:cNvSpPr/>
           <p:nvPr/>
         </p:nvSpPr>
         <p:spPr>
           <a:xfrm>
-            <a:off x="548640" y="1554480"/>
-            <a:ext cx="3611880" cy="2286000"/>
+            <a:off x="914400" y="5760720"/>
+            <a:ext cx="10360152" cy="640080"/>
           </a:xfrm>
           <a:prstGeom prst="roundRect">
             <a:avLst/>
           </a:prstGeom>
           <a:solidFill>
-            <a:srgbClr val="3467A6"/>
+            <a:srgbClr val="009688"/>
           </a:solidFill>
           <a:ln>
             <a:noFill/>
@@ -7413,444 +8081,6 @@
           </a:fontRef>
         </p:style>
         <p:txBody>
-          <a:bodyPr rtlCol="0" anchor="ctr"/>
-          <a:lstStyle/>
-          <a:p>
-            <a:pPr algn="ctr"/>
-          </a:p>
-        </p:txBody>
-      </p:sp>
-      <p:sp>
-        <p:nvSpPr>
-          <p:cNvPr id="7" name="TextBox 6"/>
-          <p:cNvSpPr txBox="1"/>
-          <p:nvPr/>
-        </p:nvSpPr>
-        <p:spPr>
-          <a:xfrm>
-            <a:off x="777240" y="1719072"/>
-            <a:ext cx="3154680" cy="457200"/>
-          </a:xfrm>
-          <a:prstGeom prst="rect">
-            <a:avLst/>
-          </a:prstGeom>
-          <a:noFill/>
-        </p:spPr>
-        <p:txBody>
-          <a:bodyPr wrap="square">
-            <a:spAutoFit/>
-          </a:bodyPr>
-          <a:lstStyle/>
-          <a:p>
-            <a:pPr algn="l">
-              <a:defRPr sz="1800" b="1">
-                <a:solidFill>
-                  <a:srgbClr val="FFFFFF"/>
-                </a:solidFill>
-                <a:latin typeface="Segoe UI"/>
-              </a:defRPr>
-            </a:pPr>
-            <a:r>
-              <a:t>You can explain</a:t>
-            </a:r>
-          </a:p>
-        </p:txBody>
-      </p:sp>
-      <p:sp>
-        <p:nvSpPr>
-          <p:cNvPr id="8" name="TextBox 7"/>
-          <p:cNvSpPr txBox="1"/>
-          <p:nvPr/>
-        </p:nvSpPr>
-        <p:spPr>
-          <a:xfrm>
-            <a:off x="777240" y="2267712"/>
-            <a:ext cx="3154680" cy="1417320"/>
-          </a:xfrm>
-          <a:prstGeom prst="rect">
-            <a:avLst/>
-          </a:prstGeom>
-          <a:noFill/>
-        </p:spPr>
-        <p:txBody>
-          <a:bodyPr wrap="square">
-            <a:spAutoFit/>
-          </a:bodyPr>
-          <a:lstStyle/>
-          <a:p>
-            <a:pPr algn="l">
-              <a:lnSpc>
-                <a:spcPct val="110000"/>
-              </a:lnSpc>
-              <a:defRPr sz="1500" b="0">
-                <a:solidFill>
-                  <a:srgbClr val="FFFFFF"/>
-                </a:solidFill>
-                <a:latin typeface="Segoe UI"/>
-              </a:defRPr>
-            </a:pPr>
-            <a:r>
-              <a:t>what AI agents</a:t>
-            </a:r>
-          </a:p>
-          <a:p>
-            <a:pPr algn="l">
-              <a:lnSpc>
-                <a:spcPct val="110000"/>
-              </a:lnSpc>
-              <a:defRPr sz="1500" b="0">
-                <a:solidFill>
-                  <a:srgbClr val="FFFFFF"/>
-                </a:solidFill>
-                <a:latin typeface="Segoe UI"/>
-              </a:defRPr>
-            </a:pPr>
-            <a:r>
-              <a:t>really are.</a:t>
-            </a:r>
-          </a:p>
-        </p:txBody>
-      </p:sp>
-      <p:sp>
-        <p:nvSpPr>
-          <p:cNvPr id="9" name="Rounded Rectangle 8"/>
-          <p:cNvSpPr/>
-          <p:nvPr/>
-        </p:nvSpPr>
-        <p:spPr>
-          <a:xfrm>
-            <a:off x="4297680" y="1554480"/>
-            <a:ext cx="3611880" cy="2286000"/>
-          </a:xfrm>
-          <a:prstGeom prst="roundRect">
-            <a:avLst/>
-          </a:prstGeom>
-          <a:solidFill>
-            <a:srgbClr val="9C27B0"/>
-          </a:solidFill>
-          <a:ln>
-            <a:noFill/>
-          </a:ln>
-        </p:spPr>
-        <p:style>
-          <a:lnRef idx="1">
-            <a:schemeClr val="accent1"/>
-          </a:lnRef>
-          <a:fillRef idx="3">
-            <a:schemeClr val="accent1"/>
-          </a:fillRef>
-          <a:effectRef idx="2">
-            <a:schemeClr val="accent1"/>
-          </a:effectRef>
-          <a:fontRef idx="minor">
-            <a:schemeClr val="lt1"/>
-          </a:fontRef>
-        </p:style>
-        <p:txBody>
-          <a:bodyPr rtlCol="0" anchor="ctr"/>
-          <a:lstStyle/>
-          <a:p>
-            <a:pPr algn="ctr"/>
-          </a:p>
-        </p:txBody>
-      </p:sp>
-      <p:sp>
-        <p:nvSpPr>
-          <p:cNvPr id="10" name="TextBox 9"/>
-          <p:cNvSpPr txBox="1"/>
-          <p:nvPr/>
-        </p:nvSpPr>
-        <p:spPr>
-          <a:xfrm>
-            <a:off x="4526280" y="1719072"/>
-            <a:ext cx="3154680" cy="457200"/>
-          </a:xfrm>
-          <a:prstGeom prst="rect">
-            <a:avLst/>
-          </a:prstGeom>
-          <a:noFill/>
-        </p:spPr>
-        <p:txBody>
-          <a:bodyPr wrap="square">
-            <a:spAutoFit/>
-          </a:bodyPr>
-          <a:lstStyle/>
-          <a:p>
-            <a:pPr algn="l">
-              <a:defRPr sz="1800" b="1">
-                <a:solidFill>
-                  <a:srgbClr val="FFFFFF"/>
-                </a:solidFill>
-                <a:latin typeface="Segoe UI"/>
-              </a:defRPr>
-            </a:pPr>
-            <a:r>
-              <a:t>You built</a:t>
-            </a:r>
-          </a:p>
-        </p:txBody>
-      </p:sp>
-      <p:sp>
-        <p:nvSpPr>
-          <p:cNvPr id="11" name="TextBox 10"/>
-          <p:cNvSpPr txBox="1"/>
-          <p:nvPr/>
-        </p:nvSpPr>
-        <p:spPr>
-          <a:xfrm>
-            <a:off x="4526280" y="2267712"/>
-            <a:ext cx="3154680" cy="1417320"/>
-          </a:xfrm>
-          <a:prstGeom prst="rect">
-            <a:avLst/>
-          </a:prstGeom>
-          <a:noFill/>
-        </p:spPr>
-        <p:txBody>
-          <a:bodyPr wrap="square">
-            <a:spAutoFit/>
-          </a:bodyPr>
-          <a:lstStyle/>
-          <a:p>
-            <a:pPr algn="l">
-              <a:lnSpc>
-                <a:spcPct val="110000"/>
-              </a:lnSpc>
-              <a:defRPr sz="1500" b="0">
-                <a:solidFill>
-                  <a:srgbClr val="FFFFFF"/>
-                </a:solidFill>
-                <a:latin typeface="Segoe UI"/>
-              </a:defRPr>
-            </a:pPr>
-            <a:r>
-              <a:t>your own AI</a:t>
-            </a:r>
-          </a:p>
-          <a:p>
-            <a:pPr algn="l">
-              <a:lnSpc>
-                <a:spcPct val="110000"/>
-              </a:lnSpc>
-              <a:defRPr sz="1500" b="0">
-                <a:solidFill>
-                  <a:srgbClr val="FFFFFF"/>
-                </a:solidFill>
-                <a:latin typeface="Segoe UI"/>
-              </a:defRPr>
-            </a:pPr>
-            <a:r>
-              <a:t>tools.</a:t>
-            </a:r>
-          </a:p>
-        </p:txBody>
-      </p:sp>
-      <p:sp>
-        <p:nvSpPr>
-          <p:cNvPr id="12" name="Rounded Rectangle 11"/>
-          <p:cNvSpPr/>
-          <p:nvPr/>
-        </p:nvSpPr>
-        <p:spPr>
-          <a:xfrm>
-            <a:off x="8046720" y="1554480"/>
-            <a:ext cx="3611880" cy="2286000"/>
-          </a:xfrm>
-          <a:prstGeom prst="roundRect">
-            <a:avLst/>
-          </a:prstGeom>
-          <a:solidFill>
-            <a:srgbClr val="4CAF50"/>
-          </a:solidFill>
-          <a:ln>
-            <a:noFill/>
-          </a:ln>
-        </p:spPr>
-        <p:style>
-          <a:lnRef idx="1">
-            <a:schemeClr val="accent1"/>
-          </a:lnRef>
-          <a:fillRef idx="3">
-            <a:schemeClr val="accent1"/>
-          </a:fillRef>
-          <a:effectRef idx="2">
-            <a:schemeClr val="accent1"/>
-          </a:effectRef>
-          <a:fontRef idx="minor">
-            <a:schemeClr val="lt1"/>
-          </a:fontRef>
-        </p:style>
-        <p:txBody>
-          <a:bodyPr rtlCol="0" anchor="ctr"/>
-          <a:lstStyle/>
-          <a:p>
-            <a:pPr algn="ctr"/>
-          </a:p>
-        </p:txBody>
-      </p:sp>
-      <p:sp>
-        <p:nvSpPr>
-          <p:cNvPr id="13" name="TextBox 12"/>
-          <p:cNvSpPr txBox="1"/>
-          <p:nvPr/>
-        </p:nvSpPr>
-        <p:spPr>
-          <a:xfrm>
-            <a:off x="8275320" y="1719072"/>
-            <a:ext cx="3154680" cy="457200"/>
-          </a:xfrm>
-          <a:prstGeom prst="rect">
-            <a:avLst/>
-          </a:prstGeom>
-          <a:noFill/>
-        </p:spPr>
-        <p:txBody>
-          <a:bodyPr wrap="square">
-            <a:spAutoFit/>
-          </a:bodyPr>
-          <a:lstStyle/>
-          <a:p>
-            <a:pPr algn="l">
-              <a:defRPr sz="1800" b="1">
-                <a:solidFill>
-                  <a:srgbClr val="FFFFFF"/>
-                </a:solidFill>
-                <a:latin typeface="Segoe UI"/>
-              </a:defRPr>
-            </a:pPr>
-            <a:r>
-              <a:t>You ran</a:t>
-            </a:r>
-          </a:p>
-        </p:txBody>
-      </p:sp>
-      <p:sp>
-        <p:nvSpPr>
-          <p:cNvPr id="14" name="TextBox 13"/>
-          <p:cNvSpPr txBox="1"/>
-          <p:nvPr/>
-        </p:nvSpPr>
-        <p:spPr>
-          <a:xfrm>
-            <a:off x="8275320" y="2267712"/>
-            <a:ext cx="3154680" cy="1417320"/>
-          </a:xfrm>
-          <a:prstGeom prst="rect">
-            <a:avLst/>
-          </a:prstGeom>
-          <a:noFill/>
-        </p:spPr>
-        <p:txBody>
-          <a:bodyPr wrap="square">
-            <a:spAutoFit/>
-          </a:bodyPr>
-          <a:lstStyle/>
-          <a:p>
-            <a:pPr algn="l">
-              <a:lnSpc>
-                <a:spcPct val="110000"/>
-              </a:lnSpc>
-              <a:defRPr sz="1500" b="0">
-                <a:solidFill>
-                  <a:srgbClr val="FFFFFF"/>
-                </a:solidFill>
-                <a:latin typeface="Segoe UI"/>
-              </a:defRPr>
-            </a:pPr>
-            <a:r>
-              <a:t>a real AI</a:t>
-            </a:r>
-          </a:p>
-          <a:p>
-            <a:pPr algn="l">
-              <a:lnSpc>
-                <a:spcPct val="110000"/>
-              </a:lnSpc>
-              <a:defRPr sz="1500" b="0">
-                <a:solidFill>
-                  <a:srgbClr val="FFFFFF"/>
-                </a:solidFill>
-                <a:latin typeface="Segoe UI"/>
-              </a:defRPr>
-            </a:pPr>
-            <a:r>
-              <a:t>assistant.</a:t>
-            </a:r>
-          </a:p>
-        </p:txBody>
-      </p:sp>
-      <p:sp>
-        <p:nvSpPr>
-          <p:cNvPr id="15" name="TextBox 14"/>
-          <p:cNvSpPr txBox="1"/>
-          <p:nvPr/>
-        </p:nvSpPr>
-        <p:spPr>
-          <a:xfrm>
-            <a:off x="731520" y="4114800"/>
-            <a:ext cx="10698480" cy="914400"/>
-          </a:xfrm>
-          <a:prstGeom prst="rect">
-            <a:avLst/>
-          </a:prstGeom>
-          <a:noFill/>
-        </p:spPr>
-        <p:txBody>
-          <a:bodyPr wrap="square">
-            <a:spAutoFit/>
-          </a:bodyPr>
-          <a:lstStyle/>
-          <a:p>
-            <a:pPr algn="ctr">
-              <a:defRPr sz="1800" b="1">
-                <a:solidFill>
-                  <a:srgbClr val="424242"/>
-                </a:solidFill>
-                <a:latin typeface="Segoe UI"/>
-              </a:defRPr>
-            </a:pPr>
-            <a:r>
-              <a:t>Next: Python programming starts in July — now you'll learn to BUILD the tech you've been using.</a:t>
-            </a:r>
-          </a:p>
-        </p:txBody>
-      </p:sp>
-      <p:sp>
-        <p:nvSpPr>
-          <p:cNvPr id="16" name="Rounded Rectangle 15"/>
-          <p:cNvSpPr/>
-          <p:nvPr/>
-        </p:nvSpPr>
-        <p:spPr>
-          <a:xfrm>
-            <a:off x="914400" y="5760720"/>
-            <a:ext cx="10360152" cy="640080"/>
-          </a:xfrm>
-          <a:prstGeom prst="roundRect">
-            <a:avLst/>
-          </a:prstGeom>
-          <a:solidFill>
-            <a:srgbClr val="FF9933"/>
-          </a:solidFill>
-          <a:ln>
-            <a:noFill/>
-          </a:ln>
-        </p:spPr>
-        <p:style>
-          <a:lnRef idx="1">
-            <a:schemeClr val="accent1"/>
-          </a:lnRef>
-          <a:fillRef idx="3">
-            <a:schemeClr val="accent1"/>
-          </a:fillRef>
-          <a:effectRef idx="2">
-            <a:schemeClr val="accent1"/>
-          </a:effectRef>
-          <a:fontRef idx="minor">
-            <a:schemeClr val="lt1"/>
-          </a:fontRef>
-        </p:style>
-        <p:txBody>
           <a:bodyPr rtlCol="0" anchor="ctr" wrap="square"/>
           <a:lstStyle/>
           <a:p>
@@ -7866,7 +8096,7 @@
               </a:defRPr>
             </a:pPr>
             <a:r>
-              <a:t>You're not just using AI — you're on your way to building it.</a:t>
+              <a:t>They're written in languages like Python — which we start in July!</a:t>
             </a:r>
           </a:p>
         </p:txBody>
@@ -7940,8 +8170,8 @@
         </p:nvSpPr>
         <p:spPr>
           <a:xfrm>
-            <a:off x="0" y="1463040"/>
-            <a:ext cx="12188952" cy="1828800"/>
+            <a:off x="731520" y="1371600"/>
+            <a:ext cx="10698480" cy="914400"/>
           </a:xfrm>
           <a:prstGeom prst="rect">
             <a:avLst/>
@@ -7955,15 +8185,15 @@
           <a:lstStyle/>
           <a:p>
             <a:pPr algn="ctr">
-              <a:defRPr sz="12000" b="0">
-                <a:solidFill>
-                  <a:srgbClr val="FFFFFF"/>
-                </a:solidFill>
-                <a:latin typeface="Segoe UI"/>
-              </a:defRPr>
-            </a:pPr>
-            <a:r>
-              <a:t>?</a:t>
+              <a:defRPr sz="4400" b="1">
+                <a:solidFill>
+                  <a:srgbClr val="FFFFFF"/>
+                </a:solidFill>
+                <a:latin typeface="Segoe UI"/>
+              </a:defRPr>
+            </a:pPr>
+            <a:r>
+              <a:t>How Far You've Come 🎉</a:t>
             </a:r>
           </a:p>
         </p:txBody>
@@ -7976,8 +8206,8 @@
         </p:nvSpPr>
         <p:spPr>
           <a:xfrm>
-            <a:off x="0" y="3200400"/>
-            <a:ext cx="12188952" cy="914400"/>
+            <a:off x="1097280" y="2743200"/>
+            <a:ext cx="9966960" cy="2377440"/>
           </a:xfrm>
           <a:prstGeom prst="rect">
             <a:avLst/>
@@ -7991,43 +8221,26 @@
           <a:lstStyle/>
           <a:p>
             <a:pPr algn="ctr">
-              <a:defRPr sz="6000" b="1">
-                <a:solidFill>
-                  <a:srgbClr val="FFFFFF"/>
-                </a:solidFill>
-                <a:latin typeface="Segoe UI Semibold"/>
-              </a:defRPr>
-            </a:pPr>
-            <a:r>
-              <a:t>Questions?</a:t>
-            </a:r>
-          </a:p>
-        </p:txBody>
-      </p:sp>
-      <p:sp>
-        <p:nvSpPr>
-          <p:cNvPr id="5" name="TextBox 4"/>
-          <p:cNvSpPr txBox="1"/>
-          <p:nvPr/>
-        </p:nvSpPr>
-        <p:spPr>
-          <a:xfrm>
-            <a:off x="0" y="4663440"/>
-            <a:ext cx="12188952" cy="548640"/>
-          </a:xfrm>
-          <a:prstGeom prst="rect">
-            <a:avLst/>
-          </a:prstGeom>
-          <a:noFill/>
-        </p:spPr>
-        <p:txBody>
-          <a:bodyPr wrap="square">
-            <a:spAutoFit/>
-          </a:bodyPr>
-          <a:lstStyle/>
+              <a:lnSpc>
+                <a:spcPct val="120000"/>
+              </a:lnSpc>
+              <a:defRPr sz="2200" b="0">
+                <a:solidFill>
+                  <a:srgbClr val="ADD8E6"/>
+                </a:solidFill>
+                <a:latin typeface="Segoe UI"/>
+              </a:defRPr>
+            </a:pPr>
+            <a:r>
+              <a:t>From "what is an AI agent?"</a:t>
+            </a:r>
+          </a:p>
           <a:p>
             <a:pPr algn="ctr">
-              <a:defRPr sz="2400" b="0">
+              <a:lnSpc>
+                <a:spcPct val="120000"/>
+              </a:lnSpc>
+              <a:defRPr sz="2200" b="0">
                 <a:solidFill>
                   <a:srgbClr val="ADD8E6"/>
                 </a:solidFill>
@@ -8035,7 +8248,36 @@
               </a:defRPr>
             </a:pPr>
             <a:r>
-              <a:t>Ask away — then it's Kahoot time! 🦞</a:t>
+              <a:t>to running your very own assistant on your computer.</a:t>
+            </a:r>
+          </a:p>
+          <a:p>
+            <a:pPr algn="ctr">
+              <a:lnSpc>
+                <a:spcPct val="120000"/>
+              </a:lnSpc>
+              <a:defRPr sz="2200" b="0">
+                <a:solidFill>
+                  <a:srgbClr val="ADD8E6"/>
+                </a:solidFill>
+                <a:latin typeface="Segoe UI"/>
+              </a:defRPr>
+            </a:pPr>
+          </a:p>
+          <a:p>
+            <a:pPr algn="ctr">
+              <a:lnSpc>
+                <a:spcPct val="120000"/>
+              </a:lnSpc>
+              <a:defRPr sz="2200" b="0">
+                <a:solidFill>
+                  <a:srgbClr val="ADD8E6"/>
+                </a:solidFill>
+                <a:latin typeface="Segoe UI"/>
+              </a:defRPr>
+            </a:pPr>
+            <a:r>
+              <a:t>You used it, you understood it, and you stayed safe doing it.</a:t>
             </a:r>
           </a:p>
         </p:txBody>
@@ -8725,6 +8967,845 @@
 </p:sld>
 </file>
 
+<file path=ppt/slides/slide20.xml><?xml version="1.0" encoding="utf-8"?>
+<p:sld xmlns:a="http://schemas.openxmlformats.org/drawingml/2006/main" xmlns:p="http://schemas.openxmlformats.org/presentationml/2006/main" xmlns:r="http://schemas.openxmlformats.org/officeDocument/2006/relationships">
+  <p:cSld>
+    <p:spTree>
+      <p:nvGrpSpPr>
+        <p:cNvPr id="1" name=""/>
+        <p:cNvGrpSpPr/>
+        <p:nvPr/>
+      </p:nvGrpSpPr>
+      <p:grpSpPr/>
+      <p:sp>
+        <p:nvSpPr>
+          <p:cNvPr id="2" name="Rectangle 1"/>
+          <p:cNvSpPr/>
+          <p:nvPr/>
+        </p:nvSpPr>
+        <p:spPr>
+          <a:xfrm>
+            <a:off x="0" y="0"/>
+            <a:ext cx="12188952" cy="1188720"/>
+          </a:xfrm>
+          <a:prstGeom prst="rect">
+            <a:avLst/>
+          </a:prstGeom>
+          <a:solidFill>
+            <a:srgbClr val="1E3A5F"/>
+          </a:solidFill>
+          <a:ln>
+            <a:noFill/>
+          </a:ln>
+        </p:spPr>
+        <p:style>
+          <a:lnRef idx="1">
+            <a:schemeClr val="accent1"/>
+          </a:lnRef>
+          <a:fillRef idx="3">
+            <a:schemeClr val="accent1"/>
+          </a:fillRef>
+          <a:effectRef idx="2">
+            <a:schemeClr val="accent1"/>
+          </a:effectRef>
+          <a:fontRef idx="minor">
+            <a:schemeClr val="lt1"/>
+          </a:fontRef>
+        </p:style>
+        <p:txBody>
+          <a:bodyPr rtlCol="0" anchor="ctr"/>
+          <a:lstStyle/>
+          <a:p>
+            <a:pPr algn="ctr"/>
+          </a:p>
+        </p:txBody>
+      </p:sp>
+      <p:sp>
+        <p:nvSpPr>
+          <p:cNvPr id="3" name="TextBox 2"/>
+          <p:cNvSpPr txBox="1"/>
+          <p:nvPr/>
+        </p:nvSpPr>
+        <p:spPr>
+          <a:xfrm>
+            <a:off x="457200" y="320040"/>
+            <a:ext cx="11274552" cy="640080"/>
+          </a:xfrm>
+          <a:prstGeom prst="rect">
+            <a:avLst/>
+          </a:prstGeom>
+          <a:noFill/>
+        </p:spPr>
+        <p:txBody>
+          <a:bodyPr wrap="square">
+            <a:spAutoFit/>
+          </a:bodyPr>
+          <a:lstStyle/>
+          <a:p>
+            <a:pPr algn="l">
+              <a:defRPr sz="3600" b="1">
+                <a:solidFill>
+                  <a:srgbClr val="FFFFFF"/>
+                </a:solidFill>
+                <a:latin typeface="Segoe UI Semibold"/>
+              </a:defRPr>
+            </a:pPr>
+            <a:r>
+              <a:t>Congratulations! 🎉</a:t>
+            </a:r>
+          </a:p>
+        </p:txBody>
+      </p:sp>
+      <p:sp>
+        <p:nvSpPr>
+          <p:cNvPr id="4" name="Rectangle 3"/>
+          <p:cNvSpPr/>
+          <p:nvPr/>
+        </p:nvSpPr>
+        <p:spPr>
+          <a:xfrm>
+            <a:off x="0" y="1188720"/>
+            <a:ext cx="12188952" cy="73152"/>
+          </a:xfrm>
+          <a:prstGeom prst="rect">
+            <a:avLst/>
+          </a:prstGeom>
+          <a:solidFill>
+            <a:srgbClr val="FF9933"/>
+          </a:solidFill>
+          <a:ln>
+            <a:noFill/>
+          </a:ln>
+        </p:spPr>
+        <p:style>
+          <a:lnRef idx="1">
+            <a:schemeClr val="accent1"/>
+          </a:lnRef>
+          <a:fillRef idx="3">
+            <a:schemeClr val="accent1"/>
+          </a:fillRef>
+          <a:effectRef idx="2">
+            <a:schemeClr val="accent1"/>
+          </a:effectRef>
+          <a:fontRef idx="minor">
+            <a:schemeClr val="lt1"/>
+          </a:fontRef>
+        </p:style>
+        <p:txBody>
+          <a:bodyPr rtlCol="0" anchor="ctr"/>
+          <a:lstStyle/>
+          <a:p>
+            <a:pPr algn="ctr"/>
+          </a:p>
+        </p:txBody>
+      </p:sp>
+      <p:sp>
+        <p:nvSpPr>
+          <p:cNvPr id="5" name="TextBox 4"/>
+          <p:cNvSpPr txBox="1"/>
+          <p:nvPr/>
+        </p:nvSpPr>
+        <p:spPr>
+          <a:xfrm>
+            <a:off x="457200" y="868680"/>
+            <a:ext cx="11274552" cy="365760"/>
+          </a:xfrm>
+          <a:prstGeom prst="rect">
+            <a:avLst/>
+          </a:prstGeom>
+          <a:noFill/>
+        </p:spPr>
+        <p:txBody>
+          <a:bodyPr wrap="square">
+            <a:spAutoFit/>
+          </a:bodyPr>
+          <a:lstStyle/>
+          <a:p>
+            <a:pPr algn="l">
+              <a:defRPr sz="1600" b="0">
+                <a:solidFill>
+                  <a:srgbClr val="ADD8E6"/>
+                </a:solidFill>
+                <a:latin typeface="Segoe UI"/>
+              </a:defRPr>
+            </a:pPr>
+            <a:r>
+              <a:t>You finished the AI unit</a:t>
+            </a:r>
+          </a:p>
+        </p:txBody>
+      </p:sp>
+      <p:sp>
+        <p:nvSpPr>
+          <p:cNvPr id="6" name="Rounded Rectangle 5"/>
+          <p:cNvSpPr/>
+          <p:nvPr/>
+        </p:nvSpPr>
+        <p:spPr>
+          <a:xfrm>
+            <a:off x="548640" y="1554480"/>
+            <a:ext cx="3611880" cy="2286000"/>
+          </a:xfrm>
+          <a:prstGeom prst="roundRect">
+            <a:avLst/>
+          </a:prstGeom>
+          <a:solidFill>
+            <a:srgbClr val="3467A6"/>
+          </a:solidFill>
+          <a:ln>
+            <a:noFill/>
+          </a:ln>
+        </p:spPr>
+        <p:style>
+          <a:lnRef idx="1">
+            <a:schemeClr val="accent1"/>
+          </a:lnRef>
+          <a:fillRef idx="3">
+            <a:schemeClr val="accent1"/>
+          </a:fillRef>
+          <a:effectRef idx="2">
+            <a:schemeClr val="accent1"/>
+          </a:effectRef>
+          <a:fontRef idx="minor">
+            <a:schemeClr val="lt1"/>
+          </a:fontRef>
+        </p:style>
+        <p:txBody>
+          <a:bodyPr rtlCol="0" anchor="ctr"/>
+          <a:lstStyle/>
+          <a:p>
+            <a:pPr algn="ctr"/>
+          </a:p>
+        </p:txBody>
+      </p:sp>
+      <p:sp>
+        <p:nvSpPr>
+          <p:cNvPr id="7" name="TextBox 6"/>
+          <p:cNvSpPr txBox="1"/>
+          <p:nvPr/>
+        </p:nvSpPr>
+        <p:spPr>
+          <a:xfrm>
+            <a:off x="777240" y="1719072"/>
+            <a:ext cx="3154680" cy="457200"/>
+          </a:xfrm>
+          <a:prstGeom prst="rect">
+            <a:avLst/>
+          </a:prstGeom>
+          <a:noFill/>
+        </p:spPr>
+        <p:txBody>
+          <a:bodyPr wrap="square">
+            <a:spAutoFit/>
+          </a:bodyPr>
+          <a:lstStyle/>
+          <a:p>
+            <a:pPr algn="l">
+              <a:defRPr sz="1800" b="1">
+                <a:solidFill>
+                  <a:srgbClr val="FFFFFF"/>
+                </a:solidFill>
+                <a:latin typeface="Segoe UI"/>
+              </a:defRPr>
+            </a:pPr>
+            <a:r>
+              <a:t>You can explain</a:t>
+            </a:r>
+          </a:p>
+        </p:txBody>
+      </p:sp>
+      <p:sp>
+        <p:nvSpPr>
+          <p:cNvPr id="8" name="TextBox 7"/>
+          <p:cNvSpPr txBox="1"/>
+          <p:nvPr/>
+        </p:nvSpPr>
+        <p:spPr>
+          <a:xfrm>
+            <a:off x="777240" y="2267712"/>
+            <a:ext cx="3154680" cy="1417320"/>
+          </a:xfrm>
+          <a:prstGeom prst="rect">
+            <a:avLst/>
+          </a:prstGeom>
+          <a:noFill/>
+        </p:spPr>
+        <p:txBody>
+          <a:bodyPr wrap="square">
+            <a:spAutoFit/>
+          </a:bodyPr>
+          <a:lstStyle/>
+          <a:p>
+            <a:pPr algn="l">
+              <a:lnSpc>
+                <a:spcPct val="110000"/>
+              </a:lnSpc>
+              <a:defRPr sz="1500" b="0">
+                <a:solidFill>
+                  <a:srgbClr val="FFFFFF"/>
+                </a:solidFill>
+                <a:latin typeface="Segoe UI"/>
+              </a:defRPr>
+            </a:pPr>
+            <a:r>
+              <a:t>what AI agents</a:t>
+            </a:r>
+          </a:p>
+          <a:p>
+            <a:pPr algn="l">
+              <a:lnSpc>
+                <a:spcPct val="110000"/>
+              </a:lnSpc>
+              <a:defRPr sz="1500" b="0">
+                <a:solidFill>
+                  <a:srgbClr val="FFFFFF"/>
+                </a:solidFill>
+                <a:latin typeface="Segoe UI"/>
+              </a:defRPr>
+            </a:pPr>
+            <a:r>
+              <a:t>really are.</a:t>
+            </a:r>
+          </a:p>
+        </p:txBody>
+      </p:sp>
+      <p:sp>
+        <p:nvSpPr>
+          <p:cNvPr id="9" name="Rounded Rectangle 8"/>
+          <p:cNvSpPr/>
+          <p:nvPr/>
+        </p:nvSpPr>
+        <p:spPr>
+          <a:xfrm>
+            <a:off x="4297680" y="1554480"/>
+            <a:ext cx="3611880" cy="2286000"/>
+          </a:xfrm>
+          <a:prstGeom prst="roundRect">
+            <a:avLst/>
+          </a:prstGeom>
+          <a:solidFill>
+            <a:srgbClr val="9C27B0"/>
+          </a:solidFill>
+          <a:ln>
+            <a:noFill/>
+          </a:ln>
+        </p:spPr>
+        <p:style>
+          <a:lnRef idx="1">
+            <a:schemeClr val="accent1"/>
+          </a:lnRef>
+          <a:fillRef idx="3">
+            <a:schemeClr val="accent1"/>
+          </a:fillRef>
+          <a:effectRef idx="2">
+            <a:schemeClr val="accent1"/>
+          </a:effectRef>
+          <a:fontRef idx="minor">
+            <a:schemeClr val="lt1"/>
+          </a:fontRef>
+        </p:style>
+        <p:txBody>
+          <a:bodyPr rtlCol="0" anchor="ctr"/>
+          <a:lstStyle/>
+          <a:p>
+            <a:pPr algn="ctr"/>
+          </a:p>
+        </p:txBody>
+      </p:sp>
+      <p:sp>
+        <p:nvSpPr>
+          <p:cNvPr id="10" name="TextBox 9"/>
+          <p:cNvSpPr txBox="1"/>
+          <p:nvPr/>
+        </p:nvSpPr>
+        <p:spPr>
+          <a:xfrm>
+            <a:off x="4526280" y="1719072"/>
+            <a:ext cx="3154680" cy="457200"/>
+          </a:xfrm>
+          <a:prstGeom prst="rect">
+            <a:avLst/>
+          </a:prstGeom>
+          <a:noFill/>
+        </p:spPr>
+        <p:txBody>
+          <a:bodyPr wrap="square">
+            <a:spAutoFit/>
+          </a:bodyPr>
+          <a:lstStyle/>
+          <a:p>
+            <a:pPr algn="l">
+              <a:defRPr sz="1800" b="1">
+                <a:solidFill>
+                  <a:srgbClr val="FFFFFF"/>
+                </a:solidFill>
+                <a:latin typeface="Segoe UI"/>
+              </a:defRPr>
+            </a:pPr>
+            <a:r>
+              <a:t>You built</a:t>
+            </a:r>
+          </a:p>
+        </p:txBody>
+      </p:sp>
+      <p:sp>
+        <p:nvSpPr>
+          <p:cNvPr id="11" name="TextBox 10"/>
+          <p:cNvSpPr txBox="1"/>
+          <p:nvPr/>
+        </p:nvSpPr>
+        <p:spPr>
+          <a:xfrm>
+            <a:off x="4526280" y="2267712"/>
+            <a:ext cx="3154680" cy="1417320"/>
+          </a:xfrm>
+          <a:prstGeom prst="rect">
+            <a:avLst/>
+          </a:prstGeom>
+          <a:noFill/>
+        </p:spPr>
+        <p:txBody>
+          <a:bodyPr wrap="square">
+            <a:spAutoFit/>
+          </a:bodyPr>
+          <a:lstStyle/>
+          <a:p>
+            <a:pPr algn="l">
+              <a:lnSpc>
+                <a:spcPct val="110000"/>
+              </a:lnSpc>
+              <a:defRPr sz="1500" b="0">
+                <a:solidFill>
+                  <a:srgbClr val="FFFFFF"/>
+                </a:solidFill>
+                <a:latin typeface="Segoe UI"/>
+              </a:defRPr>
+            </a:pPr>
+            <a:r>
+              <a:t>your own AI</a:t>
+            </a:r>
+          </a:p>
+          <a:p>
+            <a:pPr algn="l">
+              <a:lnSpc>
+                <a:spcPct val="110000"/>
+              </a:lnSpc>
+              <a:defRPr sz="1500" b="0">
+                <a:solidFill>
+                  <a:srgbClr val="FFFFFF"/>
+                </a:solidFill>
+                <a:latin typeface="Segoe UI"/>
+              </a:defRPr>
+            </a:pPr>
+            <a:r>
+              <a:t>tools.</a:t>
+            </a:r>
+          </a:p>
+        </p:txBody>
+      </p:sp>
+      <p:sp>
+        <p:nvSpPr>
+          <p:cNvPr id="12" name="Rounded Rectangle 11"/>
+          <p:cNvSpPr/>
+          <p:nvPr/>
+        </p:nvSpPr>
+        <p:spPr>
+          <a:xfrm>
+            <a:off x="8046720" y="1554480"/>
+            <a:ext cx="3611880" cy="2286000"/>
+          </a:xfrm>
+          <a:prstGeom prst="roundRect">
+            <a:avLst/>
+          </a:prstGeom>
+          <a:solidFill>
+            <a:srgbClr val="4CAF50"/>
+          </a:solidFill>
+          <a:ln>
+            <a:noFill/>
+          </a:ln>
+        </p:spPr>
+        <p:style>
+          <a:lnRef idx="1">
+            <a:schemeClr val="accent1"/>
+          </a:lnRef>
+          <a:fillRef idx="3">
+            <a:schemeClr val="accent1"/>
+          </a:fillRef>
+          <a:effectRef idx="2">
+            <a:schemeClr val="accent1"/>
+          </a:effectRef>
+          <a:fontRef idx="minor">
+            <a:schemeClr val="lt1"/>
+          </a:fontRef>
+        </p:style>
+        <p:txBody>
+          <a:bodyPr rtlCol="0" anchor="ctr"/>
+          <a:lstStyle/>
+          <a:p>
+            <a:pPr algn="ctr"/>
+          </a:p>
+        </p:txBody>
+      </p:sp>
+      <p:sp>
+        <p:nvSpPr>
+          <p:cNvPr id="13" name="TextBox 12"/>
+          <p:cNvSpPr txBox="1"/>
+          <p:nvPr/>
+        </p:nvSpPr>
+        <p:spPr>
+          <a:xfrm>
+            <a:off x="8275320" y="1719072"/>
+            <a:ext cx="3154680" cy="457200"/>
+          </a:xfrm>
+          <a:prstGeom prst="rect">
+            <a:avLst/>
+          </a:prstGeom>
+          <a:noFill/>
+        </p:spPr>
+        <p:txBody>
+          <a:bodyPr wrap="square">
+            <a:spAutoFit/>
+          </a:bodyPr>
+          <a:lstStyle/>
+          <a:p>
+            <a:pPr algn="l">
+              <a:defRPr sz="1800" b="1">
+                <a:solidFill>
+                  <a:srgbClr val="FFFFFF"/>
+                </a:solidFill>
+                <a:latin typeface="Segoe UI"/>
+              </a:defRPr>
+            </a:pPr>
+            <a:r>
+              <a:t>You ran</a:t>
+            </a:r>
+          </a:p>
+        </p:txBody>
+      </p:sp>
+      <p:sp>
+        <p:nvSpPr>
+          <p:cNvPr id="14" name="TextBox 13"/>
+          <p:cNvSpPr txBox="1"/>
+          <p:nvPr/>
+        </p:nvSpPr>
+        <p:spPr>
+          <a:xfrm>
+            <a:off x="8275320" y="2267712"/>
+            <a:ext cx="3154680" cy="1417320"/>
+          </a:xfrm>
+          <a:prstGeom prst="rect">
+            <a:avLst/>
+          </a:prstGeom>
+          <a:noFill/>
+        </p:spPr>
+        <p:txBody>
+          <a:bodyPr wrap="square">
+            <a:spAutoFit/>
+          </a:bodyPr>
+          <a:lstStyle/>
+          <a:p>
+            <a:pPr algn="l">
+              <a:lnSpc>
+                <a:spcPct val="110000"/>
+              </a:lnSpc>
+              <a:defRPr sz="1500" b="0">
+                <a:solidFill>
+                  <a:srgbClr val="FFFFFF"/>
+                </a:solidFill>
+                <a:latin typeface="Segoe UI"/>
+              </a:defRPr>
+            </a:pPr>
+            <a:r>
+              <a:t>a real AI</a:t>
+            </a:r>
+          </a:p>
+          <a:p>
+            <a:pPr algn="l">
+              <a:lnSpc>
+                <a:spcPct val="110000"/>
+              </a:lnSpc>
+              <a:defRPr sz="1500" b="0">
+                <a:solidFill>
+                  <a:srgbClr val="FFFFFF"/>
+                </a:solidFill>
+                <a:latin typeface="Segoe UI"/>
+              </a:defRPr>
+            </a:pPr>
+            <a:r>
+              <a:t>assistant.</a:t>
+            </a:r>
+          </a:p>
+        </p:txBody>
+      </p:sp>
+      <p:sp>
+        <p:nvSpPr>
+          <p:cNvPr id="15" name="TextBox 14"/>
+          <p:cNvSpPr txBox="1"/>
+          <p:nvPr/>
+        </p:nvSpPr>
+        <p:spPr>
+          <a:xfrm>
+            <a:off x="731520" y="4114800"/>
+            <a:ext cx="10698480" cy="914400"/>
+          </a:xfrm>
+          <a:prstGeom prst="rect">
+            <a:avLst/>
+          </a:prstGeom>
+          <a:noFill/>
+        </p:spPr>
+        <p:txBody>
+          <a:bodyPr wrap="square">
+            <a:spAutoFit/>
+          </a:bodyPr>
+          <a:lstStyle/>
+          <a:p>
+            <a:pPr algn="ctr">
+              <a:defRPr sz="1800" b="1">
+                <a:solidFill>
+                  <a:srgbClr val="424242"/>
+                </a:solidFill>
+                <a:latin typeface="Segoe UI"/>
+              </a:defRPr>
+            </a:pPr>
+            <a:r>
+              <a:t>Next: Python programming starts in July — now you'll learn to BUILD the tech you've been using.</a:t>
+            </a:r>
+          </a:p>
+        </p:txBody>
+      </p:sp>
+      <p:sp>
+        <p:nvSpPr>
+          <p:cNvPr id="16" name="Rounded Rectangle 15"/>
+          <p:cNvSpPr/>
+          <p:nvPr/>
+        </p:nvSpPr>
+        <p:spPr>
+          <a:xfrm>
+            <a:off x="914400" y="5760720"/>
+            <a:ext cx="10360152" cy="640080"/>
+          </a:xfrm>
+          <a:prstGeom prst="roundRect">
+            <a:avLst/>
+          </a:prstGeom>
+          <a:solidFill>
+            <a:srgbClr val="FF9933"/>
+          </a:solidFill>
+          <a:ln>
+            <a:noFill/>
+          </a:ln>
+        </p:spPr>
+        <p:style>
+          <a:lnRef idx="1">
+            <a:schemeClr val="accent1"/>
+          </a:lnRef>
+          <a:fillRef idx="3">
+            <a:schemeClr val="accent1"/>
+          </a:fillRef>
+          <a:effectRef idx="2">
+            <a:schemeClr val="accent1"/>
+          </a:effectRef>
+          <a:fontRef idx="minor">
+            <a:schemeClr val="lt1"/>
+          </a:fontRef>
+        </p:style>
+        <p:txBody>
+          <a:bodyPr rtlCol="0" anchor="ctr" wrap="square"/>
+          <a:lstStyle/>
+          <a:p>
+            <a:pPr algn="ctr">
+              <a:spcBef>
+                <a:spcPts val="800"/>
+              </a:spcBef>
+              <a:defRPr sz="1800" b="1">
+                <a:solidFill>
+                  <a:srgbClr val="FFFFFF"/>
+                </a:solidFill>
+                <a:latin typeface="Segoe UI"/>
+              </a:defRPr>
+            </a:pPr>
+            <a:r>
+              <a:t>You're not just using AI — you're on your way to building it.</a:t>
+            </a:r>
+          </a:p>
+        </p:txBody>
+      </p:sp>
+    </p:spTree>
+  </p:cSld>
+  <p:clrMapOvr>
+    <a:masterClrMapping/>
+  </p:clrMapOvr>
+</p:sld>
+</file>
+
+<file path=ppt/slides/slide21.xml><?xml version="1.0" encoding="utf-8"?>
+<p:sld xmlns:a="http://schemas.openxmlformats.org/drawingml/2006/main" xmlns:p="http://schemas.openxmlformats.org/presentationml/2006/main" xmlns:r="http://schemas.openxmlformats.org/officeDocument/2006/relationships">
+  <p:cSld>
+    <p:spTree>
+      <p:nvGrpSpPr>
+        <p:cNvPr id="1" name=""/>
+        <p:cNvGrpSpPr/>
+        <p:nvPr/>
+      </p:nvGrpSpPr>
+      <p:grpSpPr/>
+      <p:sp>
+        <p:nvSpPr>
+          <p:cNvPr id="2" name="Rectangle 1"/>
+          <p:cNvSpPr/>
+          <p:nvPr/>
+        </p:nvSpPr>
+        <p:spPr>
+          <a:xfrm>
+            <a:off x="0" y="0"/>
+            <a:ext cx="12188952" cy="6858000"/>
+          </a:xfrm>
+          <a:prstGeom prst="rect">
+            <a:avLst/>
+          </a:prstGeom>
+          <a:solidFill>
+            <a:srgbClr val="1E3A5F"/>
+          </a:solidFill>
+          <a:ln>
+            <a:noFill/>
+          </a:ln>
+        </p:spPr>
+        <p:style>
+          <a:lnRef idx="1">
+            <a:schemeClr val="accent1"/>
+          </a:lnRef>
+          <a:fillRef idx="3">
+            <a:schemeClr val="accent1"/>
+          </a:fillRef>
+          <a:effectRef idx="2">
+            <a:schemeClr val="accent1"/>
+          </a:effectRef>
+          <a:fontRef idx="minor">
+            <a:schemeClr val="lt1"/>
+          </a:fontRef>
+        </p:style>
+        <p:txBody>
+          <a:bodyPr rtlCol="0" anchor="ctr"/>
+          <a:lstStyle/>
+          <a:p>
+            <a:pPr algn="ctr"/>
+          </a:p>
+        </p:txBody>
+      </p:sp>
+      <p:sp>
+        <p:nvSpPr>
+          <p:cNvPr id="3" name="TextBox 2"/>
+          <p:cNvSpPr txBox="1"/>
+          <p:nvPr/>
+        </p:nvSpPr>
+        <p:spPr>
+          <a:xfrm>
+            <a:off x="0" y="1463040"/>
+            <a:ext cx="12188952" cy="1828800"/>
+          </a:xfrm>
+          <a:prstGeom prst="rect">
+            <a:avLst/>
+          </a:prstGeom>
+          <a:noFill/>
+        </p:spPr>
+        <p:txBody>
+          <a:bodyPr wrap="square">
+            <a:spAutoFit/>
+          </a:bodyPr>
+          <a:lstStyle/>
+          <a:p>
+            <a:pPr algn="ctr">
+              <a:defRPr sz="12000" b="0">
+                <a:solidFill>
+                  <a:srgbClr val="FFFFFF"/>
+                </a:solidFill>
+                <a:latin typeface="Segoe UI"/>
+              </a:defRPr>
+            </a:pPr>
+            <a:r>
+              <a:t>?</a:t>
+            </a:r>
+          </a:p>
+        </p:txBody>
+      </p:sp>
+      <p:sp>
+        <p:nvSpPr>
+          <p:cNvPr id="4" name="TextBox 3"/>
+          <p:cNvSpPr txBox="1"/>
+          <p:nvPr/>
+        </p:nvSpPr>
+        <p:spPr>
+          <a:xfrm>
+            <a:off x="0" y="3200400"/>
+            <a:ext cx="12188952" cy="914400"/>
+          </a:xfrm>
+          <a:prstGeom prst="rect">
+            <a:avLst/>
+          </a:prstGeom>
+          <a:noFill/>
+        </p:spPr>
+        <p:txBody>
+          <a:bodyPr wrap="square">
+            <a:spAutoFit/>
+          </a:bodyPr>
+          <a:lstStyle/>
+          <a:p>
+            <a:pPr algn="ctr">
+              <a:defRPr sz="6000" b="1">
+                <a:solidFill>
+                  <a:srgbClr val="FFFFFF"/>
+                </a:solidFill>
+                <a:latin typeface="Segoe UI Semibold"/>
+              </a:defRPr>
+            </a:pPr>
+            <a:r>
+              <a:t>Questions?</a:t>
+            </a:r>
+          </a:p>
+        </p:txBody>
+      </p:sp>
+      <p:sp>
+        <p:nvSpPr>
+          <p:cNvPr id="5" name="TextBox 4"/>
+          <p:cNvSpPr txBox="1"/>
+          <p:nvPr/>
+        </p:nvSpPr>
+        <p:spPr>
+          <a:xfrm>
+            <a:off x="0" y="4663440"/>
+            <a:ext cx="12188952" cy="548640"/>
+          </a:xfrm>
+          <a:prstGeom prst="rect">
+            <a:avLst/>
+          </a:prstGeom>
+          <a:noFill/>
+        </p:spPr>
+        <p:txBody>
+          <a:bodyPr wrap="square">
+            <a:spAutoFit/>
+          </a:bodyPr>
+          <a:lstStyle/>
+          <a:p>
+            <a:pPr algn="ctr">
+              <a:defRPr sz="2400" b="0">
+                <a:solidFill>
+                  <a:srgbClr val="ADD8E6"/>
+                </a:solidFill>
+                <a:latin typeface="Segoe UI"/>
+              </a:defRPr>
+            </a:pPr>
+            <a:r>
+              <a:t>Ask away — then it's Kahoot time! 🦞</a:t>
+            </a:r>
+          </a:p>
+        </p:txBody>
+      </p:sp>
+    </p:spTree>
+  </p:cSld>
+  <p:clrMapOvr>
+    <a:masterClrMapping/>
+  </p:clrMapOvr>
+</p:sld>
+</file>
+
 <file path=ppt/slides/slide3.xml><?xml version="1.0" encoding="utf-8"?>
 <p:sld xmlns:a="http://schemas.openxmlformats.org/drawingml/2006/main" xmlns:p="http://schemas.openxmlformats.org/presentationml/2006/main" xmlns:r="http://schemas.openxmlformats.org/officeDocument/2006/relationships">
   <p:cSld>
@@ -9745,7 +10826,7 @@
               </a:defRPr>
             </a:pPr>
             <a:r>
-              <a:t>Chatbot vs. Assistant</a:t>
+              <a:t>What OpenClaw Can Do</a:t>
             </a:r>
           </a:p>
         </p:txBody>
@@ -9824,7 +10905,7 @@
               </a:defRPr>
             </a:pPr>
             <a:r>
-              <a:t>What makes an assistant special?</a:t>
+              <a:t>Your everyday helper</a:t>
             </a:r>
           </a:p>
         </p:txBody>
@@ -9838,13 +10919,13 @@
         <p:spPr>
           <a:xfrm>
             <a:off x="548640" y="1554480"/>
-            <a:ext cx="5349240" cy="3749039"/>
+            <a:ext cx="3520440" cy="1737360"/>
           </a:xfrm>
           <a:prstGeom prst="roundRect">
             <a:avLst/>
           </a:prstGeom>
           <a:solidFill>
-            <a:srgbClr val="F5F5F5"/>
+            <a:srgbClr val="3467A6"/>
           </a:solidFill>
           <a:ln>
             <a:noFill/>
@@ -9881,7 +10962,7 @@
         <p:spPr>
           <a:xfrm>
             <a:off x="777240" y="1719072"/>
-            <a:ext cx="4892040" cy="457200"/>
+            <a:ext cx="3063240" cy="457200"/>
           </a:xfrm>
           <a:prstGeom prst="rect">
             <a:avLst/>
@@ -9895,15 +10976,15 @@
           <a:lstStyle/>
           <a:p>
             <a:pPr algn="l">
-              <a:defRPr sz="1800" b="1">
-                <a:solidFill>
-                  <a:srgbClr val="1E3A5F"/>
-                </a:solidFill>
-                <a:latin typeface="Segoe UI"/>
-              </a:defRPr>
-            </a:pPr>
-            <a:r>
-              <a:t>A simple chatbot</a:t>
+              <a:defRPr sz="1500" b="1">
+                <a:solidFill>
+                  <a:srgbClr val="FFFFFF"/>
+                </a:solidFill>
+                <a:latin typeface="Segoe UI"/>
+              </a:defRPr>
+            </a:pPr>
+            <a:r>
+              <a:t>💬 Chat &amp; answer</a:t>
             </a:r>
           </a:p>
         </p:txBody>
@@ -9917,7 +10998,7 @@
         <p:spPr>
           <a:xfrm>
             <a:off x="777240" y="2267712"/>
-            <a:ext cx="4892040" cy="2880359"/>
+            <a:ext cx="3063240" cy="868680"/>
           </a:xfrm>
           <a:prstGeom prst="rect">
             <a:avLst/>
@@ -9934,77 +11015,265 @@
               <a:lnSpc>
                 <a:spcPct val="110000"/>
               </a:lnSpc>
-              <a:defRPr sz="1600" b="0">
-                <a:solidFill>
-                  <a:srgbClr val="424242"/>
-                </a:solidFill>
-                <a:latin typeface="Segoe UI"/>
-              </a:defRPr>
-            </a:pPr>
-            <a:r>
-              <a:t>• Waits for you to type</a:t>
-            </a:r>
-          </a:p>
+              <a:defRPr sz="1200" b="0">
+                <a:solidFill>
+                  <a:srgbClr val="FFFFFF"/>
+                </a:solidFill>
+                <a:latin typeface="Segoe UI"/>
+              </a:defRPr>
+            </a:pPr>
+            <a:r>
+              <a:t>Questions, ideas, explanations</a:t>
+            </a:r>
+          </a:p>
+        </p:txBody>
+      </p:sp>
+      <p:sp>
+        <p:nvSpPr>
+          <p:cNvPr id="9" name="Rounded Rectangle 8"/>
+          <p:cNvSpPr/>
+          <p:nvPr/>
+        </p:nvSpPr>
+        <p:spPr>
+          <a:xfrm>
+            <a:off x="4334256" y="1554480"/>
+            <a:ext cx="3520440" cy="1737360"/>
+          </a:xfrm>
+          <a:prstGeom prst="roundRect">
+            <a:avLst/>
+          </a:prstGeom>
+          <a:solidFill>
+            <a:srgbClr val="009688"/>
+          </a:solidFill>
+          <a:ln>
+            <a:noFill/>
+          </a:ln>
+        </p:spPr>
+        <p:style>
+          <a:lnRef idx="1">
+            <a:schemeClr val="accent1"/>
+          </a:lnRef>
+          <a:fillRef idx="3">
+            <a:schemeClr val="accent1"/>
+          </a:fillRef>
+          <a:effectRef idx="2">
+            <a:schemeClr val="accent1"/>
+          </a:effectRef>
+          <a:fontRef idx="minor">
+            <a:schemeClr val="lt1"/>
+          </a:fontRef>
+        </p:style>
+        <p:txBody>
+          <a:bodyPr rtlCol="0" anchor="ctr"/>
+          <a:lstStyle/>
+          <a:p>
+            <a:pPr algn="ctr"/>
+          </a:p>
+        </p:txBody>
+      </p:sp>
+      <p:sp>
+        <p:nvSpPr>
+          <p:cNvPr id="10" name="TextBox 9"/>
+          <p:cNvSpPr txBox="1"/>
+          <p:nvPr/>
+        </p:nvSpPr>
+        <p:spPr>
+          <a:xfrm>
+            <a:off x="4562856" y="1719072"/>
+            <a:ext cx="3063240" cy="457200"/>
+          </a:xfrm>
+          <a:prstGeom prst="rect">
+            <a:avLst/>
+          </a:prstGeom>
+          <a:noFill/>
+        </p:spPr>
+        <p:txBody>
+          <a:bodyPr wrap="square">
+            <a:spAutoFit/>
+          </a:bodyPr>
+          <a:lstStyle/>
+          <a:p>
+            <a:pPr algn="l">
+              <a:defRPr sz="1500" b="1">
+                <a:solidFill>
+                  <a:srgbClr val="FFFFFF"/>
+                </a:solidFill>
+                <a:latin typeface="Segoe UI"/>
+              </a:defRPr>
+            </a:pPr>
+            <a:r>
+              <a:t>📄 Files &amp; code</a:t>
+            </a:r>
+          </a:p>
+        </p:txBody>
+      </p:sp>
+      <p:sp>
+        <p:nvSpPr>
+          <p:cNvPr id="11" name="TextBox 10"/>
+          <p:cNvSpPr txBox="1"/>
+          <p:nvPr/>
+        </p:nvSpPr>
+        <p:spPr>
+          <a:xfrm>
+            <a:off x="4562856" y="2267712"/>
+            <a:ext cx="3063240" cy="868680"/>
+          </a:xfrm>
+          <a:prstGeom prst="rect">
+            <a:avLst/>
+          </a:prstGeom>
+          <a:noFill/>
+        </p:spPr>
+        <p:txBody>
+          <a:bodyPr wrap="square">
+            <a:spAutoFit/>
+          </a:bodyPr>
+          <a:lstStyle/>
           <a:p>
             <a:pPr algn="l">
               <a:lnSpc>
                 <a:spcPct val="110000"/>
               </a:lnSpc>
-              <a:defRPr sz="1600" b="0">
-                <a:solidFill>
-                  <a:srgbClr val="424242"/>
-                </a:solidFill>
-                <a:latin typeface="Segoe UI"/>
-              </a:defRPr>
-            </a:pPr>
-            <a:r>
-              <a:t>• Text in, text out</a:t>
-            </a:r>
-          </a:p>
+              <a:defRPr sz="1200" b="0">
+                <a:solidFill>
+                  <a:srgbClr val="FFFFFF"/>
+                </a:solidFill>
+                <a:latin typeface="Segoe UI"/>
+              </a:defRPr>
+            </a:pPr>
+            <a:r>
+              <a:t>Read, write, and edit files</a:t>
+            </a:r>
+          </a:p>
+        </p:txBody>
+      </p:sp>
+      <p:sp>
+        <p:nvSpPr>
+          <p:cNvPr id="12" name="Rounded Rectangle 11"/>
+          <p:cNvSpPr/>
+          <p:nvPr/>
+        </p:nvSpPr>
+        <p:spPr>
+          <a:xfrm>
+            <a:off x="8119872" y="1554480"/>
+            <a:ext cx="3520440" cy="1737360"/>
+          </a:xfrm>
+          <a:prstGeom prst="roundRect">
+            <a:avLst/>
+          </a:prstGeom>
+          <a:solidFill>
+            <a:srgbClr val="9C27B0"/>
+          </a:solidFill>
+          <a:ln>
+            <a:noFill/>
+          </a:ln>
+        </p:spPr>
+        <p:style>
+          <a:lnRef idx="1">
+            <a:schemeClr val="accent1"/>
+          </a:lnRef>
+          <a:fillRef idx="3">
+            <a:schemeClr val="accent1"/>
+          </a:fillRef>
+          <a:effectRef idx="2">
+            <a:schemeClr val="accent1"/>
+          </a:effectRef>
+          <a:fontRef idx="minor">
+            <a:schemeClr val="lt1"/>
+          </a:fontRef>
+        </p:style>
+        <p:txBody>
+          <a:bodyPr rtlCol="0" anchor="ctr"/>
+          <a:lstStyle/>
+          <a:p>
+            <a:pPr algn="ctr"/>
+          </a:p>
+        </p:txBody>
+      </p:sp>
+      <p:sp>
+        <p:nvSpPr>
+          <p:cNvPr id="13" name="TextBox 12"/>
+          <p:cNvSpPr txBox="1"/>
+          <p:nvPr/>
+        </p:nvSpPr>
+        <p:spPr>
+          <a:xfrm>
+            <a:off x="8348472" y="1719072"/>
+            <a:ext cx="3063240" cy="457200"/>
+          </a:xfrm>
+          <a:prstGeom prst="rect">
+            <a:avLst/>
+          </a:prstGeom>
+          <a:noFill/>
+        </p:spPr>
+        <p:txBody>
+          <a:bodyPr wrap="square">
+            <a:spAutoFit/>
+          </a:bodyPr>
+          <a:lstStyle/>
+          <a:p>
+            <a:pPr algn="l">
+              <a:defRPr sz="1500" b="1">
+                <a:solidFill>
+                  <a:srgbClr val="FFFFFF"/>
+                </a:solidFill>
+                <a:latin typeface="Segoe UI"/>
+              </a:defRPr>
+            </a:pPr>
+            <a:r>
+              <a:t>⚡ Run commands</a:t>
+            </a:r>
+          </a:p>
+        </p:txBody>
+      </p:sp>
+      <p:sp>
+        <p:nvSpPr>
+          <p:cNvPr id="14" name="TextBox 13"/>
+          <p:cNvSpPr txBox="1"/>
+          <p:nvPr/>
+        </p:nvSpPr>
+        <p:spPr>
+          <a:xfrm>
+            <a:off x="8348472" y="2267712"/>
+            <a:ext cx="3063240" cy="868680"/>
+          </a:xfrm>
+          <a:prstGeom prst="rect">
+            <a:avLst/>
+          </a:prstGeom>
+          <a:noFill/>
+        </p:spPr>
+        <p:txBody>
+          <a:bodyPr wrap="square">
+            <a:spAutoFit/>
+          </a:bodyPr>
+          <a:lstStyle/>
           <a:p>
             <a:pPr algn="l">
               <a:lnSpc>
                 <a:spcPct val="110000"/>
               </a:lnSpc>
-              <a:defRPr sz="1600" b="0">
-                <a:solidFill>
-                  <a:srgbClr val="424242"/>
-                </a:solidFill>
-                <a:latin typeface="Segoe UI"/>
-              </a:defRPr>
-            </a:pPr>
-            <a:r>
-              <a:t>• Forgets when you close it</a:t>
-            </a:r>
-          </a:p>
-          <a:p>
-            <a:pPr algn="l">
-              <a:lnSpc>
-                <a:spcPct val="110000"/>
-              </a:lnSpc>
-              <a:defRPr sz="1600" b="0">
-                <a:solidFill>
-                  <a:srgbClr val="424242"/>
-                </a:solidFill>
-                <a:latin typeface="Segoe UI"/>
-              </a:defRPr>
-            </a:pPr>
-            <a:r>
-              <a:t>• Lives inside a website</a:t>
-            </a:r>
-          </a:p>
-        </p:txBody>
-      </p:sp>
-      <p:sp>
-        <p:nvSpPr>
-          <p:cNvPr id="9" name="Rounded Rectangle 8"/>
+              <a:defRPr sz="1200" b="0">
+                <a:solidFill>
+                  <a:srgbClr val="FFFFFF"/>
+                </a:solidFill>
+                <a:latin typeface="Segoe UI"/>
+              </a:defRPr>
+            </a:pPr>
+            <a:r>
+              <a:t>Do real tasks (with your OK)</a:t>
+            </a:r>
+          </a:p>
+        </p:txBody>
+      </p:sp>
+      <p:sp>
+        <p:nvSpPr>
+          <p:cNvPr id="15" name="Rounded Rectangle 14"/>
           <p:cNvSpPr/>
           <p:nvPr/>
         </p:nvSpPr>
         <p:spPr>
           <a:xfrm>
-            <a:off x="6263640" y="1554480"/>
-            <a:ext cx="5349240" cy="3749039"/>
+            <a:off x="548640" y="3520439"/>
+            <a:ext cx="3520440" cy="1737360"/>
           </a:xfrm>
           <a:prstGeom prst="roundRect">
             <a:avLst/>
@@ -10040,14 +11309,14 @@
       </p:sp>
       <p:sp>
         <p:nvSpPr>
-          <p:cNvPr id="10" name="TextBox 9"/>
+          <p:cNvPr id="16" name="TextBox 15"/>
           <p:cNvSpPr txBox="1"/>
           <p:nvPr/>
         </p:nvSpPr>
         <p:spPr>
           <a:xfrm>
-            <a:off x="6492240" y="1719072"/>
-            <a:ext cx="4892040" cy="457200"/>
+            <a:off x="777240" y="3685031"/>
+            <a:ext cx="3063240" cy="457200"/>
           </a:xfrm>
           <a:prstGeom prst="rect">
             <a:avLst/>
@@ -10061,29 +11330,29 @@
           <a:lstStyle/>
           <a:p>
             <a:pPr algn="l">
-              <a:defRPr sz="1800" b="1">
-                <a:solidFill>
-                  <a:srgbClr val="FFFFFF"/>
-                </a:solidFill>
-                <a:latin typeface="Segoe UI"/>
-              </a:defRPr>
-            </a:pPr>
-            <a:r>
-              <a:t>An AI assistant</a:t>
-            </a:r>
-          </a:p>
-        </p:txBody>
-      </p:sp>
-      <p:sp>
-        <p:nvSpPr>
-          <p:cNvPr id="11" name="TextBox 10"/>
+              <a:defRPr sz="1500" b="1">
+                <a:solidFill>
+                  <a:srgbClr val="FFFFFF"/>
+                </a:solidFill>
+                <a:latin typeface="Segoe UI"/>
+              </a:defRPr>
+            </a:pPr>
+            <a:r>
+              <a:t>🌐 Browse the web</a:t>
+            </a:r>
+          </a:p>
+        </p:txBody>
+      </p:sp>
+      <p:sp>
+        <p:nvSpPr>
+          <p:cNvPr id="17" name="TextBox 16"/>
           <p:cNvSpPr txBox="1"/>
           <p:nvPr/>
         </p:nvSpPr>
         <p:spPr>
           <a:xfrm>
-            <a:off x="6492240" y="2267712"/>
-            <a:ext cx="4892040" cy="2880359"/>
+            <a:off x="777240" y="4233672"/>
+            <a:ext cx="3063240" cy="868680"/>
           </a:xfrm>
           <a:prstGeom prst="rect">
             <a:avLst/>
@@ -10100,70 +11369,258 @@
               <a:lnSpc>
                 <a:spcPct val="110000"/>
               </a:lnSpc>
-              <a:defRPr sz="1600" b="0">
-                <a:solidFill>
-                  <a:srgbClr val="FFFFFF"/>
-                </a:solidFill>
-                <a:latin typeface="Segoe UI"/>
-              </a:defRPr>
-            </a:pPr>
-            <a:r>
-              <a:t>• Takes action and does tasks</a:t>
-            </a:r>
-          </a:p>
+              <a:defRPr sz="1200" b="0">
+                <a:solidFill>
+                  <a:srgbClr val="FFFFFF"/>
+                </a:solidFill>
+                <a:latin typeface="Segoe UI"/>
+              </a:defRPr>
+            </a:pPr>
+            <a:r>
+              <a:t>Look things up, read pages</a:t>
+            </a:r>
+          </a:p>
+        </p:txBody>
+      </p:sp>
+      <p:sp>
+        <p:nvSpPr>
+          <p:cNvPr id="18" name="Rounded Rectangle 17"/>
+          <p:cNvSpPr/>
+          <p:nvPr/>
+        </p:nvSpPr>
+        <p:spPr>
+          <a:xfrm>
+            <a:off x="4334256" y="3520439"/>
+            <a:ext cx="3520440" cy="1737360"/>
+          </a:xfrm>
+          <a:prstGeom prst="roundRect">
+            <a:avLst/>
+          </a:prstGeom>
+          <a:solidFill>
+            <a:srgbClr val="FF9933"/>
+          </a:solidFill>
+          <a:ln>
+            <a:noFill/>
+          </a:ln>
+        </p:spPr>
+        <p:style>
+          <a:lnRef idx="1">
+            <a:schemeClr val="accent1"/>
+          </a:lnRef>
+          <a:fillRef idx="3">
+            <a:schemeClr val="accent1"/>
+          </a:fillRef>
+          <a:effectRef idx="2">
+            <a:schemeClr val="accent1"/>
+          </a:effectRef>
+          <a:fontRef idx="minor">
+            <a:schemeClr val="lt1"/>
+          </a:fontRef>
+        </p:style>
+        <p:txBody>
+          <a:bodyPr rtlCol="0" anchor="ctr"/>
+          <a:lstStyle/>
+          <a:p>
+            <a:pPr algn="ctr"/>
+          </a:p>
+        </p:txBody>
+      </p:sp>
+      <p:sp>
+        <p:nvSpPr>
+          <p:cNvPr id="19" name="TextBox 18"/>
+          <p:cNvSpPr txBox="1"/>
+          <p:nvPr/>
+        </p:nvSpPr>
+        <p:spPr>
+          <a:xfrm>
+            <a:off x="4562856" y="3685031"/>
+            <a:ext cx="3063240" cy="457200"/>
+          </a:xfrm>
+          <a:prstGeom prst="rect">
+            <a:avLst/>
+          </a:prstGeom>
+          <a:noFill/>
+        </p:spPr>
+        <p:txBody>
+          <a:bodyPr wrap="square">
+            <a:spAutoFit/>
+          </a:bodyPr>
+          <a:lstStyle/>
+          <a:p>
+            <a:pPr algn="l">
+              <a:defRPr sz="1500" b="1">
+                <a:solidFill>
+                  <a:srgbClr val="FFFFFF"/>
+                </a:solidFill>
+                <a:latin typeface="Segoe UI"/>
+              </a:defRPr>
+            </a:pPr>
+            <a:r>
+              <a:t>🧠 Remember you</a:t>
+            </a:r>
+          </a:p>
+        </p:txBody>
+      </p:sp>
+      <p:sp>
+        <p:nvSpPr>
+          <p:cNvPr id="20" name="TextBox 19"/>
+          <p:cNvSpPr txBox="1"/>
+          <p:nvPr/>
+        </p:nvSpPr>
+        <p:spPr>
+          <a:xfrm>
+            <a:off x="4562856" y="4233672"/>
+            <a:ext cx="3063240" cy="868680"/>
+          </a:xfrm>
+          <a:prstGeom prst="rect">
+            <a:avLst/>
+          </a:prstGeom>
+          <a:noFill/>
+        </p:spPr>
+        <p:txBody>
+          <a:bodyPr wrap="square">
+            <a:spAutoFit/>
+          </a:bodyPr>
+          <a:lstStyle/>
           <a:p>
             <a:pPr algn="l">
               <a:lnSpc>
                 <a:spcPct val="110000"/>
               </a:lnSpc>
-              <a:defRPr sz="1600" b="0">
-                <a:solidFill>
-                  <a:srgbClr val="FFFFFF"/>
-                </a:solidFill>
-                <a:latin typeface="Segoe UI"/>
-              </a:defRPr>
-            </a:pPr>
-            <a:r>
-              <a:t>• Uses files, commands, the web</a:t>
-            </a:r>
-          </a:p>
+              <a:defRPr sz="1200" b="0">
+                <a:solidFill>
+                  <a:srgbClr val="FFFFFF"/>
+                </a:solidFill>
+                <a:latin typeface="Segoe UI"/>
+              </a:defRPr>
+            </a:pPr>
+            <a:r>
+              <a:t>Notes that last across chats</a:t>
+            </a:r>
+          </a:p>
+        </p:txBody>
+      </p:sp>
+      <p:sp>
+        <p:nvSpPr>
+          <p:cNvPr id="21" name="Rounded Rectangle 20"/>
+          <p:cNvSpPr/>
+          <p:nvPr/>
+        </p:nvSpPr>
+        <p:spPr>
+          <a:xfrm>
+            <a:off x="8119872" y="3520439"/>
+            <a:ext cx="3520440" cy="1737360"/>
+          </a:xfrm>
+          <a:prstGeom prst="roundRect">
+            <a:avLst/>
+          </a:prstGeom>
+          <a:solidFill>
+            <a:srgbClr val="6495ED"/>
+          </a:solidFill>
+          <a:ln>
+            <a:noFill/>
+          </a:ln>
+        </p:spPr>
+        <p:style>
+          <a:lnRef idx="1">
+            <a:schemeClr val="accent1"/>
+          </a:lnRef>
+          <a:fillRef idx="3">
+            <a:schemeClr val="accent1"/>
+          </a:fillRef>
+          <a:effectRef idx="2">
+            <a:schemeClr val="accent1"/>
+          </a:effectRef>
+          <a:fontRef idx="minor">
+            <a:schemeClr val="lt1"/>
+          </a:fontRef>
+        </p:style>
+        <p:txBody>
+          <a:bodyPr rtlCol="0" anchor="ctr"/>
+          <a:lstStyle/>
+          <a:p>
+            <a:pPr algn="ctr"/>
+          </a:p>
+        </p:txBody>
+      </p:sp>
+      <p:sp>
+        <p:nvSpPr>
+          <p:cNvPr id="22" name="TextBox 21"/>
+          <p:cNvSpPr txBox="1"/>
+          <p:nvPr/>
+        </p:nvSpPr>
+        <p:spPr>
+          <a:xfrm>
+            <a:off x="8348472" y="3685031"/>
+            <a:ext cx="3063240" cy="457200"/>
+          </a:xfrm>
+          <a:prstGeom prst="rect">
+            <a:avLst/>
+          </a:prstGeom>
+          <a:noFill/>
+        </p:spPr>
+        <p:txBody>
+          <a:bodyPr wrap="square">
+            <a:spAutoFit/>
+          </a:bodyPr>
+          <a:lstStyle/>
+          <a:p>
+            <a:pPr algn="l">
+              <a:defRPr sz="1500" b="1">
+                <a:solidFill>
+                  <a:srgbClr val="FFFFFF"/>
+                </a:solidFill>
+                <a:latin typeface="Segoe UI"/>
+              </a:defRPr>
+            </a:pPr>
+            <a:r>
+              <a:t>⏰ Reminders &amp; tasks</a:t>
+            </a:r>
+          </a:p>
+        </p:txBody>
+      </p:sp>
+      <p:sp>
+        <p:nvSpPr>
+          <p:cNvPr id="23" name="TextBox 22"/>
+          <p:cNvSpPr txBox="1"/>
+          <p:nvPr/>
+        </p:nvSpPr>
+        <p:spPr>
+          <a:xfrm>
+            <a:off x="8348472" y="4233672"/>
+            <a:ext cx="3063240" cy="868680"/>
+          </a:xfrm>
+          <a:prstGeom prst="rect">
+            <a:avLst/>
+          </a:prstGeom>
+          <a:noFill/>
+        </p:spPr>
+        <p:txBody>
+          <a:bodyPr wrap="square">
+            <a:spAutoFit/>
+          </a:bodyPr>
+          <a:lstStyle/>
           <a:p>
             <a:pPr algn="l">
               <a:lnSpc>
                 <a:spcPct val="110000"/>
               </a:lnSpc>
-              <a:defRPr sz="1600" b="0">
-                <a:solidFill>
-                  <a:srgbClr val="FFFFFF"/>
-                </a:solidFill>
-                <a:latin typeface="Segoe UI"/>
-              </a:defRPr>
-            </a:pPr>
-            <a:r>
-              <a:t>• Remembers you over time</a:t>
-            </a:r>
-          </a:p>
-          <a:p>
-            <a:pPr algn="l">
-              <a:lnSpc>
-                <a:spcPct val="110000"/>
-              </a:lnSpc>
-              <a:defRPr sz="1600" b="0">
-                <a:solidFill>
-                  <a:srgbClr val="FFFFFF"/>
-                </a:solidFill>
-                <a:latin typeface="Segoe UI"/>
-              </a:defRPr>
-            </a:pPr>
-            <a:r>
-              <a:t>• Runs on your own computer</a:t>
-            </a:r>
-          </a:p>
-        </p:txBody>
-      </p:sp>
-      <p:sp>
-        <p:nvSpPr>
-          <p:cNvPr id="12" name="Rounded Rectangle 11"/>
+              <a:defRPr sz="1200" b="0">
+                <a:solidFill>
+                  <a:srgbClr val="FFFFFF"/>
+                </a:solidFill>
+                <a:latin typeface="Segoe UI"/>
+              </a:defRPr>
+            </a:pPr>
+            <a:r>
+              <a:t>Schedule things, daily briefings</a:t>
+            </a:r>
+          </a:p>
+        </p:txBody>
+      </p:sp>
+      <p:sp>
+        <p:nvSpPr>
+          <p:cNvPr id="24" name="Rounded Rectangle 23"/>
           <p:cNvSpPr/>
           <p:nvPr/>
         </p:nvSpPr>
@@ -10212,7 +11669,7 @@
               </a:defRPr>
             </a:pPr>
             <a:r>
-              <a:t>Same chat window — but an assistant can actually DO things.</a:t>
+              <a:t>It's not just a chatbot — it can actually get things done.</a:t>
             </a:r>
           </a:p>
         </p:txBody>
@@ -10309,7 +11766,7 @@
               </a:defRPr>
             </a:pPr>
             <a:r>
-              <a:t>Every Agent = 4 Ingredients</a:t>
+              <a:t>...And Its Bigger Powers</a:t>
             </a:r>
           </a:p>
         </p:txBody>
@@ -10388,7 +11845,7 @@
               </a:defRPr>
             </a:pPr>
             <a:r>
-              <a:t>You've seen these all unit — OpenClaw has all four, for real</a:t>
+              <a:t>Even if we don't try them all today</a:t>
             </a:r>
           </a:p>
         </p:txBody>
@@ -10401,8 +11858,126 @@
         </p:nvSpPr>
         <p:spPr>
           <a:xfrm>
-            <a:off x="457200" y="1920240"/>
-            <a:ext cx="2697480" cy="2286000"/>
+            <a:off x="548640" y="1554480"/>
+            <a:ext cx="3520440" cy="1737360"/>
+          </a:xfrm>
+          <a:prstGeom prst="roundRect">
+            <a:avLst/>
+          </a:prstGeom>
+          <a:solidFill>
+            <a:srgbClr val="9C27B0"/>
+          </a:solidFill>
+          <a:ln>
+            <a:noFill/>
+          </a:ln>
+        </p:spPr>
+        <p:style>
+          <a:lnRef idx="1">
+            <a:schemeClr val="accent1"/>
+          </a:lnRef>
+          <a:fillRef idx="3">
+            <a:schemeClr val="accent1"/>
+          </a:fillRef>
+          <a:effectRef idx="2">
+            <a:schemeClr val="accent1"/>
+          </a:effectRef>
+          <a:fontRef idx="minor">
+            <a:schemeClr val="lt1"/>
+          </a:fontRef>
+        </p:style>
+        <p:txBody>
+          <a:bodyPr rtlCol="0" anchor="ctr"/>
+          <a:lstStyle/>
+          <a:p>
+            <a:pPr algn="ctr"/>
+          </a:p>
+        </p:txBody>
+      </p:sp>
+      <p:sp>
+        <p:nvSpPr>
+          <p:cNvPr id="7" name="TextBox 6"/>
+          <p:cNvSpPr txBox="1"/>
+          <p:nvPr/>
+        </p:nvSpPr>
+        <p:spPr>
+          <a:xfrm>
+            <a:off x="777240" y="1719072"/>
+            <a:ext cx="3063240" cy="457200"/>
+          </a:xfrm>
+          <a:prstGeom prst="rect">
+            <a:avLst/>
+          </a:prstGeom>
+          <a:noFill/>
+        </p:spPr>
+        <p:txBody>
+          <a:bodyPr wrap="square">
+            <a:spAutoFit/>
+          </a:bodyPr>
+          <a:lstStyle/>
+          <a:p>
+            <a:pPr algn="l">
+              <a:defRPr sz="1500" b="1">
+                <a:solidFill>
+                  <a:srgbClr val="FFFFFF"/>
+                </a:solidFill>
+                <a:latin typeface="Segoe UI"/>
+              </a:defRPr>
+            </a:pPr>
+            <a:r>
+              <a:t>📱 Message you</a:t>
+            </a:r>
+          </a:p>
+        </p:txBody>
+      </p:sp>
+      <p:sp>
+        <p:nvSpPr>
+          <p:cNvPr id="8" name="TextBox 7"/>
+          <p:cNvSpPr txBox="1"/>
+          <p:nvPr/>
+        </p:nvSpPr>
+        <p:spPr>
+          <a:xfrm>
+            <a:off x="777240" y="2267712"/>
+            <a:ext cx="3063240" cy="868680"/>
+          </a:xfrm>
+          <a:prstGeom prst="rect">
+            <a:avLst/>
+          </a:prstGeom>
+          <a:noFill/>
+        </p:spPr>
+        <p:txBody>
+          <a:bodyPr wrap="square">
+            <a:spAutoFit/>
+          </a:bodyPr>
+          <a:lstStyle/>
+          <a:p>
+            <a:pPr algn="l">
+              <a:lnSpc>
+                <a:spcPct val="110000"/>
+              </a:lnSpc>
+              <a:defRPr sz="1200" b="0">
+                <a:solidFill>
+                  <a:srgbClr val="FFFFFF"/>
+                </a:solidFill>
+                <a:latin typeface="Segoe UI"/>
+              </a:defRPr>
+            </a:pPr>
+            <a:r>
+              <a:t>WhatsApp, Telegram, Discord</a:t>
+            </a:r>
+          </a:p>
+        </p:txBody>
+      </p:sp>
+      <p:sp>
+        <p:nvSpPr>
+          <p:cNvPr id="9" name="Rounded Rectangle 8"/>
+          <p:cNvSpPr/>
+          <p:nvPr/>
+        </p:nvSpPr>
+        <p:spPr>
+          <a:xfrm>
+            <a:off x="4334256" y="1554480"/>
+            <a:ext cx="3520440" cy="1737360"/>
           </a:xfrm>
           <a:prstGeom prst="roundRect">
             <a:avLst/>
@@ -10438,14 +12013,14 @@
       </p:sp>
       <p:sp>
         <p:nvSpPr>
-          <p:cNvPr id="7" name="TextBox 6"/>
+          <p:cNvPr id="10" name="TextBox 9"/>
           <p:cNvSpPr txBox="1"/>
           <p:nvPr/>
         </p:nvSpPr>
         <p:spPr>
           <a:xfrm>
-            <a:off x="685800" y="2084832"/>
-            <a:ext cx="2240280" cy="457200"/>
+            <a:off x="4562856" y="1719072"/>
+            <a:ext cx="3063240" cy="457200"/>
           </a:xfrm>
           <a:prstGeom prst="rect">
             <a:avLst/>
@@ -10459,29 +12034,29 @@
           <a:lstStyle/>
           <a:p>
             <a:pPr algn="l">
-              <a:defRPr sz="1800" b="1">
-                <a:solidFill>
-                  <a:srgbClr val="FFFFFF"/>
-                </a:solidFill>
-                <a:latin typeface="Segoe UI"/>
-              </a:defRPr>
-            </a:pPr>
-            <a:r>
-              <a:t>Model</a:t>
-            </a:r>
-          </a:p>
-        </p:txBody>
-      </p:sp>
-      <p:sp>
-        <p:nvSpPr>
-          <p:cNvPr id="8" name="TextBox 7"/>
+              <a:defRPr sz="1500" b="1">
+                <a:solidFill>
+                  <a:srgbClr val="FFFFFF"/>
+                </a:solidFill>
+                <a:latin typeface="Segoe UI"/>
+              </a:defRPr>
+            </a:pPr>
+            <a:r>
+              <a:t>📧 Email helper</a:t>
+            </a:r>
+          </a:p>
+        </p:txBody>
+      </p:sp>
+      <p:sp>
+        <p:nvSpPr>
+          <p:cNvPr id="11" name="TextBox 10"/>
           <p:cNvSpPr txBox="1"/>
           <p:nvPr/>
         </p:nvSpPr>
         <p:spPr>
           <a:xfrm>
-            <a:off x="685800" y="2633472"/>
-            <a:ext cx="2240280" cy="1417320"/>
+            <a:off x="4562856" y="2267712"/>
+            <a:ext cx="3063240" cy="868680"/>
           </a:xfrm>
           <a:prstGeom prst="rect">
             <a:avLst/>
@@ -10498,29 +12073,147 @@
               <a:lnSpc>
                 <a:spcPct val="110000"/>
               </a:lnSpc>
-              <a:defRPr sz="1400" b="0">
-                <a:solidFill>
-                  <a:srgbClr val="FFFFFF"/>
-                </a:solidFill>
-                <a:latin typeface="Segoe UI"/>
-              </a:defRPr>
-            </a:pPr>
-            <a:r>
-              <a:t>The brain that thinks</a:t>
-            </a:r>
-          </a:p>
-        </p:txBody>
-      </p:sp>
-      <p:sp>
-        <p:nvSpPr>
-          <p:cNvPr id="9" name="Rounded Rectangle 8"/>
+              <a:defRPr sz="1200" b="0">
+                <a:solidFill>
+                  <a:srgbClr val="FFFFFF"/>
+                </a:solidFill>
+                <a:latin typeface="Segoe UI"/>
+              </a:defRPr>
+            </a:pPr>
+            <a:r>
+              <a:t>Sort &amp; summarize your inbox</a:t>
+            </a:r>
+          </a:p>
+        </p:txBody>
+      </p:sp>
+      <p:sp>
+        <p:nvSpPr>
+          <p:cNvPr id="12" name="Rounded Rectangle 11"/>
           <p:cNvSpPr/>
           <p:nvPr/>
         </p:nvSpPr>
         <p:spPr>
           <a:xfrm>
-            <a:off x="3310128" y="1920240"/>
-            <a:ext cx="2697480" cy="2286000"/>
+            <a:off x="8119872" y="1554480"/>
+            <a:ext cx="3520440" cy="1737360"/>
+          </a:xfrm>
+          <a:prstGeom prst="roundRect">
+            <a:avLst/>
+          </a:prstGeom>
+          <a:solidFill>
+            <a:srgbClr val="E91E63"/>
+          </a:solidFill>
+          <a:ln>
+            <a:noFill/>
+          </a:ln>
+        </p:spPr>
+        <p:style>
+          <a:lnRef idx="1">
+            <a:schemeClr val="accent1"/>
+          </a:lnRef>
+          <a:fillRef idx="3">
+            <a:schemeClr val="accent1"/>
+          </a:fillRef>
+          <a:effectRef idx="2">
+            <a:schemeClr val="accent1"/>
+          </a:effectRef>
+          <a:fontRef idx="minor">
+            <a:schemeClr val="lt1"/>
+          </a:fontRef>
+        </p:style>
+        <p:txBody>
+          <a:bodyPr rtlCol="0" anchor="ctr"/>
+          <a:lstStyle/>
+          <a:p>
+            <a:pPr algn="ctr"/>
+          </a:p>
+        </p:txBody>
+      </p:sp>
+      <p:sp>
+        <p:nvSpPr>
+          <p:cNvPr id="13" name="TextBox 12"/>
+          <p:cNvSpPr txBox="1"/>
+          <p:nvPr/>
+        </p:nvSpPr>
+        <p:spPr>
+          <a:xfrm>
+            <a:off x="8348472" y="1719072"/>
+            <a:ext cx="3063240" cy="457200"/>
+          </a:xfrm>
+          <a:prstGeom prst="rect">
+            <a:avLst/>
+          </a:prstGeom>
+          <a:noFill/>
+        </p:spPr>
+        <p:txBody>
+          <a:bodyPr wrap="square">
+            <a:spAutoFit/>
+          </a:bodyPr>
+          <a:lstStyle/>
+          <a:p>
+            <a:pPr algn="l">
+              <a:defRPr sz="1500" b="1">
+                <a:solidFill>
+                  <a:srgbClr val="FFFFFF"/>
+                </a:solidFill>
+                <a:latin typeface="Segoe UI"/>
+              </a:defRPr>
+            </a:pPr>
+            <a:r>
+              <a:t>🎨 Create media</a:t>
+            </a:r>
+          </a:p>
+        </p:txBody>
+      </p:sp>
+      <p:sp>
+        <p:nvSpPr>
+          <p:cNvPr id="14" name="TextBox 13"/>
+          <p:cNvSpPr txBox="1"/>
+          <p:nvPr/>
+        </p:nvSpPr>
+        <p:spPr>
+          <a:xfrm>
+            <a:off x="8348472" y="2267712"/>
+            <a:ext cx="3063240" cy="868680"/>
+          </a:xfrm>
+          <a:prstGeom prst="rect">
+            <a:avLst/>
+          </a:prstGeom>
+          <a:noFill/>
+        </p:spPr>
+        <p:txBody>
+          <a:bodyPr wrap="square">
+            <a:spAutoFit/>
+          </a:bodyPr>
+          <a:lstStyle/>
+          <a:p>
+            <a:pPr algn="l">
+              <a:lnSpc>
+                <a:spcPct val="110000"/>
+              </a:lnSpc>
+              <a:defRPr sz="1200" b="0">
+                <a:solidFill>
+                  <a:srgbClr val="FFFFFF"/>
+                </a:solidFill>
+                <a:latin typeface="Segoe UI"/>
+              </a:defRPr>
+            </a:pPr>
+            <a:r>
+              <a:t>Images, audio, even video</a:t>
+            </a:r>
+          </a:p>
+        </p:txBody>
+      </p:sp>
+      <p:sp>
+        <p:nvSpPr>
+          <p:cNvPr id="15" name="Rounded Rectangle 14"/>
+          <p:cNvSpPr/>
+          <p:nvPr/>
+        </p:nvSpPr>
+        <p:spPr>
+          <a:xfrm>
+            <a:off x="548640" y="3520439"/>
+            <a:ext cx="3520440" cy="1737360"/>
           </a:xfrm>
           <a:prstGeom prst="roundRect">
             <a:avLst/>
@@ -10556,14 +12249,14 @@
       </p:sp>
       <p:sp>
         <p:nvSpPr>
-          <p:cNvPr id="10" name="TextBox 9"/>
+          <p:cNvPr id="16" name="TextBox 15"/>
           <p:cNvSpPr txBox="1"/>
           <p:nvPr/>
         </p:nvSpPr>
         <p:spPr>
           <a:xfrm>
-            <a:off x="3538728" y="2084832"/>
-            <a:ext cx="2240280" cy="457200"/>
+            <a:off x="777240" y="3685031"/>
+            <a:ext cx="3063240" cy="457200"/>
           </a:xfrm>
           <a:prstGeom prst="rect">
             <a:avLst/>
@@ -10577,29 +12270,29 @@
           <a:lstStyle/>
           <a:p>
             <a:pPr algn="l">
-              <a:defRPr sz="1800" b="1">
-                <a:solidFill>
-                  <a:srgbClr val="FFFFFF"/>
-                </a:solidFill>
-                <a:latin typeface="Segoe UI"/>
-              </a:defRPr>
-            </a:pPr>
-            <a:r>
-              <a:t>Tools</a:t>
-            </a:r>
-          </a:p>
-        </p:txBody>
-      </p:sp>
-      <p:sp>
-        <p:nvSpPr>
-          <p:cNvPr id="11" name="TextBox 10"/>
+              <a:defRPr sz="1500" b="1">
+                <a:solidFill>
+                  <a:srgbClr val="FFFFFF"/>
+                </a:solidFill>
+                <a:latin typeface="Segoe UI"/>
+              </a:defRPr>
+            </a:pPr>
+            <a:r>
+              <a:t>🔌 Add new tools</a:t>
+            </a:r>
+          </a:p>
+        </p:txBody>
+      </p:sp>
+      <p:sp>
+        <p:nvSpPr>
+          <p:cNvPr id="17" name="TextBox 16"/>
           <p:cNvSpPr txBox="1"/>
           <p:nvPr/>
         </p:nvSpPr>
         <p:spPr>
           <a:xfrm>
-            <a:off x="3538728" y="2633472"/>
-            <a:ext cx="2240280" cy="1417320"/>
+            <a:off x="777240" y="4233672"/>
+            <a:ext cx="3063240" cy="868680"/>
           </a:xfrm>
           <a:prstGeom prst="rect">
             <a:avLst/>
@@ -10616,35 +12309,35 @@
               <a:lnSpc>
                 <a:spcPct val="110000"/>
               </a:lnSpc>
-              <a:defRPr sz="1400" b="0">
-                <a:solidFill>
-                  <a:srgbClr val="FFFFFF"/>
-                </a:solidFill>
-                <a:latin typeface="Segoe UI"/>
-              </a:defRPr>
-            </a:pPr>
-            <a:r>
-              <a:t>Hands to act in the world</a:t>
-            </a:r>
-          </a:p>
-        </p:txBody>
-      </p:sp>
-      <p:sp>
-        <p:nvSpPr>
-          <p:cNvPr id="12" name="Rounded Rectangle 11"/>
+              <a:defRPr sz="1200" b="0">
+                <a:solidFill>
+                  <a:srgbClr val="FFFFFF"/>
+                </a:solidFill>
+                <a:latin typeface="Segoe UI"/>
+              </a:defRPr>
+            </a:pPr>
+            <a:r>
+              <a:t>Plug in MCP tool packs</a:t>
+            </a:r>
+          </a:p>
+        </p:txBody>
+      </p:sp>
+      <p:sp>
+        <p:nvSpPr>
+          <p:cNvPr id="18" name="Rounded Rectangle 17"/>
           <p:cNvSpPr/>
           <p:nvPr/>
         </p:nvSpPr>
         <p:spPr>
           <a:xfrm>
-            <a:off x="6163056" y="1920240"/>
-            <a:ext cx="2697480" cy="2286000"/>
+            <a:off x="4334256" y="3520439"/>
+            <a:ext cx="3520440" cy="1737360"/>
           </a:xfrm>
           <a:prstGeom prst="roundRect">
             <a:avLst/>
           </a:prstGeom>
           <a:solidFill>
-            <a:srgbClr val="9C27B0"/>
+            <a:srgbClr val="4CAF50"/>
           </a:solidFill>
           <a:ln>
             <a:noFill/>
@@ -10674,14 +12367,14 @@
       </p:sp>
       <p:sp>
         <p:nvSpPr>
-          <p:cNvPr id="13" name="TextBox 12"/>
+          <p:cNvPr id="19" name="TextBox 18"/>
           <p:cNvSpPr txBox="1"/>
           <p:nvPr/>
         </p:nvSpPr>
         <p:spPr>
           <a:xfrm>
-            <a:off x="6391656" y="2084832"/>
-            <a:ext cx="2240280" cy="457200"/>
+            <a:off x="4562856" y="3685031"/>
+            <a:ext cx="3063240" cy="457200"/>
           </a:xfrm>
           <a:prstGeom prst="rect">
             <a:avLst/>
@@ -10695,29 +12388,29 @@
           <a:lstStyle/>
           <a:p>
             <a:pPr algn="l">
-              <a:defRPr sz="1800" b="1">
-                <a:solidFill>
-                  <a:srgbClr val="FFFFFF"/>
-                </a:solidFill>
-                <a:latin typeface="Segoe UI"/>
-              </a:defRPr>
-            </a:pPr>
-            <a:r>
-              <a:t>Memory</a:t>
-            </a:r>
-          </a:p>
-        </p:txBody>
-      </p:sp>
-      <p:sp>
-        <p:nvSpPr>
-          <p:cNvPr id="14" name="TextBox 13"/>
+              <a:defRPr sz="1500" b="1">
+                <a:solidFill>
+                  <a:srgbClr val="FFFFFF"/>
+                </a:solidFill>
+                <a:latin typeface="Segoe UI"/>
+              </a:defRPr>
+            </a:pPr>
+            <a:r>
+              <a:t>📚 Learn new skills</a:t>
+            </a:r>
+          </a:p>
+        </p:txBody>
+      </p:sp>
+      <p:sp>
+        <p:nvSpPr>
+          <p:cNvPr id="20" name="TextBox 19"/>
           <p:cNvSpPr txBox="1"/>
           <p:nvPr/>
         </p:nvSpPr>
         <p:spPr>
           <a:xfrm>
-            <a:off x="6391656" y="2633472"/>
-            <a:ext cx="2240280" cy="1417320"/>
+            <a:off x="4562856" y="4233672"/>
+            <a:ext cx="3063240" cy="868680"/>
           </a:xfrm>
           <a:prstGeom prst="rect">
             <a:avLst/>
@@ -10734,29 +12427,29 @@
               <a:lnSpc>
                 <a:spcPct val="110000"/>
               </a:lnSpc>
-              <a:defRPr sz="1400" b="0">
-                <a:solidFill>
-                  <a:srgbClr val="FFFFFF"/>
-                </a:solidFill>
-                <a:latin typeface="Segoe UI"/>
-              </a:defRPr>
-            </a:pPr>
-            <a:r>
-              <a:t>Notes so it remembers</a:t>
-            </a:r>
-          </a:p>
-        </p:txBody>
-      </p:sp>
-      <p:sp>
-        <p:nvSpPr>
-          <p:cNvPr id="15" name="Rounded Rectangle 14"/>
+              <a:defRPr sz="1200" b="0">
+                <a:solidFill>
+                  <a:srgbClr val="FFFFFF"/>
+                </a:solidFill>
+                <a:latin typeface="Segoe UI"/>
+              </a:defRPr>
+            </a:pPr>
+            <a:r>
+              <a:t>Reusable how-tos to follow</a:t>
+            </a:r>
+          </a:p>
+        </p:txBody>
+      </p:sp>
+      <p:sp>
+        <p:nvSpPr>
+          <p:cNvPr id="21" name="Rounded Rectangle 20"/>
           <p:cNvSpPr/>
           <p:nvPr/>
         </p:nvSpPr>
         <p:spPr>
           <a:xfrm>
-            <a:off x="9015984" y="1920240"/>
-            <a:ext cx="2697480" cy="2286000"/>
+            <a:off x="8119872" y="3520439"/>
+            <a:ext cx="3520440" cy="1737360"/>
           </a:xfrm>
           <a:prstGeom prst="roundRect">
             <a:avLst/>
@@ -10792,14 +12485,14 @@
       </p:sp>
       <p:sp>
         <p:nvSpPr>
-          <p:cNvPr id="16" name="TextBox 15"/>
+          <p:cNvPr id="22" name="TextBox 21"/>
           <p:cNvSpPr txBox="1"/>
           <p:nvPr/>
         </p:nvSpPr>
         <p:spPr>
           <a:xfrm>
-            <a:off x="9244584" y="2084832"/>
-            <a:ext cx="2240280" cy="457200"/>
+            <a:off x="8348472" y="3685031"/>
+            <a:ext cx="3063240" cy="457200"/>
           </a:xfrm>
           <a:prstGeom prst="rect">
             <a:avLst/>
@@ -10813,29 +12506,29 @@
           <a:lstStyle/>
           <a:p>
             <a:pPr algn="l">
-              <a:defRPr sz="1800" b="1">
-                <a:solidFill>
-                  <a:srgbClr val="FFFFFF"/>
-                </a:solidFill>
-                <a:latin typeface="Segoe UI"/>
-              </a:defRPr>
-            </a:pPr>
-            <a:r>
-              <a:t>A Loop</a:t>
-            </a:r>
-          </a:p>
-        </p:txBody>
-      </p:sp>
-      <p:sp>
-        <p:nvSpPr>
-          <p:cNvPr id="17" name="TextBox 16"/>
+              <a:defRPr sz="1500" b="1">
+                <a:solidFill>
+                  <a:srgbClr val="FFFFFF"/>
+                </a:solidFill>
+                <a:latin typeface="Segoe UI"/>
+              </a:defRPr>
+            </a:pPr>
+            <a:r>
+              <a:t>🤝 Work as a team</a:t>
+            </a:r>
+          </a:p>
+        </p:txBody>
+      </p:sp>
+      <p:sp>
+        <p:nvSpPr>
+          <p:cNvPr id="23" name="TextBox 22"/>
           <p:cNvSpPr txBox="1"/>
           <p:nvPr/>
         </p:nvSpPr>
         <p:spPr>
           <a:xfrm>
-            <a:off x="9244584" y="2633472"/>
-            <a:ext cx="2240280" cy="1417320"/>
+            <a:off x="8348472" y="4233672"/>
+            <a:ext cx="3063240" cy="868680"/>
           </a:xfrm>
           <a:prstGeom prst="rect">
             <a:avLst/>
@@ -10852,22 +12545,22 @@
               <a:lnSpc>
                 <a:spcPct val="110000"/>
               </a:lnSpc>
-              <a:defRPr sz="1400" b="0">
-                <a:solidFill>
-                  <a:srgbClr val="FFFFFF"/>
-                </a:solidFill>
-                <a:latin typeface="Segoe UI"/>
-              </a:defRPr>
-            </a:pPr>
-            <a:r>
-              <a:t>Repeats until done</a:t>
-            </a:r>
-          </a:p>
-        </p:txBody>
-      </p:sp>
-      <p:sp>
-        <p:nvSpPr>
-          <p:cNvPr id="18" name="Rounded Rectangle 17"/>
+              <a:defRPr sz="1200" b="0">
+                <a:solidFill>
+                  <a:srgbClr val="FFFFFF"/>
+                </a:solidFill>
+                <a:latin typeface="Segoe UI"/>
+              </a:defRPr>
+            </a:pPr>
+            <a:r>
+              <a:t>Spin up helper agents</a:t>
+            </a:r>
+          </a:p>
+        </p:txBody>
+      </p:sp>
+      <p:sp>
+        <p:nvSpPr>
+          <p:cNvPr id="24" name="Rounded Rectangle 23"/>
           <p:cNvSpPr/>
           <p:nvPr/>
         </p:nvSpPr>
@@ -10880,7 +12573,7 @@
             <a:avLst/>
           </a:prstGeom>
           <a:solidFill>
-            <a:srgbClr val="1E3A5F"/>
+            <a:srgbClr val="009688"/>
           </a:solidFill>
           <a:ln>
             <a:noFill/>
@@ -10916,7 +12609,7 @@
               </a:defRPr>
             </a:pPr>
             <a:r>
-              <a:t>Model + Tools + Memory + a Loop = a real agent.</a:t>
+              <a:t>We'll try just a few today — but this is the full scope.</a:t>
             </a:r>
           </a:p>
         </p:txBody>
@@ -11013,7 +12706,7 @@
               </a:defRPr>
             </a:pPr>
             <a:r>
-              <a:t>How You'll Talk to It: the Terminal</a:t>
+              <a:t>Chatbot vs. Assistant</a:t>
             </a:r>
           </a:p>
         </p:txBody>
@@ -11069,8 +12762,8 @@
         </p:nvSpPr>
         <p:spPr>
           <a:xfrm>
-            <a:off x="731520" y="1417320"/>
-            <a:ext cx="10698480" cy="457200"/>
+            <a:off x="457200" y="868680"/>
+            <a:ext cx="11274552" cy="365760"/>
           </a:xfrm>
           <a:prstGeom prst="rect">
             <a:avLst/>
@@ -11084,15 +12777,15 @@
           <a:lstStyle/>
           <a:p>
             <a:pPr algn="l">
-              <a:defRPr sz="1800" b="0">
-                <a:solidFill>
-                  <a:srgbClr val="424242"/>
-                </a:solidFill>
-                <a:latin typeface="Segoe UI"/>
-              </a:defRPr>
-            </a:pPr>
-            <a:r>
-              <a:t>Type. Press Enter. It replies. Type 'exit' to leave.</a:t>
+              <a:defRPr sz="1600" b="0">
+                <a:solidFill>
+                  <a:srgbClr val="ADD8E6"/>
+                </a:solidFill>
+                <a:latin typeface="Segoe UI"/>
+              </a:defRPr>
+            </a:pPr>
+            <a:r>
+              <a:t>What makes an assistant special?</a:t>
             </a:r>
           </a:p>
         </p:txBody>
@@ -11105,14 +12798,14 @@
         </p:nvSpPr>
         <p:spPr>
           <a:xfrm>
-            <a:off x="731520" y="1965960"/>
-            <a:ext cx="10698480" cy="3200400"/>
+            <a:off x="548640" y="1554480"/>
+            <a:ext cx="5349240" cy="3749039"/>
           </a:xfrm>
           <a:prstGeom prst="roundRect">
             <a:avLst/>
           </a:prstGeom>
           <a:solidFill>
-            <a:srgbClr val="121A24"/>
+            <a:srgbClr val="F5F5F5"/>
           </a:solidFill>
           <a:ln>
             <a:noFill/>
@@ -11148,8 +12841,8 @@
         </p:nvSpPr>
         <p:spPr>
           <a:xfrm>
-            <a:off x="960120" y="2130552"/>
-            <a:ext cx="10241280" cy="2926080"/>
+            <a:off x="777240" y="1719072"/>
+            <a:ext cx="4892040" cy="457200"/>
           </a:xfrm>
           <a:prstGeom prst="rect">
             <a:avLst/>
@@ -11163,131 +12856,122 @@
           <a:lstStyle/>
           <a:p>
             <a:pPr algn="l">
-              <a:lnSpc>
-                <a:spcPct val="115000"/>
-              </a:lnSpc>
-              <a:defRPr sz="1500" b="0">
-                <a:solidFill>
-                  <a:srgbClr val="9BE38A"/>
-                </a:solidFill>
-                <a:latin typeface="Consolas"/>
-              </a:defRPr>
-            </a:pPr>
-            <a:r>
-              <a:t>$ openclaw chat</a:t>
-            </a:r>
-          </a:p>
+              <a:defRPr sz="1800" b="1">
+                <a:solidFill>
+                  <a:srgbClr val="1E3A5F"/>
+                </a:solidFill>
+                <a:latin typeface="Segoe UI"/>
+              </a:defRPr>
+            </a:pPr>
+            <a:r>
+              <a:t>A simple chatbot</a:t>
+            </a:r>
+          </a:p>
+        </p:txBody>
+      </p:sp>
+      <p:sp>
+        <p:nvSpPr>
+          <p:cNvPr id="8" name="TextBox 7"/>
+          <p:cNvSpPr txBox="1"/>
+          <p:nvPr/>
+        </p:nvSpPr>
+        <p:spPr>
+          <a:xfrm>
+            <a:off x="777240" y="2267712"/>
+            <a:ext cx="4892040" cy="2880359"/>
+          </a:xfrm>
+          <a:prstGeom prst="rect">
+            <a:avLst/>
+          </a:prstGeom>
+          <a:noFill/>
+        </p:spPr>
+        <p:txBody>
+          <a:bodyPr wrap="square">
+            <a:spAutoFit/>
+          </a:bodyPr>
+          <a:lstStyle/>
           <a:p>
             <a:pPr algn="l">
               <a:lnSpc>
-                <a:spcPct val="115000"/>
+                <a:spcPct val="110000"/>
               </a:lnSpc>
-              <a:defRPr sz="1500" b="0">
-                <a:solidFill>
-                  <a:srgbClr val="9BE38A"/>
-                </a:solidFill>
-                <a:latin typeface="Consolas"/>
-              </a:defRPr>
-            </a:pPr>
-            <a:r>
-              <a:t>You: Introduce yourself in two sentences.</a:t>
+              <a:defRPr sz="1600" b="0">
+                <a:solidFill>
+                  <a:srgbClr val="424242"/>
+                </a:solidFill>
+                <a:latin typeface="Segoe UI"/>
+              </a:defRPr>
+            </a:pPr>
+            <a:r>
+              <a:t>• Waits for you to type</a:t>
             </a:r>
           </a:p>
           <a:p>
             <a:pPr algn="l">
               <a:lnSpc>
-                <a:spcPct val="115000"/>
+                <a:spcPct val="110000"/>
               </a:lnSpc>
-              <a:defRPr sz="1500" b="0">
-                <a:solidFill>
-                  <a:srgbClr val="9BE38A"/>
-                </a:solidFill>
-                <a:latin typeface="Consolas"/>
-              </a:defRPr>
-            </a:pPr>
+              <a:defRPr sz="1600" b="0">
+                <a:solidFill>
+                  <a:srgbClr val="424242"/>
+                </a:solidFill>
+                <a:latin typeface="Segoe UI"/>
+              </a:defRPr>
+            </a:pPr>
+            <a:r>
+              <a:t>• Text in, text out</a:t>
+            </a:r>
           </a:p>
           <a:p>
             <a:pPr algn="l">
               <a:lnSpc>
-                <a:spcPct val="115000"/>
+                <a:spcPct val="110000"/>
               </a:lnSpc>
-              <a:defRPr sz="1500" b="0">
-                <a:solidFill>
-                  <a:srgbClr val="9BE38A"/>
-                </a:solidFill>
-                <a:latin typeface="Consolas"/>
-              </a:defRPr>
-            </a:pPr>
-            <a:r>
-              <a:t>Clawd: Hi! I'm your AI assistant. I can read and write</a:t>
+              <a:defRPr sz="1600" b="0">
+                <a:solidFill>
+                  <a:srgbClr val="424242"/>
+                </a:solidFill>
+                <a:latin typeface="Segoe UI"/>
+              </a:defRPr>
+            </a:pPr>
+            <a:r>
+              <a:t>• Forgets when you close it</a:t>
             </a:r>
           </a:p>
           <a:p>
             <a:pPr algn="l">
               <a:lnSpc>
-                <a:spcPct val="115000"/>
+                <a:spcPct val="110000"/>
               </a:lnSpc>
-              <a:defRPr sz="1500" b="0">
-                <a:solidFill>
-                  <a:srgbClr val="9BE38A"/>
-                </a:solidFill>
-                <a:latin typeface="Consolas"/>
-              </a:defRPr>
-            </a:pPr>
-            <a:r>
-              <a:t>       files, run commands, and remember you.</a:t>
-            </a:r>
-          </a:p>
-          <a:p>
-            <a:pPr algn="l">
-              <a:lnSpc>
-                <a:spcPct val="115000"/>
-              </a:lnSpc>
-              <a:defRPr sz="1500" b="0">
-                <a:solidFill>
-                  <a:srgbClr val="9BE38A"/>
-                </a:solidFill>
-                <a:latin typeface="Consolas"/>
-              </a:defRPr>
-            </a:pPr>
-            <a:r>
-              <a:t>       What would you like to build today?</a:t>
-            </a:r>
-          </a:p>
-          <a:p>
-            <a:pPr algn="l">
-              <a:lnSpc>
-                <a:spcPct val="115000"/>
-              </a:lnSpc>
-              <a:defRPr sz="1500" b="0">
-                <a:solidFill>
-                  <a:srgbClr val="9BE38A"/>
-                </a:solidFill>
-                <a:latin typeface="Consolas"/>
-              </a:defRPr>
-            </a:pPr>
-            <a:r>
-              <a:t>You: _</a:t>
-            </a:r>
-          </a:p>
-        </p:txBody>
-      </p:sp>
-      <p:sp>
-        <p:nvSpPr>
-          <p:cNvPr id="8" name="Rounded Rectangle 7"/>
+              <a:defRPr sz="1600" b="0">
+                <a:solidFill>
+                  <a:srgbClr val="424242"/>
+                </a:solidFill>
+                <a:latin typeface="Segoe UI"/>
+              </a:defRPr>
+            </a:pPr>
+            <a:r>
+              <a:t>• Lives inside a website</a:t>
+            </a:r>
+          </a:p>
+        </p:txBody>
+      </p:sp>
+      <p:sp>
+        <p:nvSpPr>
+          <p:cNvPr id="9" name="Rounded Rectangle 8"/>
           <p:cNvSpPr/>
           <p:nvPr/>
         </p:nvSpPr>
         <p:spPr>
           <a:xfrm>
-            <a:off x="914400" y="5760720"/>
-            <a:ext cx="10360152" cy="640080"/>
+            <a:off x="6263640" y="1554480"/>
+            <a:ext cx="5349240" cy="3749039"/>
           </a:xfrm>
           <a:prstGeom prst="roundRect">
             <a:avLst/>
           </a:prstGeom>
           <a:solidFill>
-            <a:srgbClr val="009688"/>
+            <a:srgbClr val="4CAF50"/>
           </a:solidFill>
           <a:ln>
             <a:noFill/>
@@ -11308,6 +12992,172 @@
           </a:fontRef>
         </p:style>
         <p:txBody>
+          <a:bodyPr rtlCol="0" anchor="ctr"/>
+          <a:lstStyle/>
+          <a:p>
+            <a:pPr algn="ctr"/>
+          </a:p>
+        </p:txBody>
+      </p:sp>
+      <p:sp>
+        <p:nvSpPr>
+          <p:cNvPr id="10" name="TextBox 9"/>
+          <p:cNvSpPr txBox="1"/>
+          <p:nvPr/>
+        </p:nvSpPr>
+        <p:spPr>
+          <a:xfrm>
+            <a:off x="6492240" y="1719072"/>
+            <a:ext cx="4892040" cy="457200"/>
+          </a:xfrm>
+          <a:prstGeom prst="rect">
+            <a:avLst/>
+          </a:prstGeom>
+          <a:noFill/>
+        </p:spPr>
+        <p:txBody>
+          <a:bodyPr wrap="square">
+            <a:spAutoFit/>
+          </a:bodyPr>
+          <a:lstStyle/>
+          <a:p>
+            <a:pPr algn="l">
+              <a:defRPr sz="1800" b="1">
+                <a:solidFill>
+                  <a:srgbClr val="FFFFFF"/>
+                </a:solidFill>
+                <a:latin typeface="Segoe UI"/>
+              </a:defRPr>
+            </a:pPr>
+            <a:r>
+              <a:t>An AI assistant</a:t>
+            </a:r>
+          </a:p>
+        </p:txBody>
+      </p:sp>
+      <p:sp>
+        <p:nvSpPr>
+          <p:cNvPr id="11" name="TextBox 10"/>
+          <p:cNvSpPr txBox="1"/>
+          <p:nvPr/>
+        </p:nvSpPr>
+        <p:spPr>
+          <a:xfrm>
+            <a:off x="6492240" y="2267712"/>
+            <a:ext cx="4892040" cy="2880359"/>
+          </a:xfrm>
+          <a:prstGeom prst="rect">
+            <a:avLst/>
+          </a:prstGeom>
+          <a:noFill/>
+        </p:spPr>
+        <p:txBody>
+          <a:bodyPr wrap="square">
+            <a:spAutoFit/>
+          </a:bodyPr>
+          <a:lstStyle/>
+          <a:p>
+            <a:pPr algn="l">
+              <a:lnSpc>
+                <a:spcPct val="110000"/>
+              </a:lnSpc>
+              <a:defRPr sz="1600" b="0">
+                <a:solidFill>
+                  <a:srgbClr val="FFFFFF"/>
+                </a:solidFill>
+                <a:latin typeface="Segoe UI"/>
+              </a:defRPr>
+            </a:pPr>
+            <a:r>
+              <a:t>• Takes action and does tasks</a:t>
+            </a:r>
+          </a:p>
+          <a:p>
+            <a:pPr algn="l">
+              <a:lnSpc>
+                <a:spcPct val="110000"/>
+              </a:lnSpc>
+              <a:defRPr sz="1600" b="0">
+                <a:solidFill>
+                  <a:srgbClr val="FFFFFF"/>
+                </a:solidFill>
+                <a:latin typeface="Segoe UI"/>
+              </a:defRPr>
+            </a:pPr>
+            <a:r>
+              <a:t>• Uses files, commands, the web</a:t>
+            </a:r>
+          </a:p>
+          <a:p>
+            <a:pPr algn="l">
+              <a:lnSpc>
+                <a:spcPct val="110000"/>
+              </a:lnSpc>
+              <a:defRPr sz="1600" b="0">
+                <a:solidFill>
+                  <a:srgbClr val="FFFFFF"/>
+                </a:solidFill>
+                <a:latin typeface="Segoe UI"/>
+              </a:defRPr>
+            </a:pPr>
+            <a:r>
+              <a:t>• Remembers you over time</a:t>
+            </a:r>
+          </a:p>
+          <a:p>
+            <a:pPr algn="l">
+              <a:lnSpc>
+                <a:spcPct val="110000"/>
+              </a:lnSpc>
+              <a:defRPr sz="1600" b="0">
+                <a:solidFill>
+                  <a:srgbClr val="FFFFFF"/>
+                </a:solidFill>
+                <a:latin typeface="Segoe UI"/>
+              </a:defRPr>
+            </a:pPr>
+            <a:r>
+              <a:t>• Runs on your own computer</a:t>
+            </a:r>
+          </a:p>
+        </p:txBody>
+      </p:sp>
+      <p:sp>
+        <p:nvSpPr>
+          <p:cNvPr id="12" name="Rounded Rectangle 11"/>
+          <p:cNvSpPr/>
+          <p:nvPr/>
+        </p:nvSpPr>
+        <p:spPr>
+          <a:xfrm>
+            <a:off x="914400" y="5760720"/>
+            <a:ext cx="10360152" cy="640080"/>
+          </a:xfrm>
+          <a:prstGeom prst="roundRect">
+            <a:avLst/>
+          </a:prstGeom>
+          <a:solidFill>
+            <a:srgbClr val="1E3A5F"/>
+          </a:solidFill>
+          <a:ln>
+            <a:noFill/>
+          </a:ln>
+        </p:spPr>
+        <p:style>
+          <a:lnRef idx="1">
+            <a:schemeClr val="accent1"/>
+          </a:lnRef>
+          <a:fillRef idx="3">
+            <a:schemeClr val="accent1"/>
+          </a:fillRef>
+          <a:effectRef idx="2">
+            <a:schemeClr val="accent1"/>
+          </a:effectRef>
+          <a:fontRef idx="minor">
+            <a:schemeClr val="lt1"/>
+          </a:fontRef>
+        </p:style>
+        <p:txBody>
           <a:bodyPr rtlCol="0" anchor="ctr" wrap="square"/>
           <a:lstStyle/>
           <a:p>
@@ -11323,7 +13173,7 @@
               </a:defRPr>
             </a:pPr>
             <a:r>
-              <a:t>No phone, no website — just you and your assistant in the terminal.</a:t>
+              <a:t>Same chat window — but an assistant can actually DO things.</a:t>
             </a:r>
           </a:p>
         </p:txBody>
@@ -11420,7 +13270,7 @@
               </a:defRPr>
             </a:pPr>
             <a:r>
-              <a:t>The Gateway = the Always-On Brain</a:t>
+              <a:t>Every Agent = 4 Ingredients</a:t>
             </a:r>
           </a:p>
         </p:txBody>
@@ -11470,14 +13320,522 @@
       </p:sp>
       <p:sp>
         <p:nvSpPr>
-          <p:cNvPr id="5" name="Rounded Rectangle 4"/>
+          <p:cNvPr id="5" name="TextBox 4"/>
+          <p:cNvSpPr txBox="1"/>
+          <p:nvPr/>
+        </p:nvSpPr>
+        <p:spPr>
+          <a:xfrm>
+            <a:off x="457200" y="868680"/>
+            <a:ext cx="11274552" cy="365760"/>
+          </a:xfrm>
+          <a:prstGeom prst="rect">
+            <a:avLst/>
+          </a:prstGeom>
+          <a:noFill/>
+        </p:spPr>
+        <p:txBody>
+          <a:bodyPr wrap="square">
+            <a:spAutoFit/>
+          </a:bodyPr>
+          <a:lstStyle/>
+          <a:p>
+            <a:pPr algn="l">
+              <a:defRPr sz="1600" b="0">
+                <a:solidFill>
+                  <a:srgbClr val="ADD8E6"/>
+                </a:solidFill>
+                <a:latin typeface="Segoe UI"/>
+              </a:defRPr>
+            </a:pPr>
+            <a:r>
+              <a:t>You've seen these all unit — OpenClaw has all four, for real</a:t>
+            </a:r>
+          </a:p>
+        </p:txBody>
+      </p:sp>
+      <p:sp>
+        <p:nvSpPr>
+          <p:cNvPr id="6" name="Rounded Rectangle 5"/>
           <p:cNvSpPr/>
           <p:nvPr/>
         </p:nvSpPr>
         <p:spPr>
           <a:xfrm>
-            <a:off x="914400" y="2194560"/>
-            <a:ext cx="4297680" cy="1828800"/>
+            <a:off x="457200" y="1920240"/>
+            <a:ext cx="2697480" cy="2286000"/>
+          </a:xfrm>
+          <a:prstGeom prst="roundRect">
+            <a:avLst/>
+          </a:prstGeom>
+          <a:solidFill>
+            <a:srgbClr val="3467A6"/>
+          </a:solidFill>
+          <a:ln>
+            <a:noFill/>
+          </a:ln>
+        </p:spPr>
+        <p:style>
+          <a:lnRef idx="1">
+            <a:schemeClr val="accent1"/>
+          </a:lnRef>
+          <a:fillRef idx="3">
+            <a:schemeClr val="accent1"/>
+          </a:fillRef>
+          <a:effectRef idx="2">
+            <a:schemeClr val="accent1"/>
+          </a:effectRef>
+          <a:fontRef idx="minor">
+            <a:schemeClr val="lt1"/>
+          </a:fontRef>
+        </p:style>
+        <p:txBody>
+          <a:bodyPr rtlCol="0" anchor="ctr"/>
+          <a:lstStyle/>
+          <a:p>
+            <a:pPr algn="ctr"/>
+          </a:p>
+        </p:txBody>
+      </p:sp>
+      <p:sp>
+        <p:nvSpPr>
+          <p:cNvPr id="7" name="TextBox 6"/>
+          <p:cNvSpPr txBox="1"/>
+          <p:nvPr/>
+        </p:nvSpPr>
+        <p:spPr>
+          <a:xfrm>
+            <a:off x="685800" y="2084832"/>
+            <a:ext cx="2240280" cy="457200"/>
+          </a:xfrm>
+          <a:prstGeom prst="rect">
+            <a:avLst/>
+          </a:prstGeom>
+          <a:noFill/>
+        </p:spPr>
+        <p:txBody>
+          <a:bodyPr wrap="square">
+            <a:spAutoFit/>
+          </a:bodyPr>
+          <a:lstStyle/>
+          <a:p>
+            <a:pPr algn="l">
+              <a:defRPr sz="1800" b="1">
+                <a:solidFill>
+                  <a:srgbClr val="FFFFFF"/>
+                </a:solidFill>
+                <a:latin typeface="Segoe UI"/>
+              </a:defRPr>
+            </a:pPr>
+            <a:r>
+              <a:t>Model</a:t>
+            </a:r>
+          </a:p>
+        </p:txBody>
+      </p:sp>
+      <p:sp>
+        <p:nvSpPr>
+          <p:cNvPr id="8" name="TextBox 7"/>
+          <p:cNvSpPr txBox="1"/>
+          <p:nvPr/>
+        </p:nvSpPr>
+        <p:spPr>
+          <a:xfrm>
+            <a:off x="685800" y="2633472"/>
+            <a:ext cx="2240280" cy="1417320"/>
+          </a:xfrm>
+          <a:prstGeom prst="rect">
+            <a:avLst/>
+          </a:prstGeom>
+          <a:noFill/>
+        </p:spPr>
+        <p:txBody>
+          <a:bodyPr wrap="square">
+            <a:spAutoFit/>
+          </a:bodyPr>
+          <a:lstStyle/>
+          <a:p>
+            <a:pPr algn="l">
+              <a:lnSpc>
+                <a:spcPct val="110000"/>
+              </a:lnSpc>
+              <a:defRPr sz="1400" b="0">
+                <a:solidFill>
+                  <a:srgbClr val="FFFFFF"/>
+                </a:solidFill>
+                <a:latin typeface="Segoe UI"/>
+              </a:defRPr>
+            </a:pPr>
+            <a:r>
+              <a:t>The brain that thinks</a:t>
+            </a:r>
+          </a:p>
+        </p:txBody>
+      </p:sp>
+      <p:sp>
+        <p:nvSpPr>
+          <p:cNvPr id="9" name="Rounded Rectangle 8"/>
+          <p:cNvSpPr/>
+          <p:nvPr/>
+        </p:nvSpPr>
+        <p:spPr>
+          <a:xfrm>
+            <a:off x="3310128" y="1920240"/>
+            <a:ext cx="2697480" cy="2286000"/>
+          </a:xfrm>
+          <a:prstGeom prst="roundRect">
+            <a:avLst/>
+          </a:prstGeom>
+          <a:solidFill>
+            <a:srgbClr val="009688"/>
+          </a:solidFill>
+          <a:ln>
+            <a:noFill/>
+          </a:ln>
+        </p:spPr>
+        <p:style>
+          <a:lnRef idx="1">
+            <a:schemeClr val="accent1"/>
+          </a:lnRef>
+          <a:fillRef idx="3">
+            <a:schemeClr val="accent1"/>
+          </a:fillRef>
+          <a:effectRef idx="2">
+            <a:schemeClr val="accent1"/>
+          </a:effectRef>
+          <a:fontRef idx="minor">
+            <a:schemeClr val="lt1"/>
+          </a:fontRef>
+        </p:style>
+        <p:txBody>
+          <a:bodyPr rtlCol="0" anchor="ctr"/>
+          <a:lstStyle/>
+          <a:p>
+            <a:pPr algn="ctr"/>
+          </a:p>
+        </p:txBody>
+      </p:sp>
+      <p:sp>
+        <p:nvSpPr>
+          <p:cNvPr id="10" name="TextBox 9"/>
+          <p:cNvSpPr txBox="1"/>
+          <p:nvPr/>
+        </p:nvSpPr>
+        <p:spPr>
+          <a:xfrm>
+            <a:off x="3538728" y="2084832"/>
+            <a:ext cx="2240280" cy="457200"/>
+          </a:xfrm>
+          <a:prstGeom prst="rect">
+            <a:avLst/>
+          </a:prstGeom>
+          <a:noFill/>
+        </p:spPr>
+        <p:txBody>
+          <a:bodyPr wrap="square">
+            <a:spAutoFit/>
+          </a:bodyPr>
+          <a:lstStyle/>
+          <a:p>
+            <a:pPr algn="l">
+              <a:defRPr sz="1800" b="1">
+                <a:solidFill>
+                  <a:srgbClr val="FFFFFF"/>
+                </a:solidFill>
+                <a:latin typeface="Segoe UI"/>
+              </a:defRPr>
+            </a:pPr>
+            <a:r>
+              <a:t>Tools</a:t>
+            </a:r>
+          </a:p>
+        </p:txBody>
+      </p:sp>
+      <p:sp>
+        <p:nvSpPr>
+          <p:cNvPr id="11" name="TextBox 10"/>
+          <p:cNvSpPr txBox="1"/>
+          <p:nvPr/>
+        </p:nvSpPr>
+        <p:spPr>
+          <a:xfrm>
+            <a:off x="3538728" y="2633472"/>
+            <a:ext cx="2240280" cy="1417320"/>
+          </a:xfrm>
+          <a:prstGeom prst="rect">
+            <a:avLst/>
+          </a:prstGeom>
+          <a:noFill/>
+        </p:spPr>
+        <p:txBody>
+          <a:bodyPr wrap="square">
+            <a:spAutoFit/>
+          </a:bodyPr>
+          <a:lstStyle/>
+          <a:p>
+            <a:pPr algn="l">
+              <a:lnSpc>
+                <a:spcPct val="110000"/>
+              </a:lnSpc>
+              <a:defRPr sz="1400" b="0">
+                <a:solidFill>
+                  <a:srgbClr val="FFFFFF"/>
+                </a:solidFill>
+                <a:latin typeface="Segoe UI"/>
+              </a:defRPr>
+            </a:pPr>
+            <a:r>
+              <a:t>Hands to act in the world</a:t>
+            </a:r>
+          </a:p>
+        </p:txBody>
+      </p:sp>
+      <p:sp>
+        <p:nvSpPr>
+          <p:cNvPr id="12" name="Rounded Rectangle 11"/>
+          <p:cNvSpPr/>
+          <p:nvPr/>
+        </p:nvSpPr>
+        <p:spPr>
+          <a:xfrm>
+            <a:off x="6163056" y="1920240"/>
+            <a:ext cx="2697480" cy="2286000"/>
+          </a:xfrm>
+          <a:prstGeom prst="roundRect">
+            <a:avLst/>
+          </a:prstGeom>
+          <a:solidFill>
+            <a:srgbClr val="9C27B0"/>
+          </a:solidFill>
+          <a:ln>
+            <a:noFill/>
+          </a:ln>
+        </p:spPr>
+        <p:style>
+          <a:lnRef idx="1">
+            <a:schemeClr val="accent1"/>
+          </a:lnRef>
+          <a:fillRef idx="3">
+            <a:schemeClr val="accent1"/>
+          </a:fillRef>
+          <a:effectRef idx="2">
+            <a:schemeClr val="accent1"/>
+          </a:effectRef>
+          <a:fontRef idx="minor">
+            <a:schemeClr val="lt1"/>
+          </a:fontRef>
+        </p:style>
+        <p:txBody>
+          <a:bodyPr rtlCol="0" anchor="ctr"/>
+          <a:lstStyle/>
+          <a:p>
+            <a:pPr algn="ctr"/>
+          </a:p>
+        </p:txBody>
+      </p:sp>
+      <p:sp>
+        <p:nvSpPr>
+          <p:cNvPr id="13" name="TextBox 12"/>
+          <p:cNvSpPr txBox="1"/>
+          <p:nvPr/>
+        </p:nvSpPr>
+        <p:spPr>
+          <a:xfrm>
+            <a:off x="6391656" y="2084832"/>
+            <a:ext cx="2240280" cy="457200"/>
+          </a:xfrm>
+          <a:prstGeom prst="rect">
+            <a:avLst/>
+          </a:prstGeom>
+          <a:noFill/>
+        </p:spPr>
+        <p:txBody>
+          <a:bodyPr wrap="square">
+            <a:spAutoFit/>
+          </a:bodyPr>
+          <a:lstStyle/>
+          <a:p>
+            <a:pPr algn="l">
+              <a:defRPr sz="1800" b="1">
+                <a:solidFill>
+                  <a:srgbClr val="FFFFFF"/>
+                </a:solidFill>
+                <a:latin typeface="Segoe UI"/>
+              </a:defRPr>
+            </a:pPr>
+            <a:r>
+              <a:t>Memory</a:t>
+            </a:r>
+          </a:p>
+        </p:txBody>
+      </p:sp>
+      <p:sp>
+        <p:nvSpPr>
+          <p:cNvPr id="14" name="TextBox 13"/>
+          <p:cNvSpPr txBox="1"/>
+          <p:nvPr/>
+        </p:nvSpPr>
+        <p:spPr>
+          <a:xfrm>
+            <a:off x="6391656" y="2633472"/>
+            <a:ext cx="2240280" cy="1417320"/>
+          </a:xfrm>
+          <a:prstGeom prst="rect">
+            <a:avLst/>
+          </a:prstGeom>
+          <a:noFill/>
+        </p:spPr>
+        <p:txBody>
+          <a:bodyPr wrap="square">
+            <a:spAutoFit/>
+          </a:bodyPr>
+          <a:lstStyle/>
+          <a:p>
+            <a:pPr algn="l">
+              <a:lnSpc>
+                <a:spcPct val="110000"/>
+              </a:lnSpc>
+              <a:defRPr sz="1400" b="0">
+                <a:solidFill>
+                  <a:srgbClr val="FFFFFF"/>
+                </a:solidFill>
+                <a:latin typeface="Segoe UI"/>
+              </a:defRPr>
+            </a:pPr>
+            <a:r>
+              <a:t>Notes so it remembers</a:t>
+            </a:r>
+          </a:p>
+        </p:txBody>
+      </p:sp>
+      <p:sp>
+        <p:nvSpPr>
+          <p:cNvPr id="15" name="Rounded Rectangle 14"/>
+          <p:cNvSpPr/>
+          <p:nvPr/>
+        </p:nvSpPr>
+        <p:spPr>
+          <a:xfrm>
+            <a:off x="9015984" y="1920240"/>
+            <a:ext cx="2697480" cy="2286000"/>
+          </a:xfrm>
+          <a:prstGeom prst="roundRect">
+            <a:avLst/>
+          </a:prstGeom>
+          <a:solidFill>
+            <a:srgbClr val="FF9933"/>
+          </a:solidFill>
+          <a:ln>
+            <a:noFill/>
+          </a:ln>
+        </p:spPr>
+        <p:style>
+          <a:lnRef idx="1">
+            <a:schemeClr val="accent1"/>
+          </a:lnRef>
+          <a:fillRef idx="3">
+            <a:schemeClr val="accent1"/>
+          </a:fillRef>
+          <a:effectRef idx="2">
+            <a:schemeClr val="accent1"/>
+          </a:effectRef>
+          <a:fontRef idx="minor">
+            <a:schemeClr val="lt1"/>
+          </a:fontRef>
+        </p:style>
+        <p:txBody>
+          <a:bodyPr rtlCol="0" anchor="ctr"/>
+          <a:lstStyle/>
+          <a:p>
+            <a:pPr algn="ctr"/>
+          </a:p>
+        </p:txBody>
+      </p:sp>
+      <p:sp>
+        <p:nvSpPr>
+          <p:cNvPr id="16" name="TextBox 15"/>
+          <p:cNvSpPr txBox="1"/>
+          <p:nvPr/>
+        </p:nvSpPr>
+        <p:spPr>
+          <a:xfrm>
+            <a:off x="9244584" y="2084832"/>
+            <a:ext cx="2240280" cy="457200"/>
+          </a:xfrm>
+          <a:prstGeom prst="rect">
+            <a:avLst/>
+          </a:prstGeom>
+          <a:noFill/>
+        </p:spPr>
+        <p:txBody>
+          <a:bodyPr wrap="square">
+            <a:spAutoFit/>
+          </a:bodyPr>
+          <a:lstStyle/>
+          <a:p>
+            <a:pPr algn="l">
+              <a:defRPr sz="1800" b="1">
+                <a:solidFill>
+                  <a:srgbClr val="FFFFFF"/>
+                </a:solidFill>
+                <a:latin typeface="Segoe UI"/>
+              </a:defRPr>
+            </a:pPr>
+            <a:r>
+              <a:t>A Loop</a:t>
+            </a:r>
+          </a:p>
+        </p:txBody>
+      </p:sp>
+      <p:sp>
+        <p:nvSpPr>
+          <p:cNvPr id="17" name="TextBox 16"/>
+          <p:cNvSpPr txBox="1"/>
+          <p:nvPr/>
+        </p:nvSpPr>
+        <p:spPr>
+          <a:xfrm>
+            <a:off x="9244584" y="2633472"/>
+            <a:ext cx="2240280" cy="1417320"/>
+          </a:xfrm>
+          <a:prstGeom prst="rect">
+            <a:avLst/>
+          </a:prstGeom>
+          <a:noFill/>
+        </p:spPr>
+        <p:txBody>
+          <a:bodyPr wrap="square">
+            <a:spAutoFit/>
+          </a:bodyPr>
+          <a:lstStyle/>
+          <a:p>
+            <a:pPr algn="l">
+              <a:lnSpc>
+                <a:spcPct val="110000"/>
+              </a:lnSpc>
+              <a:defRPr sz="1400" b="0">
+                <a:solidFill>
+                  <a:srgbClr val="FFFFFF"/>
+                </a:solidFill>
+                <a:latin typeface="Segoe UI"/>
+              </a:defRPr>
+            </a:pPr>
+            <a:r>
+              <a:t>Repeats until done</a:t>
+            </a:r>
+          </a:p>
+        </p:txBody>
+      </p:sp>
+      <p:sp>
+        <p:nvSpPr>
+          <p:cNvPr id="18" name="Rounded Rectangle 17"/>
+          <p:cNvSpPr/>
+          <p:nvPr/>
+        </p:nvSpPr>
+        <p:spPr>
+          <a:xfrm>
+            <a:off x="914400" y="5760720"/>
+            <a:ext cx="10360152" cy="640080"/>
           </a:xfrm>
           <a:prstGeom prst="roundRect">
             <a:avLst/>
@@ -11504,277 +13862,6 @@
           </a:fontRef>
         </p:style>
         <p:txBody>
-          <a:bodyPr rtlCol="0" anchor="ctr"/>
-          <a:lstStyle/>
-          <a:p>
-            <a:pPr algn="ctr"/>
-          </a:p>
-        </p:txBody>
-      </p:sp>
-      <p:sp>
-        <p:nvSpPr>
-          <p:cNvPr id="6" name="TextBox 5"/>
-          <p:cNvSpPr txBox="1"/>
-          <p:nvPr/>
-        </p:nvSpPr>
-        <p:spPr>
-          <a:xfrm>
-            <a:off x="1051560" y="2359152"/>
-            <a:ext cx="4023360" cy="1554480"/>
-          </a:xfrm>
-          <a:prstGeom prst="rect">
-            <a:avLst/>
-          </a:prstGeom>
-          <a:noFill/>
-        </p:spPr>
-        <p:txBody>
-          <a:bodyPr wrap="square">
-            <a:spAutoFit/>
-          </a:bodyPr>
-          <a:lstStyle/>
-          <a:p>
-            <a:pPr algn="ctr">
-              <a:lnSpc>
-                <a:spcPct val="105000"/>
-              </a:lnSpc>
-              <a:defRPr sz="1500" b="1">
-                <a:solidFill>
-                  <a:srgbClr val="FFFFFF"/>
-                </a:solidFill>
-                <a:latin typeface="Segoe UI"/>
-              </a:defRPr>
-            </a:pPr>
-            <a:r>
-              <a:t>Terminal 1</a:t>
-            </a:r>
-          </a:p>
-          <a:p>
-            <a:pPr algn="ctr">
-              <a:lnSpc>
-                <a:spcPct val="105000"/>
-              </a:lnSpc>
-              <a:defRPr sz="1500" b="1">
-                <a:solidFill>
-                  <a:srgbClr val="FFFFFF"/>
-                </a:solidFill>
-                <a:latin typeface="Segoe UI"/>
-              </a:defRPr>
-            </a:pPr>
-            <a:r>
-              <a:t>openclaw gateway</a:t>
-            </a:r>
-          </a:p>
-          <a:p>
-            <a:pPr algn="ctr">
-              <a:lnSpc>
-                <a:spcPct val="105000"/>
-              </a:lnSpc>
-              <a:defRPr sz="1500" b="1">
-                <a:solidFill>
-                  <a:srgbClr val="FFFFFF"/>
-                </a:solidFill>
-                <a:latin typeface="Segoe UI"/>
-              </a:defRPr>
-            </a:pPr>
-            <a:r>
-              <a:t>(the brain — leave it running)</a:t>
-            </a:r>
-          </a:p>
-        </p:txBody>
-      </p:sp>
-      <p:sp>
-        <p:nvSpPr>
-          <p:cNvPr id="7" name="Right Arrow 6"/>
-          <p:cNvSpPr/>
-          <p:nvPr/>
-        </p:nvSpPr>
-        <p:spPr>
-          <a:xfrm>
-            <a:off x="5577840" y="2788920"/>
-            <a:ext cx="640080" cy="640080"/>
-          </a:xfrm>
-          <a:prstGeom prst="rightArrow">
-            <a:avLst/>
-          </a:prstGeom>
-          <a:solidFill>
-            <a:srgbClr val="FF9933"/>
-          </a:solidFill>
-          <a:ln>
-            <a:noFill/>
-          </a:ln>
-        </p:spPr>
-        <p:style>
-          <a:lnRef idx="1">
-            <a:schemeClr val="accent1"/>
-          </a:lnRef>
-          <a:fillRef idx="3">
-            <a:schemeClr val="accent1"/>
-          </a:fillRef>
-          <a:effectRef idx="2">
-            <a:schemeClr val="accent1"/>
-          </a:effectRef>
-          <a:fontRef idx="minor">
-            <a:schemeClr val="lt1"/>
-          </a:fontRef>
-        </p:style>
-        <p:txBody>
-          <a:bodyPr rtlCol="0" anchor="ctr"/>
-          <a:lstStyle/>
-          <a:p>
-            <a:pPr algn="ctr"/>
-          </a:p>
-        </p:txBody>
-      </p:sp>
-      <p:sp>
-        <p:nvSpPr>
-          <p:cNvPr id="8" name="Rounded Rectangle 7"/>
-          <p:cNvSpPr/>
-          <p:nvPr/>
-        </p:nvSpPr>
-        <p:spPr>
-          <a:xfrm>
-            <a:off x="6949440" y="2194560"/>
-            <a:ext cx="4297680" cy="1828800"/>
-          </a:xfrm>
-          <a:prstGeom prst="roundRect">
-            <a:avLst/>
-          </a:prstGeom>
-          <a:solidFill>
-            <a:srgbClr val="4CAF50"/>
-          </a:solidFill>
-          <a:ln>
-            <a:noFill/>
-          </a:ln>
-        </p:spPr>
-        <p:style>
-          <a:lnRef idx="1">
-            <a:schemeClr val="accent1"/>
-          </a:lnRef>
-          <a:fillRef idx="3">
-            <a:schemeClr val="accent1"/>
-          </a:fillRef>
-          <a:effectRef idx="2">
-            <a:schemeClr val="accent1"/>
-          </a:effectRef>
-          <a:fontRef idx="minor">
-            <a:schemeClr val="lt1"/>
-          </a:fontRef>
-        </p:style>
-        <p:txBody>
-          <a:bodyPr rtlCol="0" anchor="ctr"/>
-          <a:lstStyle/>
-          <a:p>
-            <a:pPr algn="ctr"/>
-          </a:p>
-        </p:txBody>
-      </p:sp>
-      <p:sp>
-        <p:nvSpPr>
-          <p:cNvPr id="9" name="TextBox 8"/>
-          <p:cNvSpPr txBox="1"/>
-          <p:nvPr/>
-        </p:nvSpPr>
-        <p:spPr>
-          <a:xfrm>
-            <a:off x="7086600" y="2359152"/>
-            <a:ext cx="4023360" cy="1554480"/>
-          </a:xfrm>
-          <a:prstGeom prst="rect">
-            <a:avLst/>
-          </a:prstGeom>
-          <a:noFill/>
-        </p:spPr>
-        <p:txBody>
-          <a:bodyPr wrap="square">
-            <a:spAutoFit/>
-          </a:bodyPr>
-          <a:lstStyle/>
-          <a:p>
-            <a:pPr algn="ctr">
-              <a:lnSpc>
-                <a:spcPct val="105000"/>
-              </a:lnSpc>
-              <a:defRPr sz="1500" b="1">
-                <a:solidFill>
-                  <a:srgbClr val="FFFFFF"/>
-                </a:solidFill>
-                <a:latin typeface="Segoe UI"/>
-              </a:defRPr>
-            </a:pPr>
-            <a:r>
-              <a:t>Terminal 2</a:t>
-            </a:r>
-          </a:p>
-          <a:p>
-            <a:pPr algn="ctr">
-              <a:lnSpc>
-                <a:spcPct val="105000"/>
-              </a:lnSpc>
-              <a:defRPr sz="1500" b="1">
-                <a:solidFill>
-                  <a:srgbClr val="FFFFFF"/>
-                </a:solidFill>
-                <a:latin typeface="Segoe UI"/>
-              </a:defRPr>
-            </a:pPr>
-            <a:r>
-              <a:t>openclaw chat</a:t>
-            </a:r>
-          </a:p>
-          <a:p>
-            <a:pPr algn="ctr">
-              <a:lnSpc>
-                <a:spcPct val="105000"/>
-              </a:lnSpc>
-              <a:defRPr sz="1500" b="1">
-                <a:solidFill>
-                  <a:srgbClr val="FFFFFF"/>
-                </a:solidFill>
-                <a:latin typeface="Segoe UI"/>
-              </a:defRPr>
-            </a:pPr>
-            <a:r>
-              <a:t>(where you talk to it)</a:t>
-            </a:r>
-          </a:p>
-        </p:txBody>
-      </p:sp>
-      <p:sp>
-        <p:nvSpPr>
-          <p:cNvPr id="10" name="Rounded Rectangle 9"/>
-          <p:cNvSpPr/>
-          <p:nvPr/>
-        </p:nvSpPr>
-        <p:spPr>
-          <a:xfrm>
-            <a:off x="914400" y="5760720"/>
-            <a:ext cx="10360152" cy="640080"/>
-          </a:xfrm>
-          <a:prstGeom prst="roundRect">
-            <a:avLst/>
-          </a:prstGeom>
-          <a:solidFill>
-            <a:srgbClr val="1E3A5F"/>
-          </a:solidFill>
-          <a:ln>
-            <a:noFill/>
-          </a:ln>
-        </p:spPr>
-        <p:style>
-          <a:lnRef idx="1">
-            <a:schemeClr val="accent1"/>
-          </a:lnRef>
-          <a:fillRef idx="3">
-            <a:schemeClr val="accent1"/>
-          </a:fillRef>
-          <a:effectRef idx="2">
-            <a:schemeClr val="accent1"/>
-          </a:effectRef>
-          <a:fontRef idx="minor">
-            <a:schemeClr val="lt1"/>
-          </a:fontRef>
-        </p:style>
-        <p:txBody>
           <a:bodyPr rtlCol="0" anchor="ctr" wrap="square"/>
           <a:lstStyle/>
           <a:p>
@@ -11790,7 +13877,7 @@
               </a:defRPr>
             </a:pPr>
             <a:r>
-              <a:t>One window thinks. One window talks. Close them to stop everything.</a:t>
+              <a:t>Model + Tools + Memory + a Loop = a real agent.</a:t>
             </a:r>
           </a:p>
         </p:txBody>
@@ -11887,7 +13974,7 @@
               </a:defRPr>
             </a:pPr>
             <a:r>
-              <a:t>OpenRouter: One Key, Many Models</a:t>
+              <a:t>How You'll Talk to It: the Terminal</a:t>
             </a:r>
           </a:p>
         </p:txBody>
@@ -11937,20 +14024,56 @@
       </p:sp>
       <p:sp>
         <p:nvSpPr>
-          <p:cNvPr id="5" name="Rounded Rectangle 4"/>
+          <p:cNvPr id="5" name="TextBox 4"/>
+          <p:cNvSpPr txBox="1"/>
+          <p:nvPr/>
+        </p:nvSpPr>
+        <p:spPr>
+          <a:xfrm>
+            <a:off x="731520" y="1417320"/>
+            <a:ext cx="10698480" cy="457200"/>
+          </a:xfrm>
+          <a:prstGeom prst="rect">
+            <a:avLst/>
+          </a:prstGeom>
+          <a:noFill/>
+        </p:spPr>
+        <p:txBody>
+          <a:bodyPr wrap="square">
+            <a:spAutoFit/>
+          </a:bodyPr>
+          <a:lstStyle/>
+          <a:p>
+            <a:pPr algn="l">
+              <a:defRPr sz="1800" b="0">
+                <a:solidFill>
+                  <a:srgbClr val="424242"/>
+                </a:solidFill>
+                <a:latin typeface="Segoe UI"/>
+              </a:defRPr>
+            </a:pPr>
+            <a:r>
+              <a:t>Type. Press Enter. It replies. Type 'exit' to leave.</a:t>
+            </a:r>
+          </a:p>
+        </p:txBody>
+      </p:sp>
+      <p:sp>
+        <p:nvSpPr>
+          <p:cNvPr id="6" name="Rounded Rectangle 5"/>
           <p:cNvSpPr/>
           <p:nvPr/>
         </p:nvSpPr>
         <p:spPr>
           <a:xfrm>
-            <a:off x="548640" y="2286000"/>
-            <a:ext cx="3383280" cy="1645920"/>
+            <a:off x="731520" y="1965960"/>
+            <a:ext cx="10698480" cy="3200400"/>
           </a:xfrm>
           <a:prstGeom prst="roundRect">
             <a:avLst/>
           </a:prstGeom>
           <a:solidFill>
-            <a:srgbClr val="3467A6"/>
+            <a:srgbClr val="121A24"/>
           </a:solidFill>
           <a:ln>
             <a:noFill/>
@@ -11980,14 +14103,14 @@
       </p:sp>
       <p:sp>
         <p:nvSpPr>
-          <p:cNvPr id="6" name="TextBox 5"/>
+          <p:cNvPr id="7" name="TextBox 6"/>
           <p:cNvSpPr txBox="1"/>
           <p:nvPr/>
         </p:nvSpPr>
         <p:spPr>
           <a:xfrm>
-            <a:off x="685800" y="2450592"/>
-            <a:ext cx="3108960" cy="1371600"/>
+            <a:off x="960120" y="2130552"/>
+            <a:ext cx="10241280" cy="2926080"/>
           </a:xfrm>
           <a:prstGeom prst="rect">
             <a:avLst/>
@@ -12000,79 +14123,113 @@
           </a:bodyPr>
           <a:lstStyle/>
           <a:p>
-            <a:pPr algn="ctr">
+            <a:pPr algn="l">
               <a:lnSpc>
-                <a:spcPct val="105000"/>
+                <a:spcPct val="115000"/>
               </a:lnSpc>
-              <a:defRPr sz="1500" b="1">
-                <a:solidFill>
-                  <a:srgbClr val="FFFFFF"/>
-                </a:solidFill>
-                <a:latin typeface="Segoe UI"/>
-              </a:defRPr>
-            </a:pPr>
-            <a:r>
-              <a:t>Your OpenClaw</a:t>
-            </a:r>
-          </a:p>
-          <a:p>
-            <a:pPr algn="ctr">
+              <a:defRPr sz="1500" b="0">
+                <a:solidFill>
+                  <a:srgbClr val="9BE38A"/>
+                </a:solidFill>
+                <a:latin typeface="Consolas"/>
+              </a:defRPr>
+            </a:pPr>
+            <a:r>
+              <a:t>$ openclaw chat</a:t>
+            </a:r>
+          </a:p>
+          <a:p>
+            <a:pPr algn="l">
               <a:lnSpc>
-                <a:spcPct val="105000"/>
+                <a:spcPct val="115000"/>
               </a:lnSpc>
-              <a:defRPr sz="1500" b="1">
-                <a:solidFill>
-                  <a:srgbClr val="FFFFFF"/>
-                </a:solidFill>
-                <a:latin typeface="Segoe UI"/>
-              </a:defRPr>
-            </a:pPr>
-            <a:r>
-              <a:t>assistant</a:t>
-            </a:r>
-          </a:p>
-        </p:txBody>
-      </p:sp>
-      <p:sp>
-        <p:nvSpPr>
-          <p:cNvPr id="7" name="Right Arrow 6"/>
-          <p:cNvSpPr/>
-          <p:nvPr/>
-        </p:nvSpPr>
-        <p:spPr>
-          <a:xfrm>
-            <a:off x="4114800" y="2788920"/>
-            <a:ext cx="640080" cy="640080"/>
-          </a:xfrm>
-          <a:prstGeom prst="rightArrow">
-            <a:avLst/>
-          </a:prstGeom>
-          <a:solidFill>
-            <a:srgbClr val="FF9933"/>
-          </a:solidFill>
-          <a:ln>
-            <a:noFill/>
-          </a:ln>
-        </p:spPr>
-        <p:style>
-          <a:lnRef idx="1">
-            <a:schemeClr val="accent1"/>
-          </a:lnRef>
-          <a:fillRef idx="3">
-            <a:schemeClr val="accent1"/>
-          </a:fillRef>
-          <a:effectRef idx="2">
-            <a:schemeClr val="accent1"/>
-          </a:effectRef>
-          <a:fontRef idx="minor">
-            <a:schemeClr val="lt1"/>
-          </a:fontRef>
-        </p:style>
-        <p:txBody>
-          <a:bodyPr rtlCol="0" anchor="ctr"/>
-          <a:lstStyle/>
-          <a:p>
-            <a:pPr algn="ctr"/>
+              <a:defRPr sz="1500" b="0">
+                <a:solidFill>
+                  <a:srgbClr val="9BE38A"/>
+                </a:solidFill>
+                <a:latin typeface="Consolas"/>
+              </a:defRPr>
+            </a:pPr>
+            <a:r>
+              <a:t>You: Introduce yourself in two sentences.</a:t>
+            </a:r>
+          </a:p>
+          <a:p>
+            <a:pPr algn="l">
+              <a:lnSpc>
+                <a:spcPct val="115000"/>
+              </a:lnSpc>
+              <a:defRPr sz="1500" b="0">
+                <a:solidFill>
+                  <a:srgbClr val="9BE38A"/>
+                </a:solidFill>
+                <a:latin typeface="Consolas"/>
+              </a:defRPr>
+            </a:pPr>
+          </a:p>
+          <a:p>
+            <a:pPr algn="l">
+              <a:lnSpc>
+                <a:spcPct val="115000"/>
+              </a:lnSpc>
+              <a:defRPr sz="1500" b="0">
+                <a:solidFill>
+                  <a:srgbClr val="9BE38A"/>
+                </a:solidFill>
+                <a:latin typeface="Consolas"/>
+              </a:defRPr>
+            </a:pPr>
+            <a:r>
+              <a:t>Clawd: Hi! I'm your AI assistant. I can read and write</a:t>
+            </a:r>
+          </a:p>
+          <a:p>
+            <a:pPr algn="l">
+              <a:lnSpc>
+                <a:spcPct val="115000"/>
+              </a:lnSpc>
+              <a:defRPr sz="1500" b="0">
+                <a:solidFill>
+                  <a:srgbClr val="9BE38A"/>
+                </a:solidFill>
+                <a:latin typeface="Consolas"/>
+              </a:defRPr>
+            </a:pPr>
+            <a:r>
+              <a:t>       files, run commands, and remember you.</a:t>
+            </a:r>
+          </a:p>
+          <a:p>
+            <a:pPr algn="l">
+              <a:lnSpc>
+                <a:spcPct val="115000"/>
+              </a:lnSpc>
+              <a:defRPr sz="1500" b="0">
+                <a:solidFill>
+                  <a:srgbClr val="9BE38A"/>
+                </a:solidFill>
+                <a:latin typeface="Consolas"/>
+              </a:defRPr>
+            </a:pPr>
+            <a:r>
+              <a:t>       What would you like to build today?</a:t>
+            </a:r>
+          </a:p>
+          <a:p>
+            <a:pPr algn="l">
+              <a:lnSpc>
+                <a:spcPct val="115000"/>
+              </a:lnSpc>
+              <a:defRPr sz="1500" b="0">
+                <a:solidFill>
+                  <a:srgbClr val="9BE38A"/>
+                </a:solidFill>
+                <a:latin typeface="Consolas"/>
+              </a:defRPr>
+            </a:pPr>
+            <a:r>
+              <a:t>You: _</a:t>
+            </a:r>
           </a:p>
         </p:txBody>
       </p:sp>
@@ -12084,149 +14241,8 @@
         </p:nvSpPr>
         <p:spPr>
           <a:xfrm>
-            <a:off x="4846320" y="2286000"/>
-            <a:ext cx="2468880" cy="1645920"/>
-          </a:xfrm>
-          <a:prstGeom prst="roundRect">
-            <a:avLst/>
-          </a:prstGeom>
-          <a:solidFill>
-            <a:srgbClr val="9C27B0"/>
-          </a:solidFill>
-          <a:ln>
-            <a:noFill/>
-          </a:ln>
-        </p:spPr>
-        <p:style>
-          <a:lnRef idx="1">
-            <a:schemeClr val="accent1"/>
-          </a:lnRef>
-          <a:fillRef idx="3">
-            <a:schemeClr val="accent1"/>
-          </a:fillRef>
-          <a:effectRef idx="2">
-            <a:schemeClr val="accent1"/>
-          </a:effectRef>
-          <a:fontRef idx="minor">
-            <a:schemeClr val="lt1"/>
-          </a:fontRef>
-        </p:style>
-        <p:txBody>
-          <a:bodyPr rtlCol="0" anchor="ctr"/>
-          <a:lstStyle/>
-          <a:p>
-            <a:pPr algn="ctr"/>
-          </a:p>
-        </p:txBody>
-      </p:sp>
-      <p:sp>
-        <p:nvSpPr>
-          <p:cNvPr id="9" name="TextBox 8"/>
-          <p:cNvSpPr txBox="1"/>
-          <p:nvPr/>
-        </p:nvSpPr>
-        <p:spPr>
-          <a:xfrm>
-            <a:off x="4983480" y="2450592"/>
-            <a:ext cx="2194560" cy="1371600"/>
-          </a:xfrm>
-          <a:prstGeom prst="rect">
-            <a:avLst/>
-          </a:prstGeom>
-          <a:noFill/>
-        </p:spPr>
-        <p:txBody>
-          <a:bodyPr wrap="square">
-            <a:spAutoFit/>
-          </a:bodyPr>
-          <a:lstStyle/>
-          <a:p>
-            <a:pPr algn="ctr">
-              <a:lnSpc>
-                <a:spcPct val="105000"/>
-              </a:lnSpc>
-              <a:defRPr sz="1500" b="1">
-                <a:solidFill>
-                  <a:srgbClr val="FFFFFF"/>
-                </a:solidFill>
-                <a:latin typeface="Segoe UI"/>
-              </a:defRPr>
-            </a:pPr>
-            <a:r>
-              <a:t>OpenRouter</a:t>
-            </a:r>
-          </a:p>
-          <a:p>
-            <a:pPr algn="ctr">
-              <a:lnSpc>
-                <a:spcPct val="105000"/>
-              </a:lnSpc>
-              <a:defRPr sz="1500" b="1">
-                <a:solidFill>
-                  <a:srgbClr val="FFFFFF"/>
-                </a:solidFill>
-                <a:latin typeface="Segoe UI"/>
-              </a:defRPr>
-            </a:pPr>
-            <a:r>
-              <a:t>(one API key)</a:t>
-            </a:r>
-          </a:p>
-        </p:txBody>
-      </p:sp>
-      <p:sp>
-        <p:nvSpPr>
-          <p:cNvPr id="10" name="Right Arrow 9"/>
-          <p:cNvSpPr/>
-          <p:nvPr/>
-        </p:nvSpPr>
-        <p:spPr>
-          <a:xfrm>
-            <a:off x="7498079" y="2788920"/>
-            <a:ext cx="640080" cy="640080"/>
-          </a:xfrm>
-          <a:prstGeom prst="rightArrow">
-            <a:avLst/>
-          </a:prstGeom>
-          <a:solidFill>
-            <a:srgbClr val="FF9933"/>
-          </a:solidFill>
-          <a:ln>
-            <a:noFill/>
-          </a:ln>
-        </p:spPr>
-        <p:style>
-          <a:lnRef idx="1">
-            <a:schemeClr val="accent1"/>
-          </a:lnRef>
-          <a:fillRef idx="3">
-            <a:schemeClr val="accent1"/>
-          </a:fillRef>
-          <a:effectRef idx="2">
-            <a:schemeClr val="accent1"/>
-          </a:effectRef>
-          <a:fontRef idx="minor">
-            <a:schemeClr val="lt1"/>
-          </a:fontRef>
-        </p:style>
-        <p:txBody>
-          <a:bodyPr rtlCol="0" anchor="ctr"/>
-          <a:lstStyle/>
-          <a:p>
-            <a:pPr algn="ctr"/>
-          </a:p>
-        </p:txBody>
-      </p:sp>
-      <p:sp>
-        <p:nvSpPr>
-          <p:cNvPr id="11" name="Rounded Rectangle 10"/>
-          <p:cNvSpPr/>
-          <p:nvPr/>
-        </p:nvSpPr>
-        <p:spPr>
-          <a:xfrm>
-            <a:off x="8229600" y="2286000"/>
-            <a:ext cx="3383280" cy="1645920"/>
+            <a:off x="914400" y="5760720"/>
+            <a:ext cx="10360152" cy="640080"/>
           </a:xfrm>
           <a:prstGeom prst="roundRect">
             <a:avLst/>
@@ -12253,140 +14269,6 @@
           </a:fontRef>
         </p:style>
         <p:txBody>
-          <a:bodyPr rtlCol="0" anchor="ctr"/>
-          <a:lstStyle/>
-          <a:p>
-            <a:pPr algn="ctr"/>
-          </a:p>
-        </p:txBody>
-      </p:sp>
-      <p:sp>
-        <p:nvSpPr>
-          <p:cNvPr id="12" name="TextBox 11"/>
-          <p:cNvSpPr txBox="1"/>
-          <p:nvPr/>
-        </p:nvSpPr>
-        <p:spPr>
-          <a:xfrm>
-            <a:off x="8366760" y="2450592"/>
-            <a:ext cx="3108960" cy="1371600"/>
-          </a:xfrm>
-          <a:prstGeom prst="rect">
-            <a:avLst/>
-          </a:prstGeom>
-          <a:noFill/>
-        </p:spPr>
-        <p:txBody>
-          <a:bodyPr wrap="square">
-            <a:spAutoFit/>
-          </a:bodyPr>
-          <a:lstStyle/>
-          <a:p>
-            <a:pPr algn="ctr">
-              <a:lnSpc>
-                <a:spcPct val="105000"/>
-              </a:lnSpc>
-              <a:defRPr sz="1500" b="1">
-                <a:solidFill>
-                  <a:srgbClr val="FFFFFF"/>
-                </a:solidFill>
-                <a:latin typeface="Segoe UI"/>
-              </a:defRPr>
-            </a:pPr>
-            <a:r>
-              <a:t>Many AI models</a:t>
-            </a:r>
-          </a:p>
-          <a:p>
-            <a:pPr algn="ctr">
-              <a:lnSpc>
-                <a:spcPct val="105000"/>
-              </a:lnSpc>
-              <a:defRPr sz="1500" b="1">
-                <a:solidFill>
-                  <a:srgbClr val="FFFFFF"/>
-                </a:solidFill>
-                <a:latin typeface="Segoe UI"/>
-              </a:defRPr>
-            </a:pPr>
-            <a:r>
-              <a:t>DeepSeek, and more</a:t>
-            </a:r>
-          </a:p>
-        </p:txBody>
-      </p:sp>
-      <p:sp>
-        <p:nvSpPr>
-          <p:cNvPr id="13" name="TextBox 12"/>
-          <p:cNvSpPr txBox="1"/>
-          <p:nvPr/>
-        </p:nvSpPr>
-        <p:spPr>
-          <a:xfrm>
-            <a:off x="548640" y="4297680"/>
-            <a:ext cx="11064240" cy="548640"/>
-          </a:xfrm>
-          <a:prstGeom prst="rect">
-            <a:avLst/>
-          </a:prstGeom>
-          <a:noFill/>
-        </p:spPr>
-        <p:txBody>
-          <a:bodyPr wrap="square">
-            <a:spAutoFit/>
-          </a:bodyPr>
-          <a:lstStyle/>
-          <a:p>
-            <a:pPr algn="ctr">
-              <a:defRPr sz="1800" b="1">
-                <a:solidFill>
-                  <a:srgbClr val="424242"/>
-                </a:solidFill>
-                <a:latin typeface="Segoe UI"/>
-              </a:defRPr>
-            </a:pPr>
-            <a:r>
-              <a:t>Today's model: DeepSeek V4 Flash — fast and low-cost.</a:t>
-            </a:r>
-          </a:p>
-        </p:txBody>
-      </p:sp>
-      <p:sp>
-        <p:nvSpPr>
-          <p:cNvPr id="14" name="Rounded Rectangle 13"/>
-          <p:cNvSpPr/>
-          <p:nvPr/>
-        </p:nvSpPr>
-        <p:spPr>
-          <a:xfrm>
-            <a:off x="914400" y="5760720"/>
-            <a:ext cx="10360152" cy="640080"/>
-          </a:xfrm>
-          <a:prstGeom prst="roundRect">
-            <a:avLst/>
-          </a:prstGeom>
-          <a:solidFill>
-            <a:srgbClr val="FF9933"/>
-          </a:solidFill>
-          <a:ln>
-            <a:noFill/>
-          </a:ln>
-        </p:spPr>
-        <p:style>
-          <a:lnRef idx="1">
-            <a:schemeClr val="accent1"/>
-          </a:lnRef>
-          <a:fillRef idx="3">
-            <a:schemeClr val="accent1"/>
-          </a:fillRef>
-          <a:effectRef idx="2">
-            <a:schemeClr val="accent1"/>
-          </a:effectRef>
-          <a:fontRef idx="minor">
-            <a:schemeClr val="lt1"/>
-          </a:fontRef>
-        </p:style>
-        <p:txBody>
           <a:bodyPr rtlCol="0" anchor="ctr" wrap="square"/>
           <a:lstStyle/>
           <a:p>
@@ -12402,7 +14284,7 @@
               </a:defRPr>
             </a:pPr>
             <a:r>
-              <a:t>One API key unlocks lots of different AI models.</a:t>
+              <a:t>No phone, no website — just you and your assistant in the terminal.</a:t>
             </a:r>
           </a:p>
         </p:txBody>
